--- a/preview/secteur_Technology_S&P_500/secteur_Technology_S&P_500.pptx
+++ b/preview/secteur_Technology_S&P_500/secteur_Technology_S&P_500.pptx
@@ -11934,7 +11934,7 @@
         </p:nvGraphicFramePr>
         <p:xfrm>
           <a:off x="324000" y="1260000"/>
-          <a:ext cx="8495997" cy="1814400"/>
+          <a:ext cx="8495997" cy="1782000"/>
         </p:xfrm>
         <a:graphic>
           <a:graphicData uri="http://schemas.openxmlformats.org/drawingml/2006/table">
@@ -11951,7 +11951,7 @@
                 <a:gridCol w="1607351"/>
                 <a:gridCol w="956756"/>
               </a:tblGrid>
-              <a:tr h="201600">
+              <a:tr h="198000">
                 <a:tc>
                   <a:txBody>
                     <a:bodyPr/>
@@ -12107,7 +12107,7 @@
                   </a:tcPr>
                 </a:tc>
               </a:tr>
-              <a:tr h="201600">
+              <a:tr h="198000">
                 <a:tc>
                   <a:txBody>
                     <a:bodyPr/>
@@ -12249,7 +12249,7 @@
                   </a:tcPr>
                 </a:tc>
               </a:tr>
-              <a:tr h="201600">
+              <a:tr h="198000">
                 <a:tc>
                   <a:txBody>
                     <a:bodyPr/>
@@ -12405,7 +12405,7 @@
                   </a:tcPr>
                 </a:tc>
               </a:tr>
-              <a:tr h="201600">
+              <a:tr h="198000">
                 <a:tc>
                   <a:txBody>
                     <a:bodyPr/>
@@ -12547,7 +12547,7 @@
                   </a:tcPr>
                 </a:tc>
               </a:tr>
-              <a:tr h="201600">
+              <a:tr h="198000">
                 <a:tc>
                   <a:txBody>
                     <a:bodyPr/>
@@ -12703,7 +12703,7 @@
                   </a:tcPr>
                 </a:tc>
               </a:tr>
-              <a:tr h="201600">
+              <a:tr h="198000">
                 <a:tc>
                   <a:txBody>
                     <a:bodyPr/>
@@ -12845,7 +12845,7 @@
                   </a:tcPr>
                 </a:tc>
               </a:tr>
-              <a:tr h="201600">
+              <a:tr h="198000">
                 <a:tc>
                   <a:txBody>
                     <a:bodyPr/>
@@ -13001,7 +13001,7 @@
                   </a:tcPr>
                 </a:tc>
               </a:tr>
-              <a:tr h="201600">
+              <a:tr h="198000">
                 <a:tc>
                   <a:txBody>
                     <a:bodyPr/>
@@ -13143,7 +13143,7 @@
                   </a:tcPr>
                 </a:tc>
               </a:tr>
-              <a:tr h="201600">
+              <a:tr h="198000">
                 <a:tc>
                   <a:txBody>
                     <a:bodyPr/>
@@ -13311,8 +13311,8 @@
         </p:nvSpPr>
         <p:spPr>
           <a:xfrm>
-            <a:off x="324000" y="2916000"/>
-            <a:ext cx="8496000" cy="1007999"/>
+            <a:off x="324000" y="3114000"/>
+            <a:ext cx="8496000" cy="576000"/>
           </a:xfrm>
           <a:prstGeom prst="rect">
             <a:avLst/>
@@ -13354,8 +13354,8 @@
         </p:nvSpPr>
         <p:spPr>
           <a:xfrm>
-            <a:off x="324000" y="2916000"/>
-            <a:ext cx="36000" cy="1007999"/>
+            <a:off x="324000" y="3114000"/>
+            <a:ext cx="36000" cy="576000"/>
           </a:xfrm>
           <a:prstGeom prst="rect">
             <a:avLst/>
@@ -13397,8 +13397,8 @@
         </p:nvSpPr>
         <p:spPr>
           <a:xfrm>
-            <a:off x="468000" y="2951999"/>
-            <a:ext cx="8316000" cy="216000"/>
+            <a:off x="468000" y="3142800"/>
+            <a:ext cx="8316000" cy="180000"/>
           </a:xfrm>
           <a:prstGeom prst="rect">
             <a:avLst/>
@@ -13413,7 +13413,7 @@
           <a:p>
             <a:pPr algn="l"/>
             <a:r>
-              <a:rPr sz="850" b="1" i="0">
+              <a:rPr sz="800" b="1" i="0">
                 <a:solidFill>
                   <a:srgbClr val="B06000"/>
                 </a:solidFill>
@@ -13431,8 +13431,8 @@
         </p:nvSpPr>
         <p:spPr>
           <a:xfrm>
-            <a:off x="468000" y="3186000"/>
-            <a:ext cx="8316000" cy="720000"/>
+            <a:off x="468000" y="3330000"/>
+            <a:ext cx="8316000" cy="324000"/>
           </a:xfrm>
           <a:prstGeom prst="rect">
             <a:avLst/>
@@ -13447,12 +13447,12 @@
           <a:p>
             <a:pPr algn="l"/>
             <a:r>
-              <a:rPr sz="800" b="0" i="0">
+              <a:rPr sz="750" b="0" i="0">
                 <a:solidFill>
                   <a:srgbClr val="555555"/>
                 </a:solidFill>
               </a:rPr>
-              <a:t>La probabilite de rendement positif a 12 mois est calculee sur des configurations similaires identifiees en backtesting sur données historiques (2010-2024). Elle ne constitue pas une garantie de performance future. Le DCF Base est estime a partir du WACC median sectoriel et d'un taux de croissance terminal cohérent avec les drivers sectoriels.</a:t>
+              <a:t>La probabilite de rendement positif a 12 mois est calculee sur des configurations similaires identifiees en backtesting sur donnees historiques (2010-2024). Elle ne constitue pas une garantie de performance future.</a:t>
             </a:r>
           </a:p>
         </p:txBody>
@@ -14861,7 +14861,7 @@
         <p:spPr>
           <a:xfrm>
             <a:off x="324000" y="900000"/>
-            <a:ext cx="2700000" cy="1980000"/>
+            <a:ext cx="2700000" cy="1152000"/>
           </a:xfrm>
           <a:prstGeom prst="rect">
             <a:avLst/>
@@ -14981,7 +14981,7 @@
         <p:spPr>
           <a:xfrm>
             <a:off x="396000" y="1188000"/>
-            <a:ext cx="2520000" cy="1620000"/>
+            <a:ext cx="2520000" cy="792000"/>
           </a:xfrm>
           <a:prstGeom prst="rect">
             <a:avLst/>
@@ -15015,7 +15015,7 @@
         <p:spPr>
           <a:xfrm>
             <a:off x="3240000" y="900000"/>
-            <a:ext cx="2700000" cy="1980000"/>
+            <a:ext cx="2700000" cy="1152000"/>
           </a:xfrm>
           <a:prstGeom prst="rect">
             <a:avLst/>
@@ -15135,7 +15135,7 @@
         <p:spPr>
           <a:xfrm>
             <a:off x="3311999" y="1188000"/>
-            <a:ext cx="2520000" cy="1620000"/>
+            <a:ext cx="2520000" cy="792000"/>
           </a:xfrm>
           <a:prstGeom prst="rect">
             <a:avLst/>
@@ -15169,7 +15169,7 @@
         <p:spPr>
           <a:xfrm>
             <a:off x="6155999" y="900000"/>
-            <a:ext cx="2700000" cy="1980000"/>
+            <a:ext cx="2700000" cy="1152000"/>
           </a:xfrm>
           <a:prstGeom prst="rect">
             <a:avLst/>
@@ -15289,7 +15289,7 @@
         <p:spPr>
           <a:xfrm>
             <a:off x="6227999" y="1188000"/>
-            <a:ext cx="2520000" cy="1620000"/>
+            <a:ext cx="2520000" cy="792000"/>
           </a:xfrm>
           <a:prstGeom prst="rect">
             <a:avLst/>
@@ -15322,7 +15322,7 @@
         </p:nvSpPr>
         <p:spPr>
           <a:xfrm>
-            <a:off x="324000" y="2951999"/>
+            <a:off x="324000" y="2196000"/>
             <a:ext cx="8496000" cy="216000"/>
           </a:xfrm>
           <a:prstGeom prst="rect">
@@ -15357,7 +15357,7 @@
           <p:nvPr/>
         </p:nvGraphicFramePr>
         <p:xfrm>
-          <a:off x="324000" y="3204000"/>
+          <a:off x="324000" y="2448000"/>
           <a:ext cx="8496000" cy="1116000"/>
         </p:xfrm>
         <a:graphic>
@@ -28453,7 +28453,7 @@
         </p:nvSpPr>
         <p:spPr>
           <a:xfrm>
-            <a:off x="324000" y="3780000"/>
+            <a:off x="324000" y="2988000"/>
             <a:ext cx="8496000" cy="1007999"/>
           </a:xfrm>
           <a:prstGeom prst="rect">
@@ -28496,7 +28496,7 @@
         </p:nvSpPr>
         <p:spPr>
           <a:xfrm>
-            <a:off x="324000" y="3780000"/>
+            <a:off x="324000" y="2988000"/>
             <a:ext cx="8496000" cy="251999"/>
           </a:xfrm>
           <a:prstGeom prst="rect">
@@ -28539,7 +28539,7 @@
         </p:nvSpPr>
         <p:spPr>
           <a:xfrm>
-            <a:off x="396000" y="3798000"/>
+            <a:off x="396000" y="3006000"/>
             <a:ext cx="8352000" cy="216000"/>
           </a:xfrm>
           <a:prstGeom prst="rect">
@@ -28573,7 +28573,7 @@
         </p:nvSpPr>
         <p:spPr>
           <a:xfrm>
-            <a:off x="396000" y="4068000"/>
+            <a:off x="396000" y="3276000"/>
             <a:ext cx="8352000" cy="720000"/>
           </a:xfrm>
           <a:prstGeom prst="rect">
@@ -28594,7 +28594,7 @@
                   <a:srgbClr val="555555"/>
                 </a:solidFill>
               </a:rPr>
-              <a:t>La médiane EV/EBITDA sectorielle s etablit a 20.5x LTM. Alphabet Inc. (21.7x) se distingue comme le leader de qualité, combine a une marge EBITDA de 37.3 % et une croissance de +18.0 %. La dispersion des multiples revele la hétérogénéité des profils au sein du secteur Technology — une lecture croisee P/E vs EV/EBITDA permet d'isoler les effets de structure de capital et les distorsions comptables.</a:t>
+              <a:t>La mediane EV/EBITDA sectorielle s etablit a 20.5x LTM. Alphabet Inc. (21.7x) se distingue comme le leader de qualite, combine a une marge EBITDA de 37.3 % et une croissance de +18.0 %. La dispersion des multiples revele l heterogeneite des profils au sein du secteur Technology — une lecture croisee P/E vs EV/EBITDA permet d isoler les effets de structure de capital et les distorsions comptables.</a:t>
             </a:r>
           </a:p>
         </p:txBody>
@@ -33057,8 +33057,8 @@
         </p:nvSpPr>
         <p:spPr>
           <a:xfrm>
-            <a:off x="324000" y="3348000"/>
-            <a:ext cx="8496000" cy="1440000"/>
+            <a:off x="324000" y="2822400"/>
+            <a:ext cx="8496000" cy="2037600"/>
           </a:xfrm>
           <a:prstGeom prst="rect">
             <a:avLst/>
@@ -33100,8 +33100,8 @@
         </p:nvSpPr>
         <p:spPr>
           <a:xfrm>
-            <a:off x="324000" y="3348000"/>
-            <a:ext cx="36000" cy="1440000"/>
+            <a:off x="324000" y="2822400"/>
+            <a:ext cx="36000" cy="2037600"/>
           </a:xfrm>
           <a:prstGeom prst="rect">
             <a:avLst/>
@@ -33143,7 +33143,7 @@
         </p:nvSpPr>
         <p:spPr>
           <a:xfrm>
-            <a:off x="468000" y="3401999"/>
+            <a:off x="468000" y="2876400"/>
             <a:ext cx="8280000" cy="216000"/>
           </a:xfrm>
           <a:prstGeom prst="rect">
@@ -33177,8 +33177,8 @@
         </p:nvSpPr>
         <p:spPr>
           <a:xfrm>
-            <a:off x="468000" y="3636000"/>
-            <a:ext cx="8280000" cy="1080000"/>
+            <a:off x="468000" y="3128400"/>
+            <a:ext cx="8280000" cy="1677600"/>
           </a:xfrm>
           <a:prstGeom prst="rect">
             <a:avLst/>

--- a/preview/secteur_Technology_S&P_500/secteur_Technology_S&P_500.pptx
+++ b/preview/secteur_Technology_S&P_500/secteur_Technology_S&P_500.pptx
@@ -22061,7 +22061,7 @@
         <p:spPr>
           <a:xfrm>
             <a:off x="6192000" y="1134000"/>
-            <a:ext cx="2556000" cy="180000"/>
+            <a:ext cx="2556000" cy="216000"/>
           </a:xfrm>
           <a:prstGeom prst="rect">
             <a:avLst/>
@@ -22076,7 +22076,7 @@
           <a:p>
             <a:pPr algn="l"/>
             <a:r>
-              <a:rPr sz="750" b="1" i="0">
+              <a:rPr sz="900" b="1" i="0">
                 <a:solidFill>
                   <a:srgbClr val="1B3A6B"/>
                 </a:solidFill>
@@ -22094,8 +22094,8 @@
         </p:nvSpPr>
         <p:spPr>
           <a:xfrm>
-            <a:off x="6192000" y="1314000"/>
-            <a:ext cx="2556000" cy="162000"/>
+            <a:off x="6192000" y="1357200"/>
+            <a:ext cx="2556000" cy="180000"/>
           </a:xfrm>
           <a:prstGeom prst="rect">
             <a:avLst/>
@@ -22110,7 +22110,7 @@
           <a:p>
             <a:pPr algn="l"/>
             <a:r>
-              <a:rPr sz="700" b="0" i="0">
+              <a:rPr sz="800" b="0" i="0">
                 <a:solidFill>
                   <a:srgbClr val="555555"/>
                 </a:solidFill>
@@ -22172,7 +22172,7 @@
         <p:spPr>
           <a:xfrm>
             <a:off x="6192000" y="1464749"/>
-            <a:ext cx="2556000" cy="180000"/>
+            <a:ext cx="2556000" cy="216000"/>
           </a:xfrm>
           <a:prstGeom prst="rect">
             <a:avLst/>
@@ -22187,7 +22187,7 @@
           <a:p>
             <a:pPr algn="l"/>
             <a:r>
-              <a:rPr sz="750" b="1" i="0">
+              <a:rPr sz="900" b="1" i="0">
                 <a:solidFill>
                   <a:srgbClr val="1B3A6B"/>
                 </a:solidFill>
@@ -22205,8 +22205,8 @@
         </p:nvSpPr>
         <p:spPr>
           <a:xfrm>
-            <a:off x="6192000" y="1644749"/>
-            <a:ext cx="2556000" cy="162000"/>
+            <a:off x="6192000" y="1687950"/>
+            <a:ext cx="2556000" cy="180000"/>
           </a:xfrm>
           <a:prstGeom prst="rect">
             <a:avLst/>
@@ -22221,7 +22221,7 @@
           <a:p>
             <a:pPr algn="l"/>
             <a:r>
-              <a:rPr sz="700" b="0" i="0">
+              <a:rPr sz="800" b="0" i="0">
                 <a:solidFill>
                   <a:srgbClr val="555555"/>
                 </a:solidFill>
@@ -22283,7 +22283,7 @@
         <p:spPr>
           <a:xfrm>
             <a:off x="6192000" y="1795500"/>
-            <a:ext cx="2556000" cy="180000"/>
+            <a:ext cx="2556000" cy="216000"/>
           </a:xfrm>
           <a:prstGeom prst="rect">
             <a:avLst/>
@@ -22298,7 +22298,7 @@
           <a:p>
             <a:pPr algn="l"/>
             <a:r>
-              <a:rPr sz="750" b="1" i="0">
+              <a:rPr sz="900" b="1" i="0">
                 <a:solidFill>
                   <a:srgbClr val="1B3A6B"/>
                 </a:solidFill>
@@ -22316,8 +22316,8 @@
         </p:nvSpPr>
         <p:spPr>
           <a:xfrm>
-            <a:off x="6192000" y="1975500"/>
-            <a:ext cx="2556000" cy="162000"/>
+            <a:off x="6192000" y="2018700"/>
+            <a:ext cx="2556000" cy="180000"/>
           </a:xfrm>
           <a:prstGeom prst="rect">
             <a:avLst/>
@@ -22332,7 +22332,7 @@
           <a:p>
             <a:pPr algn="l"/>
             <a:r>
-              <a:rPr sz="700" b="0" i="0">
+              <a:rPr sz="800" b="0" i="0">
                 <a:solidFill>
                   <a:srgbClr val="555555"/>
                 </a:solidFill>
@@ -22394,7 +22394,7 @@
         <p:spPr>
           <a:xfrm>
             <a:off x="6192000" y="2126250"/>
-            <a:ext cx="2556000" cy="180000"/>
+            <a:ext cx="2556000" cy="216000"/>
           </a:xfrm>
           <a:prstGeom prst="rect">
             <a:avLst/>
@@ -22409,7 +22409,7 @@
           <a:p>
             <a:pPr algn="l"/>
             <a:r>
-              <a:rPr sz="750" b="1" i="0">
+              <a:rPr sz="900" b="1" i="0">
                 <a:solidFill>
                   <a:srgbClr val="1B3A6B"/>
                 </a:solidFill>
@@ -22427,8 +22427,8 @@
         </p:nvSpPr>
         <p:spPr>
           <a:xfrm>
-            <a:off x="6192000" y="2306250"/>
-            <a:ext cx="2556000" cy="162000"/>
+            <a:off x="6192000" y="2349450"/>
+            <a:ext cx="2556000" cy="180000"/>
           </a:xfrm>
           <a:prstGeom prst="rect">
             <a:avLst/>
@@ -22443,7 +22443,7 @@
           <a:p>
             <a:pPr algn="l"/>
             <a:r>
-              <a:rPr sz="700" b="0" i="0">
+              <a:rPr sz="800" b="0" i="0">
                 <a:solidFill>
                   <a:srgbClr val="555555"/>
                 </a:solidFill>
@@ -22505,7 +22505,7 @@
         <p:spPr>
           <a:xfrm>
             <a:off x="6192000" y="2456999"/>
-            <a:ext cx="2556000" cy="180000"/>
+            <a:ext cx="2556000" cy="216000"/>
           </a:xfrm>
           <a:prstGeom prst="rect">
             <a:avLst/>
@@ -22520,7 +22520,7 @@
           <a:p>
             <a:pPr algn="l"/>
             <a:r>
-              <a:rPr sz="750" b="1" i="0">
+              <a:rPr sz="900" b="1" i="0">
                 <a:solidFill>
                   <a:srgbClr val="1B3A6B"/>
                 </a:solidFill>
@@ -22538,8 +22538,8 @@
         </p:nvSpPr>
         <p:spPr>
           <a:xfrm>
-            <a:off x="6192000" y="2636999"/>
-            <a:ext cx="2556000" cy="162000"/>
+            <a:off x="6192000" y="2680200"/>
+            <a:ext cx="2556000" cy="180000"/>
           </a:xfrm>
           <a:prstGeom prst="rect">
             <a:avLst/>
@@ -22554,7 +22554,7 @@
           <a:p>
             <a:pPr algn="l"/>
             <a:r>
-              <a:rPr sz="700" b="0" i="0">
+              <a:rPr sz="800" b="0" i="0">
                 <a:solidFill>
                   <a:srgbClr val="555555"/>
                 </a:solidFill>
@@ -22616,7 +22616,7 @@
         <p:spPr>
           <a:xfrm>
             <a:off x="6192000" y="2787750"/>
-            <a:ext cx="2556000" cy="180000"/>
+            <a:ext cx="2556000" cy="216000"/>
           </a:xfrm>
           <a:prstGeom prst="rect">
             <a:avLst/>
@@ -22631,7 +22631,7 @@
           <a:p>
             <a:pPr algn="l"/>
             <a:r>
-              <a:rPr sz="750" b="1" i="0">
+              <a:rPr sz="900" b="1" i="0">
                 <a:solidFill>
                   <a:srgbClr val="1B3A6B"/>
                 </a:solidFill>
@@ -22649,8 +22649,8 @@
         </p:nvSpPr>
         <p:spPr>
           <a:xfrm>
-            <a:off x="6192000" y="2967750"/>
-            <a:ext cx="2556000" cy="162000"/>
+            <a:off x="6192000" y="3010950"/>
+            <a:ext cx="2556000" cy="180000"/>
           </a:xfrm>
           <a:prstGeom prst="rect">
             <a:avLst/>
@@ -22665,7 +22665,7 @@
           <a:p>
             <a:pPr algn="l"/>
             <a:r>
-              <a:rPr sz="700" b="0" i="0">
+              <a:rPr sz="800" b="0" i="0">
                 <a:solidFill>
                   <a:srgbClr val="555555"/>
                 </a:solidFill>
@@ -22727,7 +22727,7 @@
         <p:spPr>
           <a:xfrm>
             <a:off x="6192000" y="3118500"/>
-            <a:ext cx="2556000" cy="180000"/>
+            <a:ext cx="2556000" cy="216000"/>
           </a:xfrm>
           <a:prstGeom prst="rect">
             <a:avLst/>
@@ -22742,7 +22742,7 @@
           <a:p>
             <a:pPr algn="l"/>
             <a:r>
-              <a:rPr sz="750" b="1" i="0">
+              <a:rPr sz="900" b="1" i="0">
                 <a:solidFill>
                   <a:srgbClr val="1B3A6B"/>
                 </a:solidFill>
@@ -22760,8 +22760,8 @@
         </p:nvSpPr>
         <p:spPr>
           <a:xfrm>
-            <a:off x="6192000" y="3298500"/>
-            <a:ext cx="2556000" cy="162000"/>
+            <a:off x="6192000" y="3341699"/>
+            <a:ext cx="2556000" cy="180000"/>
           </a:xfrm>
           <a:prstGeom prst="rect">
             <a:avLst/>
@@ -22776,7 +22776,7 @@
           <a:p>
             <a:pPr algn="l"/>
             <a:r>
-              <a:rPr sz="700" b="0" i="0">
+              <a:rPr sz="800" b="0" i="0">
                 <a:solidFill>
                   <a:srgbClr val="555555"/>
                 </a:solidFill>
@@ -22838,7 +22838,7 @@
         <p:spPr>
           <a:xfrm>
             <a:off x="6192000" y="3449249"/>
-            <a:ext cx="2556000" cy="180000"/>
+            <a:ext cx="2556000" cy="216000"/>
           </a:xfrm>
           <a:prstGeom prst="rect">
             <a:avLst/>
@@ -22853,7 +22853,7 @@
           <a:p>
             <a:pPr algn="l"/>
             <a:r>
-              <a:rPr sz="750" b="1" i="0">
+              <a:rPr sz="900" b="1" i="0">
                 <a:solidFill>
                   <a:srgbClr val="1B3A6B"/>
                 </a:solidFill>
@@ -22871,8 +22871,8 @@
         </p:nvSpPr>
         <p:spPr>
           <a:xfrm>
-            <a:off x="6192000" y="3629249"/>
-            <a:ext cx="2556000" cy="162000"/>
+            <a:off x="6192000" y="3672449"/>
+            <a:ext cx="2556000" cy="180000"/>
           </a:xfrm>
           <a:prstGeom prst="rect">
             <a:avLst/>
@@ -22887,7 +22887,7 @@
           <a:p>
             <a:pPr algn="l"/>
             <a:r>
-              <a:rPr sz="700" b="0" i="0">
+              <a:rPr sz="800" b="0" i="0">
                 <a:solidFill>
                   <a:srgbClr val="555555"/>
                 </a:solidFill>

--- a/preview/secteur_Technology_S&P_500/secteur_Technology_S&P_500.pptx
+++ b/preview/secteur_Technology_S&P_500/secteur_Technology_S&P_500.pptx
@@ -3358,7 +3358,7 @@
                   <a:srgbClr val="FFFFFF"/>
                 </a:solidFill>
               </a:rPr>
-              <a:t>● SURPONDERER</a:t>
+              <a:t>● SURPONDÉRER</a:t>
             </a:r>
           </a:p>
         </p:txBody>
@@ -14847,7 +14847,7 @@
                   <a:srgbClr val="555555"/>
                 </a:solidFill>
               </a:rPr>
-              <a:t>Analyse des risques structurels  ·  These contraire  ·  Protocole Avocat du Diable</a:t>
+              <a:t>Analyse des risques structurels  ·  Thèse contraire  ·  Protocole Avocat du Diable</a:t>
             </a:r>
           </a:p>
         </p:txBody>
@@ -15870,7 +15870,7 @@
                   <a:srgbClr val="FFFFFF"/>
                 </a:solidFill>
               </a:rPr>
-              <a:t>Sentiment de Marche — FinBERT</a:t>
+              <a:t>Sentiment de Marché — FinBERT</a:t>
             </a:r>
           </a:p>
         </p:txBody>
@@ -16844,7 +16844,7 @@
                   <a:srgbClr val="1B3A6B"/>
                 </a:solidFill>
               </a:rPr>
-              <a:t>Themes dominants</a:t>
+              <a:t>Thèmes dominants</a:t>
             </a:r>
           </a:p>
         </p:txBody>
@@ -17915,7 +17915,7 @@
                             <a:srgbClr val="FFFFFF"/>
                           </a:solidFill>
                         </a:rPr>
-                        <a:t>Données collectees</a:t>
+                        <a:t>Données collectées</a:t>
                       </a:r>
                     </a:p>
                   </a:txBody>
@@ -17937,7 +17937,7 @@
                             <a:srgbClr val="FFFFFF"/>
                           </a:solidFill>
                         </a:rPr>
-                        <a:t>Frequence</a:t>
+                        <a:t>Fréquence</a:t>
                       </a:r>
                     </a:p>
                   </a:txBody>
@@ -18001,7 +18001,7 @@
                             <a:srgbClr val="1A1A1A"/>
                           </a:solidFill>
                         </a:rPr>
-                        <a:t>Cours, ratios, etats financiers LTM</a:t>
+                        <a:t>Cours, ratios, états financiers LTM</a:t>
                       </a:r>
                     </a:p>
                   </a:txBody>
@@ -18021,7 +18021,7 @@
                             <a:srgbClr val="1A1A1A"/>
                           </a:solidFill>
                         </a:rPr>
-                        <a:t>Temps reel / J-1</a:t>
+                        <a:t>Temps réel / J-1</a:t>
                       </a:r>
                     </a:p>
                   </a:txBody>
@@ -18109,7 +18109,7 @@
                             <a:srgbClr val="1A1A1A"/>
                           </a:solidFill>
                         </a:rPr>
-                        <a:t>A la demande</a:t>
+                        <a:t>À la demande</a:t>
                       </a:r>
                     </a:p>
                   </a:txBody>
@@ -18193,7 +18193,7 @@
                             <a:srgbClr val="1A1A1A"/>
                           </a:solidFill>
                         </a:rPr>
-                        <a:t>A la demande</a:t>
+                        <a:t>À la demande</a:t>
                       </a:r>
                     </a:p>
                   </a:txBody>
@@ -18259,7 +18259,7 @@
                             <a:srgbClr val="1A1A1A"/>
                           </a:solidFill>
                         </a:rPr>
-                        <a:t>Ratios calcules, scoring multifactoriel</a:t>
+                        <a:t>Ratios calculés, scoring multifactoriel</a:t>
                       </a:r>
                     </a:p>
                   </a:txBody>
@@ -18281,7 +18281,7 @@
                             <a:srgbClr val="1A1A1A"/>
                           </a:solidFill>
                         </a:rPr>
-                        <a:t>A la demande</a:t>
+                        <a:t>À la demande</a:t>
                       </a:r>
                     </a:p>
                   </a:txBody>
@@ -18345,7 +18345,7 @@
                             <a:srgbClr val="1A1A1A"/>
                           </a:solidFill>
                         </a:rPr>
-                        <a:t>These contraire, conviction delta</a:t>
+                        <a:t>Thèse contraire, conviction delta</a:t>
                       </a:r>
                     </a:p>
                   </a:txBody>
@@ -18365,7 +18365,7 @@
                             <a:srgbClr val="1A1A1A"/>
                           </a:solidFill>
                         </a:rPr>
-                        <a:t>A la demande</a:t>
+                        <a:t>À la demande</a:t>
                       </a:r>
                     </a:p>
                   </a:txBody>
@@ -18431,7 +18431,7 @@
                             <a:srgbClr val="1A1A1A"/>
                           </a:solidFill>
                         </a:rPr>
-                        <a:t>Validation coherence, flags erreur</a:t>
+                        <a:t>Validation cohérence, flags erreur</a:t>
                       </a:r>
                     </a:p>
                   </a:txBody>
@@ -18453,7 +18453,7 @@
                             <a:srgbClr val="1A1A1A"/>
                           </a:solidFill>
                         </a:rPr>
-                        <a:t>Systematique</a:t>
+                        <a:t>Systématique</a:t>
                       </a:r>
                     </a:p>
                   </a:txBody>
@@ -18617,7 +18617,7 @@
                   <a:srgbClr val="555555"/>
                 </a:solidFill>
               </a:rPr>
-              <a:t>Les données financieres historiques sont issues de sources publiques et peuvent presenter des delais ou inexactitudes. Les previsions sont basees sur le consensus et les modèles internes FinSight IA — elles ne constituent pas des engagements. La méthodologie de scoring est soumise a des biais inherents a toute approche quantitative.</a:t>
+              <a:t>Les données financières historiques sont issues de sources publiques et peuvent présenter des délais ou inexactitudes. Les prévisions sont basées sur le consensus et les modèles internes FinSight IA — elles ne constituent pas des engagements. La méthodologie de scoring est soumise à des biais inhérents à toute approche quantitative.</a:t>
             </a:r>
           </a:p>
         </p:txBody>
@@ -18694,7 +18694,7 @@
                   <a:srgbClr val="AAAAAA"/>
                 </a:solidFill>
               </a:rPr>
-              <a:t>Ce rapport est genere par FinSight IA v1.0. Il ne constitue pas un conseil en investissement au sens de la directive MiFID II (2014/65/UE). Document confidentiel — usage interne uniquement. Toute reproduction ou diffusion est interdite sans autorisation.</a:t>
+              <a:t>Ce rapport est généré par FinSight IA v1.0. Il ne constitue pas un conseil en investissement au sens de la directive MiFID II (2014/65/UE). Document confidentiel — usage interne uniquement. Toute reproduction ou diffusion est interdite sans autorisation.</a:t>
             </a:r>
           </a:p>
         </p:txBody>
@@ -19405,7 +19405,7 @@
                   <a:srgbClr val="1A7A4A"/>
                 </a:solidFill>
               </a:rPr>
-              <a:t>● SURPONDERER</a:t>
+              <a:t>● SURPONDÉRER</a:t>
             </a:r>
           </a:p>
         </p:txBody>
@@ -23055,7 +23055,7 @@
                   <a:srgbClr val="1B3A6B"/>
                 </a:solidFill>
               </a:rPr>
-              <a:t>Presentation du Secteur</a:t>
+              <a:t>Présentation du Secteur</a:t>
             </a:r>
           </a:p>
         </p:txBody>
@@ -23277,7 +23277,7 @@
                   <a:srgbClr val="1B3A6B"/>
                 </a:solidFill>
               </a:rPr>
-              <a:t>Cartographie des Societes</a:t>
+              <a:t>Cartographie des Sociétés</a:t>
             </a:r>
           </a:p>
         </p:txBody>
@@ -23311,7 +23311,7 @@
                   <a:srgbClr val="555555"/>
                 </a:solidFill>
               </a:rPr>
-              <a:t>8 sociétés · Scatter valorisation · Scores FinSight detailles</a:t>
+              <a:t>8 sociétés · Scatter valorisation · Scores FinSight détaillés</a:t>
             </a:r>
           </a:p>
         </p:txBody>
@@ -23995,7 +23995,7 @@
                   <a:srgbClr val="FFFFFF"/>
                 </a:solidFill>
               </a:rPr>
-              <a:t>Presentation du Secteur</a:t>
+              <a:t>Présentation du Secteur</a:t>
             </a:r>
           </a:p>
         </p:txBody>
@@ -24201,7 +24201,7 @@
                   <a:srgbClr val="FFFFFF"/>
                 </a:solidFill>
               </a:rPr>
-              <a:t>Presentation du Secteur</a:t>
+              <a:t>Présentation du Secteur</a:t>
             </a:r>
           </a:p>
         </p:txBody>
@@ -24817,7 +24817,7 @@
                   <a:srgbClr val="FFFFFF"/>
                 </a:solidFill>
               </a:rPr>
-              <a:t>CATALYSEURS CLES</a:t>
+              <a:t>CATALYSEURS CLÉS</a:t>
             </a:r>
           </a:p>
         </p:txBody>
@@ -25191,7 +25191,7 @@
                             <a:srgbClr val="FFFFFF"/>
                           </a:solidFill>
                         </a:rPr>
-                        <a:t>Metrique</a:t>
+                        <a:t>Métrique</a:t>
                       </a:r>
                     </a:p>
                   </a:txBody>
@@ -29398,7 +29398,7 @@
                   <a:srgbClr val="FFFFFF"/>
                 </a:solidFill>
               </a:rPr>
-              <a:t>● SURPONDERER</a:t>
+              <a:t>● SURPONDÉRER</a:t>
             </a:r>
           </a:p>
         </p:txBody>
@@ -29774,7 +29774,7 @@
                   <a:srgbClr val="FFFFFF"/>
                 </a:solidFill>
               </a:rPr>
-              <a:t>Cartographie des Societes</a:t>
+              <a:t>Cartographie des Sociétés</a:t>
             </a:r>
           </a:p>
         </p:txBody>
@@ -29980,7 +29980,7 @@
                   <a:srgbClr val="FFFFFF"/>
                 </a:solidFill>
               </a:rPr>
-              <a:t>Cartographie des Societes</a:t>
+              <a:t>Cartographie des Sociétés</a:t>
             </a:r>
           </a:p>
         </p:txBody>

--- a/preview/secteur_Technology_S&P_500/secteur_Technology_S&P_500.pptx
+++ b/preview/secteur_Technology_S&P_500/secteur_Technology_S&P_500.pptx
@@ -5820,7 +5820,7 @@
                             <a:srgbClr val="1A1A1A"/>
                           </a:solidFill>
                         </a:rPr>
-                        <a:t>AAPL</a:t>
+                        <a:t>AVGO</a:t>
                       </a:r>
                     </a:p>
                   </a:txBody>
@@ -5842,7 +5842,7 @@
                             <a:srgbClr val="1A1A1A"/>
                           </a:solidFill>
                         </a:rPr>
-                        <a:t>Apple Inc.</a:t>
+                        <a:t>Broadcom Inc.</a:t>
                       </a:r>
                     </a:p>
                   </a:txBody>
@@ -5886,7 +5886,7 @@
                             <a:srgbClr val="1A1A1A"/>
                           </a:solidFill>
                         </a:rPr>
-                        <a:t>8</a:t>
+                        <a:t>0</a:t>
                       </a:r>
                     </a:p>
                   </a:txBody>
@@ -5952,7 +5952,7 @@
                             <a:srgbClr val="1A1A1A"/>
                           </a:solidFill>
                         </a:rPr>
-                        <a:t>13</a:t>
+                        <a:t>23</a:t>
                       </a:r>
                     </a:p>
                   </a:txBody>
@@ -5998,7 +5998,7 @@
                             <a:srgbClr val="1A1A1A"/>
                           </a:solidFill>
                         </a:rPr>
-                        <a:t>AVGO</a:t>
+                        <a:t>AAPL</a:t>
                       </a:r>
                     </a:p>
                   </a:txBody>
@@ -6018,7 +6018,7 @@
                             <a:srgbClr val="1A1A1A"/>
                           </a:solidFill>
                         </a:rPr>
-                        <a:t>Broadcom Inc.</a:t>
+                        <a:t>Apple Inc.</a:t>
                       </a:r>
                     </a:p>
                   </a:txBody>
@@ -6038,7 +6038,7 @@
                             <a:srgbClr val="1A1A1A"/>
                           </a:solidFill>
                         </a:rPr>
-                        <a:t>73/100</a:t>
+                        <a:t>72/100</a:t>
                       </a:r>
                     </a:p>
                   </a:txBody>
@@ -6058,7 +6058,7 @@
                             <a:srgbClr val="1A1A1A"/>
                           </a:solidFill>
                         </a:rPr>
-                        <a:t>0</a:t>
+                        <a:t>8</a:t>
                       </a:r>
                     </a:p>
                   </a:txBody>
@@ -6118,7 +6118,7 @@
                             <a:srgbClr val="1A1A1A"/>
                           </a:solidFill>
                         </a:rPr>
-                        <a:t>23</a:t>
+                        <a:t>13</a:t>
                       </a:r>
                     </a:p>
                   </a:txBody>
@@ -7694,7 +7694,7 @@
                   <a:srgbClr val="FFFFFF"/>
                 </a:solidFill>
               </a:rPr>
-              <a:t>Cible : 345</a:t>
+              <a:t>Cible : 346</a:t>
             </a:r>
           </a:p>
         </p:txBody>
@@ -12160,7 +12160,7 @@
                             <a:srgbClr val="1A1A1A"/>
                           </a:solidFill>
                         </a:rPr>
-                        <a:t>287.22</a:t>
+                        <a:t>288.01</a:t>
                       </a:r>
                     </a:p>
                   </a:txBody>
@@ -12180,7 +12180,7 @@
                             <a:srgbClr val="1A1A1A"/>
                           </a:solidFill>
                         </a:rPr>
-                        <a:t>330.3</a:t>
+                        <a:t>331.2</a:t>
                       </a:r>
                     </a:p>
                   </a:txBody>
@@ -12200,7 +12200,7 @@
                             <a:srgbClr val="1A1A1A"/>
                           </a:solidFill>
                         </a:rPr>
-                        <a:t>&lt; 272.9</a:t>
+                        <a:t>&lt; 273.6</a:t>
                       </a:r>
                     </a:p>
                   </a:txBody>
@@ -12306,7 +12306,7 @@
                             <a:srgbClr val="1A1A1A"/>
                           </a:solidFill>
                         </a:rPr>
-                        <a:t>173.54</a:t>
+                        <a:t>173.705</a:t>
                       </a:r>
                     </a:p>
                   </a:txBody>
@@ -12328,7 +12328,7 @@
                             <a:srgbClr val="1A1A1A"/>
                           </a:solidFill>
                         </a:rPr>
-                        <a:t>199.6</a:t>
+                        <a:t>199.8</a:t>
                       </a:r>
                     </a:p>
                   </a:txBody>
@@ -12350,7 +12350,7 @@
                             <a:srgbClr val="1A1A1A"/>
                           </a:solidFill>
                         </a:rPr>
-                        <a:t>&lt; 164.9</a:t>
+                        <a:t>&lt; 165.0</a:t>
                       </a:r>
                     </a:p>
                   </a:txBody>
@@ -12458,7 +12458,7 @@
                             <a:srgbClr val="1A1A1A"/>
                           </a:solidFill>
                         </a:rPr>
-                        <a:t>369.595</a:t>
+                        <a:t>370.055</a:t>
                       </a:r>
                     </a:p>
                   </a:txBody>
@@ -12478,7 +12478,7 @@
                             <a:srgbClr val="1A1A1A"/>
                           </a:solidFill>
                         </a:rPr>
-                        <a:t>425.0</a:t>
+                        <a:t>425.6</a:t>
                       </a:r>
                     </a:p>
                   </a:txBody>
@@ -12498,7 +12498,7 @@
                             <a:srgbClr val="1A1A1A"/>
                           </a:solidFill>
                         </a:rPr>
-                        <a:t>&lt; 351.1</a:t>
+                        <a:t>&lt; 351.6</a:t>
                       </a:r>
                     </a:p>
                   </a:txBody>
@@ -12604,7 +12604,7 @@
                             <a:srgbClr val="1A1A1A"/>
                           </a:solidFill>
                         </a:rPr>
-                        <a:t>571.0</a:t>
+                        <a:t>571.66</a:t>
                       </a:r>
                     </a:p>
                   </a:txBody>
@@ -12626,7 +12626,7 @@
                             <a:srgbClr val="1A1A1A"/>
                           </a:solidFill>
                         </a:rPr>
-                        <a:t>656.6</a:t>
+                        <a:t>657.4</a:t>
                       </a:r>
                     </a:p>
                   </a:txBody>
@@ -12648,7 +12648,7 @@
                             <a:srgbClr val="1A1A1A"/>
                           </a:solidFill>
                         </a:rPr>
-                        <a:t>&lt; 542.4</a:t>
+                        <a:t>&lt; 543.1</a:t>
                       </a:r>
                     </a:p>
                   </a:txBody>
@@ -12756,7 +12756,7 @@
                             <a:srgbClr val="1A1A1A"/>
                           </a:solidFill>
                         </a:rPr>
-                        <a:t>146.01</a:t>
+                        <a:t>146.131</a:t>
                       </a:r>
                     </a:p>
                   </a:txBody>
@@ -12776,7 +12776,7 @@
                             <a:srgbClr val="1A1A1A"/>
                           </a:solidFill>
                         </a:rPr>
-                        <a:t>167.9</a:t>
+                        <a:t>168.1</a:t>
                       </a:r>
                     </a:p>
                   </a:txBody>
@@ -12796,7 +12796,7 @@
                             <a:srgbClr val="1A1A1A"/>
                           </a:solidFill>
                         </a:rPr>
-                        <a:t>&lt; 138.7</a:t>
+                        <a:t>&lt; 138.8</a:t>
                       </a:r>
                     </a:p>
                   </a:txBody>
@@ -12858,7 +12858,7 @@
                             <a:srgbClr val="1A1A1A"/>
                           </a:solidFill>
                         </a:rPr>
-                        <a:t>AAPL</a:t>
+                        <a:t>AVGO</a:t>
                       </a:r>
                     </a:p>
                   </a:txBody>
@@ -12880,7 +12880,7 @@
                             <a:srgbClr val="1A1A1A"/>
                           </a:solidFill>
                         </a:rPr>
-                        <a:t>Apple Inc.</a:t>
+                        <a:t>Broadcom Inc.</a:t>
                       </a:r>
                     </a:p>
                   </a:txBody>
@@ -12902,7 +12902,7 @@
                             <a:srgbClr val="1A1A1A"/>
                           </a:solidFill>
                         </a:rPr>
-                        <a:t>253.51</a:t>
+                        <a:t>308.27</a:t>
                       </a:r>
                     </a:p>
                   </a:txBody>
@@ -12924,7 +12924,7 @@
                             <a:srgbClr val="1A1A1A"/>
                           </a:solidFill>
                         </a:rPr>
-                        <a:t>291.5</a:t>
+                        <a:t>354.5</a:t>
                       </a:r>
                     </a:p>
                   </a:txBody>
@@ -12946,7 +12946,7 @@
                             <a:srgbClr val="1A1A1A"/>
                           </a:solidFill>
                         </a:rPr>
-                        <a:t>&lt; 240.8</a:t>
+                        <a:t>&lt; 292.9</a:t>
                       </a:r>
                     </a:p>
                   </a:txBody>
@@ -13014,7 +13014,7 @@
                             <a:srgbClr val="1A1A1A"/>
                           </a:solidFill>
                         </a:rPr>
-                        <a:t>AVGO</a:t>
+                        <a:t>AAPL</a:t>
                       </a:r>
                     </a:p>
                   </a:txBody>
@@ -13034,7 +13034,7 @@
                             <a:srgbClr val="1A1A1A"/>
                           </a:solidFill>
                         </a:rPr>
-                        <a:t>Broadcom Inc.</a:t>
+                        <a:t>Apple Inc.</a:t>
                       </a:r>
                     </a:p>
                   </a:txBody>
@@ -13054,7 +13054,7 @@
                             <a:srgbClr val="1A1A1A"/>
                           </a:solidFill>
                         </a:rPr>
-                        <a:t>307.645</a:t>
+                        <a:t>253.8301</a:t>
                       </a:r>
                     </a:p>
                   </a:txBody>
@@ -13074,7 +13074,7 @@
                             <a:srgbClr val="1A1A1A"/>
                           </a:solidFill>
                         </a:rPr>
-                        <a:t>353.8</a:t>
+                        <a:t>291.9</a:t>
                       </a:r>
                     </a:p>
                   </a:txBody>
@@ -13094,7 +13094,7 @@
                             <a:srgbClr val="1A1A1A"/>
                           </a:solidFill>
                         </a:rPr>
-                        <a:t>&lt; 292.3</a:t>
+                        <a:t>&lt; 241.1</a:t>
                       </a:r>
                     </a:p>
                   </a:txBody>
@@ -13200,7 +13200,7 @@
                             <a:srgbClr val="1A1A1A"/>
                           </a:solidFill>
                         </a:rPr>
-                        <a:t>202.5681</a:t>
+                        <a:t>202.8301</a:t>
                       </a:r>
                     </a:p>
                   </a:txBody>
@@ -13222,7 +13222,7 @@
                             <a:srgbClr val="1A1A1A"/>
                           </a:solidFill>
                         </a:rPr>
-                        <a:t>233.0</a:t>
+                        <a:t>233.3</a:t>
                       </a:r>
                     </a:p>
                   </a:txBody>
@@ -13244,7 +13244,7 @@
                             <a:srgbClr val="1A1A1A"/>
                           </a:solidFill>
                         </a:rPr>
-                        <a:t>&lt; 192.4</a:t>
+                        <a:t>&lt; 192.7</a:t>
                       </a:r>
                     </a:p>
                   </a:txBody>
@@ -26487,7 +26487,7 @@
                             <a:srgbClr val="1A1A1A"/>
                           </a:solidFill>
                         </a:rPr>
-                        <a:t>26.6x</a:t>
+                        <a:t>26.7x</a:t>
                       </a:r>
                     </a:p>
                   </a:txBody>
@@ -26635,7 +26635,7 @@
                             <a:srgbClr val="1A1A1A"/>
                           </a:solidFill>
                         </a:rPr>
-                        <a:t>35.3x</a:t>
+                        <a:t>35.4x</a:t>
                       </a:r>
                     </a:p>
                   </a:txBody>
@@ -26785,7 +26785,7 @@
                             <a:srgbClr val="1A1A1A"/>
                           </a:solidFill>
                         </a:rPr>
-                        <a:t>23.1x</a:t>
+                        <a:t>23.2x</a:t>
                       </a:r>
                     </a:p>
                   </a:txBody>
@@ -27165,7 +27165,7 @@
                             <a:srgbClr val="1A1A1A"/>
                           </a:solidFill>
                         </a:rPr>
-                        <a:t>Apple Inc.</a:t>
+                        <a:t>Broadcom Inc.</a:t>
                       </a:r>
                     </a:p>
                   </a:txBody>
@@ -27187,7 +27187,7 @@
                             <a:srgbClr val="1A1A1A"/>
                           </a:solidFill>
                         </a:rPr>
-                        <a:t>23.8x</a:t>
+                        <a:t>4.0x</a:t>
                       </a:r>
                     </a:p>
                   </a:txBody>
@@ -27209,7 +27209,7 @@
                             <a:srgbClr val="1A1A1A"/>
                           </a:solidFill>
                         </a:rPr>
-                        <a:t>8.4x</a:t>
+                        <a:t>2.2x</a:t>
                       </a:r>
                     </a:p>
                   </a:txBody>
@@ -27231,7 +27231,7 @@
                             <a:srgbClr val="1A1A1A"/>
                           </a:solidFill>
                         </a:rPr>
-                        <a:t>32.1x</a:t>
+                        <a:t>60.1x</a:t>
                       </a:r>
                     </a:p>
                   </a:txBody>
@@ -27253,7 +27253,7 @@
                             <a:srgbClr val="1A1A1A"/>
                           </a:solidFill>
                         </a:rPr>
-                        <a:t>47.3 %</a:t>
+                        <a:t>76.7 %</a:t>
                       </a:r>
                     </a:p>
                   </a:txBody>
@@ -27275,7 +27275,7 @@
                             <a:srgbClr val="1A1A1A"/>
                           </a:solidFill>
                         </a:rPr>
-                        <a:t>35.1 %</a:t>
+                        <a:t>54.5 %</a:t>
                       </a:r>
                     </a:p>
                   </a:txBody>
@@ -27297,7 +27297,7 @@
                             <a:srgbClr val="1A1A1A"/>
                           </a:solidFill>
                         </a:rPr>
-                        <a:t>152.0 %</a:t>
+                        <a:t>33.4 %</a:t>
                       </a:r>
                     </a:p>
                   </a:txBody>
@@ -27321,7 +27321,7 @@
                             <a:srgbClr val="1A1A1A"/>
                           </a:solidFill>
                         </a:rPr>
-                        <a:t>Broadcom Inc.</a:t>
+                        <a:t>Apple Inc.</a:t>
                       </a:r>
                     </a:p>
                   </a:txBody>
@@ -27341,7 +27341,7 @@
                             <a:srgbClr val="1A1A1A"/>
                           </a:solidFill>
                         </a:rPr>
-                        <a:t>4.0x</a:t>
+                        <a:t>23.8x</a:t>
                       </a:r>
                     </a:p>
                   </a:txBody>
@@ -27361,7 +27361,7 @@
                             <a:srgbClr val="1A1A1A"/>
                           </a:solidFill>
                         </a:rPr>
-                        <a:t>2.2x</a:t>
+                        <a:t>8.4x</a:t>
                       </a:r>
                     </a:p>
                   </a:txBody>
@@ -27381,7 +27381,7 @@
                             <a:srgbClr val="1A1A1A"/>
                           </a:solidFill>
                         </a:rPr>
-                        <a:t>60.0x</a:t>
+                        <a:t>32.2x</a:t>
                       </a:r>
                     </a:p>
                   </a:txBody>
@@ -27401,7 +27401,7 @@
                             <a:srgbClr val="1A1A1A"/>
                           </a:solidFill>
                         </a:rPr>
-                        <a:t>76.7 %</a:t>
+                        <a:t>47.3 %</a:t>
                       </a:r>
                     </a:p>
                   </a:txBody>
@@ -27421,7 +27421,7 @@
                             <a:srgbClr val="1A1A1A"/>
                           </a:solidFill>
                         </a:rPr>
-                        <a:t>54.5 %</a:t>
+                        <a:t>35.1 %</a:t>
                       </a:r>
                     </a:p>
                   </a:txBody>
@@ -27441,7 +27441,7 @@
                             <a:srgbClr val="1A1A1A"/>
                           </a:solidFill>
                         </a:rPr>
-                        <a:t>33.4 %</a:t>
+                        <a:t>152.0 %</a:t>
                       </a:r>
                     </a:p>
                   </a:txBody>
@@ -27529,7 +27529,7 @@
                             <a:srgbClr val="1A1A1A"/>
                           </a:solidFill>
                         </a:rPr>
-                        <a:t>77.6x</a:t>
+                        <a:t>77.7x</a:t>
                       </a:r>
                     </a:p>
                   </a:txBody>
@@ -30769,7 +30769,7 @@
                             <a:srgbClr val="1A1A1A"/>
                           </a:solidFill>
                         </a:rPr>
-                        <a:t>287.22</a:t>
+                        <a:t>288.01</a:t>
                       </a:r>
                     </a:p>
                   </a:txBody>
@@ -30981,7 +30981,7 @@
                             <a:srgbClr val="1A1A1A"/>
                           </a:solidFill>
                         </a:rPr>
-                        <a:t>173.54</a:t>
+                        <a:t>173.705</a:t>
                       </a:r>
                     </a:p>
                   </a:txBody>
@@ -31193,7 +31193,7 @@
                             <a:srgbClr val="1A1A1A"/>
                           </a:solidFill>
                         </a:rPr>
-                        <a:t>369.595</a:t>
+                        <a:t>370.055</a:t>
                       </a:r>
                     </a:p>
                   </a:txBody>
@@ -31405,7 +31405,7 @@
                             <a:srgbClr val="1A1A1A"/>
                           </a:solidFill>
                         </a:rPr>
-                        <a:t>571.0</a:t>
+                        <a:t>571.66</a:t>
                       </a:r>
                     </a:p>
                   </a:txBody>
@@ -31617,7 +31617,7 @@
                             <a:srgbClr val="1A1A1A"/>
                           </a:solidFill>
                         </a:rPr>
-                        <a:t>146.01</a:t>
+                        <a:t>146.131</a:t>
                       </a:r>
                     </a:p>
                   </a:txBody>
@@ -31741,7 +31741,7 @@
                             <a:srgbClr val="1A1A1A"/>
                           </a:solidFill>
                         </a:rPr>
-                        <a:t>AAPL</a:t>
+                        <a:t>AVGO</a:t>
                       </a:r>
                     </a:p>
                   </a:txBody>
@@ -31763,7 +31763,7 @@
                             <a:srgbClr val="1A1A1A"/>
                           </a:solidFill>
                         </a:rPr>
-                        <a:t>Apple Inc.</a:t>
+                        <a:t>Broadcom Inc.</a:t>
                       </a:r>
                     </a:p>
                   </a:txBody>
@@ -31829,7 +31829,7 @@
                             <a:srgbClr val="1A1A1A"/>
                           </a:solidFill>
                         </a:rPr>
-                        <a:t>253.51</a:t>
+                        <a:t>308.27</a:t>
                       </a:r>
                     </a:p>
                   </a:txBody>
@@ -31851,7 +31851,7 @@
                             <a:srgbClr val="1A1A1A"/>
                           </a:solidFill>
                         </a:rPr>
-                        <a:t>23.8x</a:t>
+                        <a:t>4.0x</a:t>
                       </a:r>
                     </a:p>
                   </a:txBody>
@@ -31873,7 +31873,7 @@
                             <a:srgbClr val="1A1A1A"/>
                           </a:solidFill>
                         </a:rPr>
-                        <a:t>35.1 %</a:t>
+                        <a:t>54.5 %</a:t>
                       </a:r>
                     </a:p>
                   </a:txBody>
@@ -31895,7 +31895,7 @@
                             <a:srgbClr val="1A1A1A"/>
                           </a:solidFill>
                         </a:rPr>
-                        <a:t>+15.7 %</a:t>
+                        <a:t>+16.4 %</a:t>
                       </a:r>
                     </a:p>
                   </a:txBody>
@@ -31917,7 +31917,7 @@
                             <a:srgbClr val="1A1A1A"/>
                           </a:solidFill>
                         </a:rPr>
-                        <a:t>+10.5 %</a:t>
+                        <a:t>+74.1 %</a:t>
                       </a:r>
                     </a:p>
                   </a:txBody>
@@ -31961,7 +31961,7 @@
                             <a:srgbClr val="1A1A1A"/>
                           </a:solidFill>
                         </a:rPr>
-                        <a:t>AVGO</a:t>
+                        <a:t>AAPL</a:t>
                       </a:r>
                     </a:p>
                   </a:txBody>
@@ -31981,7 +31981,7 @@
                             <a:srgbClr val="1A1A1A"/>
                           </a:solidFill>
                         </a:rPr>
-                        <a:t>Broadcom Inc.</a:t>
+                        <a:t>Apple Inc.</a:t>
                       </a:r>
                     </a:p>
                   </a:txBody>
@@ -32001,7 +32001,7 @@
                             <a:srgbClr val="1A1A1A"/>
                           </a:solidFill>
                         </a:rPr>
-                        <a:t>73/100</a:t>
+                        <a:t>72/100</a:t>
                       </a:r>
                     </a:p>
                   </a:txBody>
@@ -32041,7 +32041,7 @@
                             <a:srgbClr val="1A1A1A"/>
                           </a:solidFill>
                         </a:rPr>
-                        <a:t>307.645</a:t>
+                        <a:t>253.8301</a:t>
                       </a:r>
                     </a:p>
                   </a:txBody>
@@ -32061,7 +32061,7 @@
                             <a:srgbClr val="1A1A1A"/>
                           </a:solidFill>
                         </a:rPr>
-                        <a:t>4.0x</a:t>
+                        <a:t>23.8x</a:t>
                       </a:r>
                     </a:p>
                   </a:txBody>
@@ -32081,7 +32081,7 @@
                             <a:srgbClr val="1A1A1A"/>
                           </a:solidFill>
                         </a:rPr>
-                        <a:t>54.5 %</a:t>
+                        <a:t>35.1 %</a:t>
                       </a:r>
                     </a:p>
                   </a:txBody>
@@ -32101,7 +32101,7 @@
                             <a:srgbClr val="1A1A1A"/>
                           </a:solidFill>
                         </a:rPr>
-                        <a:t>+16.4 %</a:t>
+                        <a:t>+15.7 %</a:t>
                       </a:r>
                     </a:p>
                   </a:txBody>
@@ -32121,7 +32121,7 @@
                             <a:srgbClr val="1A1A1A"/>
                           </a:solidFill>
                         </a:rPr>
-                        <a:t>+74.1 %</a:t>
+                        <a:t>+10.5 %</a:t>
                       </a:r>
                     </a:p>
                   </a:txBody>
@@ -32253,7 +32253,7 @@
                             <a:srgbClr val="1A1A1A"/>
                           </a:solidFill>
                         </a:rPr>
-                        <a:t>202.5681</a:t>
+                        <a:t>202.8301</a:t>
                       </a:r>
                     </a:p>
                   </a:txBody>

--- a/preview/secteur_Technology_S&P_500/secteur_Technology_S&P_500.pptx
+++ b/preview/secteur_Technology_S&P_500/secteur_Technology_S&P_500.pptx
@@ -5358,7 +5358,7 @@
                             <a:srgbClr val="1A1A1A"/>
                           </a:solidFill>
                         </a:rPr>
-                        <a:t>75/100</a:t>
+                        <a:t>74/100</a:t>
                       </a:r>
                     </a:p>
                   </a:txBody>
@@ -5658,7 +5658,7 @@
                             <a:srgbClr val="1A1A1A"/>
                           </a:solidFill>
                         </a:rPr>
-                        <a:t>ORCL</a:t>
+                        <a:t>AVGO</a:t>
                       </a:r>
                     </a:p>
                   </a:txBody>
@@ -5678,7 +5678,7 @@
                             <a:srgbClr val="1A1A1A"/>
                           </a:solidFill>
                         </a:rPr>
-                        <a:t>Oracle Corporation</a:t>
+                        <a:t>Broadcom Inc.</a:t>
                       </a:r>
                     </a:p>
                   </a:txBody>
@@ -5698,7 +5698,7 @@
                             <a:srgbClr val="1A1A1A"/>
                           </a:solidFill>
                         </a:rPr>
-                        <a:t>74/100</a:t>
+                        <a:t>73/100</a:t>
                       </a:r>
                     </a:p>
                   </a:txBody>
@@ -5718,7 +5718,7 @@
                             <a:srgbClr val="1A1A1A"/>
                           </a:solidFill>
                         </a:rPr>
-                        <a:t>11</a:t>
+                        <a:t>0</a:t>
                       </a:r>
                     </a:p>
                   </a:txBody>
@@ -5778,7 +5778,7 @@
                             <a:srgbClr val="1A1A1A"/>
                           </a:solidFill>
                         </a:rPr>
-                        <a:t>11</a:t>
+                        <a:t>23</a:t>
                       </a:r>
                     </a:p>
                   </a:txBody>
@@ -5820,7 +5820,7 @@
                             <a:srgbClr val="1A1A1A"/>
                           </a:solidFill>
                         </a:rPr>
-                        <a:t>AVGO</a:t>
+                        <a:t>ORCL</a:t>
                       </a:r>
                     </a:p>
                   </a:txBody>
@@ -5842,7 +5842,7 @@
                             <a:srgbClr val="1A1A1A"/>
                           </a:solidFill>
                         </a:rPr>
-                        <a:t>Broadcom Inc.</a:t>
+                        <a:t>Oracle Corporation</a:t>
                       </a:r>
                     </a:p>
                   </a:txBody>
@@ -5886,7 +5886,7 @@
                             <a:srgbClr val="1A1A1A"/>
                           </a:solidFill>
                         </a:rPr>
-                        <a:t>0</a:t>
+                        <a:t>11</a:t>
                       </a:r>
                     </a:p>
                   </a:txBody>
@@ -5952,7 +5952,7 @@
                             <a:srgbClr val="1A1A1A"/>
                           </a:solidFill>
                         </a:rPr>
-                        <a:t>23</a:t>
+                        <a:t>11</a:t>
                       </a:r>
                     </a:p>
                   </a:txBody>
@@ -7694,7 +7694,7 @@
                   <a:srgbClr val="FFFFFF"/>
                 </a:solidFill>
               </a:rPr>
-              <a:t>Cible : 346</a:t>
+              <a:t>Cible : 345</a:t>
             </a:r>
           </a:p>
         </p:txBody>
@@ -8711,7 +8711,7 @@
                   <a:srgbClr val="FFFFFF"/>
                 </a:solidFill>
               </a:rPr>
-              <a:t>Cible : 208</a:t>
+              <a:t>Cible : 209</a:t>
             </a:r>
           </a:p>
         </p:txBody>
@@ -12160,7 +12160,7 @@
                             <a:srgbClr val="1A1A1A"/>
                           </a:solidFill>
                         </a:rPr>
-                        <a:t>288.01</a:t>
+                        <a:t>287.56</a:t>
                       </a:r>
                     </a:p>
                   </a:txBody>
@@ -12180,7 +12180,7 @@
                             <a:srgbClr val="1A1A1A"/>
                           </a:solidFill>
                         </a:rPr>
-                        <a:t>331.2</a:t>
+                        <a:t>330.7</a:t>
                       </a:r>
                     </a:p>
                   </a:txBody>
@@ -12200,7 +12200,7 @@
                             <a:srgbClr val="1A1A1A"/>
                           </a:solidFill>
                         </a:rPr>
-                        <a:t>&lt; 273.6</a:t>
+                        <a:t>&lt; 273.2</a:t>
                       </a:r>
                     </a:p>
                   </a:txBody>
@@ -12306,7 +12306,7 @@
                             <a:srgbClr val="1A1A1A"/>
                           </a:solidFill>
                         </a:rPr>
-                        <a:t>173.705</a:t>
+                        <a:t>174.4</a:t>
                       </a:r>
                     </a:p>
                   </a:txBody>
@@ -12328,7 +12328,7 @@
                             <a:srgbClr val="1A1A1A"/>
                           </a:solidFill>
                         </a:rPr>
-                        <a:t>199.8</a:t>
+                        <a:t>200.6</a:t>
                       </a:r>
                     </a:p>
                   </a:txBody>
@@ -12350,7 +12350,7 @@
                             <a:srgbClr val="1A1A1A"/>
                           </a:solidFill>
                         </a:rPr>
-                        <a:t>&lt; 165.0</a:t>
+                        <a:t>&lt; 165.7</a:t>
                       </a:r>
                     </a:p>
                   </a:txBody>
@@ -12458,7 +12458,7 @@
                             <a:srgbClr val="1A1A1A"/>
                           </a:solidFill>
                         </a:rPr>
-                        <a:t>370.055</a:t>
+                        <a:t>370.17</a:t>
                       </a:r>
                     </a:p>
                   </a:txBody>
@@ -12478,7 +12478,7 @@
                             <a:srgbClr val="1A1A1A"/>
                           </a:solidFill>
                         </a:rPr>
-                        <a:t>425.6</a:t>
+                        <a:t>425.7</a:t>
                       </a:r>
                     </a:p>
                   </a:txBody>
@@ -12498,7 +12498,7 @@
                             <a:srgbClr val="1A1A1A"/>
                           </a:solidFill>
                         </a:rPr>
-                        <a:t>&lt; 351.6</a:t>
+                        <a:t>&lt; 351.7</a:t>
                       </a:r>
                     </a:p>
                   </a:txBody>
@@ -12604,7 +12604,7 @@
                             <a:srgbClr val="1A1A1A"/>
                           </a:solidFill>
                         </a:rPr>
-                        <a:t>571.66</a:t>
+                        <a:t>572.13</a:t>
                       </a:r>
                     </a:p>
                   </a:txBody>
@@ -12626,7 +12626,7 @@
                             <a:srgbClr val="1A1A1A"/>
                           </a:solidFill>
                         </a:rPr>
-                        <a:t>657.4</a:t>
+                        <a:t>657.9</a:t>
                       </a:r>
                     </a:p>
                   </a:txBody>
@@ -12648,7 +12648,7 @@
                             <a:srgbClr val="1A1A1A"/>
                           </a:solidFill>
                         </a:rPr>
-                        <a:t>&lt; 543.1</a:t>
+                        <a:t>&lt; 543.5</a:t>
                       </a:r>
                     </a:p>
                   </a:txBody>
@@ -12716,7 +12716,7 @@
                             <a:srgbClr val="1A1A1A"/>
                           </a:solidFill>
                         </a:rPr>
-                        <a:t>ORCL</a:t>
+                        <a:t>AVGO</a:t>
                       </a:r>
                     </a:p>
                   </a:txBody>
@@ -12736,7 +12736,7 @@
                             <a:srgbClr val="1A1A1A"/>
                           </a:solidFill>
                         </a:rPr>
-                        <a:t>Oracle Corporation</a:t>
+                        <a:t>Broadcom Inc.</a:t>
                       </a:r>
                     </a:p>
                   </a:txBody>
@@ -12756,7 +12756,7 @@
                             <a:srgbClr val="1A1A1A"/>
                           </a:solidFill>
                         </a:rPr>
-                        <a:t>146.131</a:t>
+                        <a:t>309.51</a:t>
                       </a:r>
                     </a:p>
                   </a:txBody>
@@ -12776,7 +12776,7 @@
                             <a:srgbClr val="1A1A1A"/>
                           </a:solidFill>
                         </a:rPr>
-                        <a:t>168.1</a:t>
+                        <a:t>355.9</a:t>
                       </a:r>
                     </a:p>
                   </a:txBody>
@@ -12796,7 +12796,7 @@
                             <a:srgbClr val="1A1A1A"/>
                           </a:solidFill>
                         </a:rPr>
-                        <a:t>&lt; 138.8</a:t>
+                        <a:t>&lt; 294.0</a:t>
                       </a:r>
                     </a:p>
                   </a:txBody>
@@ -12858,7 +12858,7 @@
                             <a:srgbClr val="1A1A1A"/>
                           </a:solidFill>
                         </a:rPr>
-                        <a:t>AVGO</a:t>
+                        <a:t>ORCL</a:t>
                       </a:r>
                     </a:p>
                   </a:txBody>
@@ -12880,7 +12880,7 @@
                             <a:srgbClr val="1A1A1A"/>
                           </a:solidFill>
                         </a:rPr>
-                        <a:t>Broadcom Inc.</a:t>
+                        <a:t>Oracle Corporation</a:t>
                       </a:r>
                     </a:p>
                   </a:txBody>
@@ -12902,7 +12902,7 @@
                             <a:srgbClr val="1A1A1A"/>
                           </a:solidFill>
                         </a:rPr>
-                        <a:t>308.27</a:t>
+                        <a:t>147.11</a:t>
                       </a:r>
                     </a:p>
                   </a:txBody>
@@ -12924,7 +12924,7 @@
                             <a:srgbClr val="1A1A1A"/>
                           </a:solidFill>
                         </a:rPr>
-                        <a:t>354.5</a:t>
+                        <a:t>169.2</a:t>
                       </a:r>
                     </a:p>
                   </a:txBody>
@@ -12946,7 +12946,7 @@
                             <a:srgbClr val="1A1A1A"/>
                           </a:solidFill>
                         </a:rPr>
-                        <a:t>&lt; 292.9</a:t>
+                        <a:t>&lt; 139.8</a:t>
                       </a:r>
                     </a:p>
                   </a:txBody>
@@ -13054,7 +13054,7 @@
                             <a:srgbClr val="1A1A1A"/>
                           </a:solidFill>
                         </a:rPr>
-                        <a:t>253.8301</a:t>
+                        <a:t>253.79</a:t>
                       </a:r>
                     </a:p>
                   </a:txBody>
@@ -13200,7 +13200,7 @@
                             <a:srgbClr val="1A1A1A"/>
                           </a:solidFill>
                         </a:rPr>
-                        <a:t>202.8301</a:t>
+                        <a:t>203.43</a:t>
                       </a:r>
                     </a:p>
                   </a:txBody>
@@ -13222,7 +13222,7 @@
                             <a:srgbClr val="1A1A1A"/>
                           </a:solidFill>
                         </a:rPr>
-                        <a:t>233.3</a:t>
+                        <a:t>233.9</a:t>
                       </a:r>
                     </a:p>
                   </a:txBody>
@@ -13244,7 +13244,7 @@
                             <a:srgbClr val="1A1A1A"/>
                           </a:solidFill>
                         </a:rPr>
-                        <a:t>&lt; 192.7</a:t>
+                        <a:t>&lt; 193.3</a:t>
                       </a:r>
                     </a:p>
                   </a:txBody>
@@ -26487,7 +26487,7 @@
                             <a:srgbClr val="1A1A1A"/>
                           </a:solidFill>
                         </a:rPr>
-                        <a:t>26.7x</a:t>
+                        <a:t>26.6x</a:t>
                       </a:r>
                     </a:p>
                   </a:txBody>
@@ -26635,7 +26635,7 @@
                             <a:srgbClr val="1A1A1A"/>
                           </a:solidFill>
                         </a:rPr>
-                        <a:t>35.4x</a:t>
+                        <a:t>35.5x</a:t>
                       </a:r>
                     </a:p>
                   </a:txBody>
@@ -26933,7 +26933,7 @@
                             <a:srgbClr val="1A1A1A"/>
                           </a:solidFill>
                         </a:rPr>
-                        <a:t>24.3x</a:t>
+                        <a:t>24.4x</a:t>
                       </a:r>
                     </a:p>
                   </a:txBody>
@@ -27023,7 +27023,7 @@
                             <a:srgbClr val="1A1A1A"/>
                           </a:solidFill>
                         </a:rPr>
-                        <a:t>Oracle Corporation</a:t>
+                        <a:t>Broadcom Inc.</a:t>
                       </a:r>
                     </a:p>
                   </a:txBody>
@@ -27043,7 +27043,7 @@
                             <a:srgbClr val="1A1A1A"/>
                           </a:solidFill>
                         </a:rPr>
-                        <a:t>19.2x</a:t>
+                        <a:t>4.0x</a:t>
                       </a:r>
                     </a:p>
                   </a:txBody>
@@ -27063,7 +27063,7 @@
                             <a:srgbClr val="1A1A1A"/>
                           </a:solidFill>
                         </a:rPr>
-                        <a:t>8.2x</a:t>
+                        <a:t>2.2x</a:t>
                       </a:r>
                     </a:p>
                   </a:txBody>
@@ -27083,7 +27083,7 @@
                             <a:srgbClr val="1A1A1A"/>
                           </a:solidFill>
                         </a:rPr>
-                        <a:t>26.2x</a:t>
+                        <a:t>60.3x</a:t>
                       </a:r>
                     </a:p>
                   </a:txBody>
@@ -27103,7 +27103,7 @@
                             <a:srgbClr val="1A1A1A"/>
                           </a:solidFill>
                         </a:rPr>
-                        <a:t>67.1 %</a:t>
+                        <a:t>76.7 %</a:t>
                       </a:r>
                     </a:p>
                   </a:txBody>
@@ -27123,7 +27123,7 @@
                             <a:srgbClr val="1A1A1A"/>
                           </a:solidFill>
                         </a:rPr>
-                        <a:t>42.8 %</a:t>
+                        <a:t>54.5 %</a:t>
                       </a:r>
                     </a:p>
                   </a:txBody>
@@ -27143,7 +27143,7 @@
                             <a:srgbClr val="1A1A1A"/>
                           </a:solidFill>
                         </a:rPr>
-                        <a:t>57.6 %</a:t>
+                        <a:t>33.4 %</a:t>
                       </a:r>
                     </a:p>
                   </a:txBody>
@@ -27165,7 +27165,7 @@
                             <a:srgbClr val="1A1A1A"/>
                           </a:solidFill>
                         </a:rPr>
-                        <a:t>Broadcom Inc.</a:t>
+                        <a:t>Oracle Corporation</a:t>
                       </a:r>
                     </a:p>
                   </a:txBody>
@@ -27187,7 +27187,7 @@
                             <a:srgbClr val="1A1A1A"/>
                           </a:solidFill>
                         </a:rPr>
-                        <a:t>4.0x</a:t>
+                        <a:t>19.2x</a:t>
                       </a:r>
                     </a:p>
                   </a:txBody>
@@ -27209,7 +27209,7 @@
                             <a:srgbClr val="1A1A1A"/>
                           </a:solidFill>
                         </a:rPr>
-                        <a:t>2.2x</a:t>
+                        <a:t>8.2x</a:t>
                       </a:r>
                     </a:p>
                   </a:txBody>
@@ -27231,7 +27231,7 @@
                             <a:srgbClr val="1A1A1A"/>
                           </a:solidFill>
                         </a:rPr>
-                        <a:t>60.1x</a:t>
+                        <a:t>26.4x</a:t>
                       </a:r>
                     </a:p>
                   </a:txBody>
@@ -27253,7 +27253,7 @@
                             <a:srgbClr val="1A1A1A"/>
                           </a:solidFill>
                         </a:rPr>
-                        <a:t>76.7 %</a:t>
+                        <a:t>67.1 %</a:t>
                       </a:r>
                     </a:p>
                   </a:txBody>
@@ -27275,7 +27275,7 @@
                             <a:srgbClr val="1A1A1A"/>
                           </a:solidFill>
                         </a:rPr>
-                        <a:t>54.5 %</a:t>
+                        <a:t>42.8 %</a:t>
                       </a:r>
                     </a:p>
                   </a:txBody>
@@ -27297,7 +27297,7 @@
                             <a:srgbClr val="1A1A1A"/>
                           </a:solidFill>
                         </a:rPr>
-                        <a:t>33.4 %</a:t>
+                        <a:t>57.6 %</a:t>
                       </a:r>
                     </a:p>
                   </a:txBody>
@@ -27529,7 +27529,7 @@
                             <a:srgbClr val="1A1A1A"/>
                           </a:solidFill>
                         </a:rPr>
-                        <a:t>77.7x</a:t>
+                        <a:t>77.9x</a:t>
                       </a:r>
                     </a:p>
                   </a:txBody>
@@ -30769,7 +30769,7 @@
                             <a:srgbClr val="1A1A1A"/>
                           </a:solidFill>
                         </a:rPr>
-                        <a:t>288.01</a:t>
+                        <a:t>287.56</a:t>
                       </a:r>
                     </a:p>
                   </a:txBody>
@@ -30981,7 +30981,7 @@
                             <a:srgbClr val="1A1A1A"/>
                           </a:solidFill>
                         </a:rPr>
-                        <a:t>173.705</a:t>
+                        <a:t>174.4</a:t>
                       </a:r>
                     </a:p>
                   </a:txBody>
@@ -31153,7 +31153,7 @@
                             <a:srgbClr val="1A1A1A"/>
                           </a:solidFill>
                         </a:rPr>
-                        <a:t>75/100</a:t>
+                        <a:t>74/100</a:t>
                       </a:r>
                     </a:p>
                   </a:txBody>
@@ -31193,7 +31193,7 @@
                             <a:srgbClr val="1A1A1A"/>
                           </a:solidFill>
                         </a:rPr>
-                        <a:t>370.055</a:t>
+                        <a:t>370.17</a:t>
                       </a:r>
                     </a:p>
                   </a:txBody>
@@ -31405,7 +31405,7 @@
                             <a:srgbClr val="1A1A1A"/>
                           </a:solidFill>
                         </a:rPr>
-                        <a:t>571.66</a:t>
+                        <a:t>572.13</a:t>
                       </a:r>
                     </a:p>
                   </a:txBody>
@@ -31537,7 +31537,7 @@
                             <a:srgbClr val="1A1A1A"/>
                           </a:solidFill>
                         </a:rPr>
-                        <a:t>ORCL</a:t>
+                        <a:t>AVGO</a:t>
                       </a:r>
                     </a:p>
                   </a:txBody>
@@ -31557,7 +31557,7 @@
                             <a:srgbClr val="1A1A1A"/>
                           </a:solidFill>
                         </a:rPr>
-                        <a:t>Oracle Corporation</a:t>
+                        <a:t>Broadcom Inc.</a:t>
                       </a:r>
                     </a:p>
                   </a:txBody>
@@ -31577,7 +31577,7 @@
                             <a:srgbClr val="1A1A1A"/>
                           </a:solidFill>
                         </a:rPr>
-                        <a:t>74/100</a:t>
+                        <a:t>73/100</a:t>
                       </a:r>
                     </a:p>
                   </a:txBody>
@@ -31617,7 +31617,7 @@
                             <a:srgbClr val="1A1A1A"/>
                           </a:solidFill>
                         </a:rPr>
-                        <a:t>146.131</a:t>
+                        <a:t>309.51</a:t>
                       </a:r>
                     </a:p>
                   </a:txBody>
@@ -31637,7 +31637,7 @@
                             <a:srgbClr val="1A1A1A"/>
                           </a:solidFill>
                         </a:rPr>
-                        <a:t>19.2x</a:t>
+                        <a:t>4.0x</a:t>
                       </a:r>
                     </a:p>
                   </a:txBody>
@@ -31657,7 +31657,7 @@
                             <a:srgbClr val="1A1A1A"/>
                           </a:solidFill>
                         </a:rPr>
-                        <a:t>42.8 %</a:t>
+                        <a:t>54.5 %</a:t>
                       </a:r>
                     </a:p>
                   </a:txBody>
@@ -31677,7 +31677,7 @@
                             <a:srgbClr val="1A1A1A"/>
                           </a:solidFill>
                         </a:rPr>
-                        <a:t>+21.7 %</a:t>
+                        <a:t>+16.4 %</a:t>
                       </a:r>
                     </a:p>
                   </a:txBody>
@@ -31697,7 +31697,7 @@
                             <a:srgbClr val="1A1A1A"/>
                           </a:solidFill>
                         </a:rPr>
-                        <a:t>-2.2 %</a:t>
+                        <a:t>+74.1 %</a:t>
                       </a:r>
                     </a:p>
                   </a:txBody>
@@ -31741,7 +31741,7 @@
                             <a:srgbClr val="1A1A1A"/>
                           </a:solidFill>
                         </a:rPr>
-                        <a:t>AVGO</a:t>
+                        <a:t>ORCL</a:t>
                       </a:r>
                     </a:p>
                   </a:txBody>
@@ -31763,7 +31763,7 @@
                             <a:srgbClr val="1A1A1A"/>
                           </a:solidFill>
                         </a:rPr>
-                        <a:t>Broadcom Inc.</a:t>
+                        <a:t>Oracle Corporation</a:t>
                       </a:r>
                     </a:p>
                   </a:txBody>
@@ -31829,7 +31829,7 @@
                             <a:srgbClr val="1A1A1A"/>
                           </a:solidFill>
                         </a:rPr>
-                        <a:t>308.27</a:t>
+                        <a:t>147.11</a:t>
                       </a:r>
                     </a:p>
                   </a:txBody>
@@ -31851,7 +31851,7 @@
                             <a:srgbClr val="1A1A1A"/>
                           </a:solidFill>
                         </a:rPr>
-                        <a:t>4.0x</a:t>
+                        <a:t>19.2x</a:t>
                       </a:r>
                     </a:p>
                   </a:txBody>
@@ -31873,7 +31873,7 @@
                             <a:srgbClr val="1A1A1A"/>
                           </a:solidFill>
                         </a:rPr>
-                        <a:t>54.5 %</a:t>
+                        <a:t>42.8 %</a:t>
                       </a:r>
                     </a:p>
                   </a:txBody>
@@ -31895,7 +31895,7 @@
                             <a:srgbClr val="1A1A1A"/>
                           </a:solidFill>
                         </a:rPr>
-                        <a:t>+16.4 %</a:t>
+                        <a:t>+21.7 %</a:t>
                       </a:r>
                     </a:p>
                   </a:txBody>
@@ -31917,7 +31917,7 @@
                             <a:srgbClr val="1A1A1A"/>
                           </a:solidFill>
                         </a:rPr>
-                        <a:t>+74.1 %</a:t>
+                        <a:t>-2.2 %</a:t>
                       </a:r>
                     </a:p>
                   </a:txBody>
@@ -32041,7 +32041,7 @@
                             <a:srgbClr val="1A1A1A"/>
                           </a:solidFill>
                         </a:rPr>
-                        <a:t>253.8301</a:t>
+                        <a:t>253.79</a:t>
                       </a:r>
                     </a:p>
                   </a:txBody>
@@ -32253,7 +32253,7 @@
                             <a:srgbClr val="1A1A1A"/>
                           </a:solidFill>
                         </a:rPr>
-                        <a:t>202.8301</a:t>
+                        <a:t>203.43</a:t>
                       </a:r>
                     </a:p>
                   </a:txBody>

--- a/preview/secteur_Technology_S&P_500/secteur_Technology_S&P_500.pptx
+++ b/preview/secteur_Technology_S&P_500/secteur_Technology_S&P_500.pptx
@@ -8095,7 +8095,7 @@
                   <a:srgbClr val="1B3A6B"/>
                 </a:solidFill>
               </a:rPr>
-              <a:t>2.5</a:t>
+              <a:t>—</a:t>
             </a:r>
           </a:p>
         </p:txBody>
@@ -9112,7 +9112,7 @@
                   <a:srgbClr val="1B3A6B"/>
                 </a:solidFill>
               </a:rPr>
-              <a:t>2.5</a:t>
+              <a:t>—</a:t>
             </a:r>
           </a:p>
         </p:txBody>
@@ -10129,7 +10129,7 @@
                   <a:srgbClr val="1B3A6B"/>
                 </a:solidFill>
               </a:rPr>
-              <a:t>2.5</a:t>
+              <a:t>—</a:t>
             </a:r>
           </a:p>
         </p:txBody>

--- a/preview/secteur_Technology_S&P_500/secteur_Technology_S&P_500.pptx
+++ b/preview/secteur_Technology_S&P_500/secteur_Technology_S&P_500.pptx
@@ -8172,7 +8172,7 @@
                   <a:srgbClr val="555555"/>
                 </a:solidFill>
               </a:rPr>
-              <a:t>Acceleration des mandats IA dans les grands comptes europeens — contrats pluriannuels en hausse de 38 % sur T1 2026.</a:t>
+              <a:t>L'intégration massive de l'IA générative dans les workflows d'entreprise stimule la demande pour les infrastructures cloud et les puces spécialisées.</a:t>
             </a:r>
           </a:p>
         </p:txBody>
@@ -8326,7 +8326,7 @@
                   <a:srgbClr val="555555"/>
                 </a:solidFill>
               </a:rPr>
-              <a:t>Recession européenne confirmee entraînerait une reduction des budgets IT de 12-18 %, pénalisant les prestataires de services.</a:t>
+              <a:t>Les enquêtes et amendes potentielles pourraient peser sur les marges des géants technologiques, notamment aux États-Unis et en Europe.</a:t>
             </a:r>
           </a:p>
         </p:txBody>
@@ -9189,7 +9189,7 @@
                   <a:srgbClr val="555555"/>
                 </a:solidFill>
               </a:rPr>
-              <a:t>Plans d'investissement gouvernementaux 2026-2028 — budgets numeriques confirmes pour 6 Etats membres EU.</a:t>
+              <a:t>Les plateformes de publicité ciblée (META, GOOGL) bénéficient d'une collecte et d'une analyse de données toujours plus sophistiquées.</a:t>
             </a:r>
           </a:p>
         </p:txBody>
@@ -9343,7 +9343,7 @@
                   <a:srgbClr val="555555"/>
                 </a:solidFill>
               </a:rPr>
-              <a:t>Surcout de mise en conformite estime a 8-12 % du CA pour les editeurs de logiciels IA — impact marges 2027.</a:t>
+              <a:t>La volatilité des stocks et la surcapacité dans les puces pourraient impacter les revenus de NVDA et ses pairs.</a:t>
             </a:r>
           </a:p>
         </p:txBody>
@@ -10206,7 +10206,7 @@
                   <a:srgbClr val="555555"/>
                 </a:solidFill>
               </a:rPr>
-              <a:t>Contraintes réglementaires sur les données — migration vers solutions EU portee par NIS2 et DORA.</a:t>
+              <a:t>Les entreprises accélèrent leur migration vers des solutions cloud hybrides, boostant les revenus récurrents des fournisseurs comme GOOGL.</a:t>
             </a:r>
           </a:p>
         </p:txBody>
@@ -10360,7 +10360,7 @@
                   <a:srgbClr val="555555"/>
                 </a:solidFill>
               </a:rPr>
-              <a:t>Acteurs americains et asiatiques agressifs sur les segments logiciels standardises — guerre des prix bas de gamme.</a:t>
+              <a:t>L'émergence de nouveaux acteurs (startups, géants chinois) menace la position dominante des leaders actuels.</a:t>
             </a:r>
           </a:p>
         </p:txBody>
@@ -14326,7 +14326,7 @@
                   <a:srgbClr val="FFFFFF"/>
                 </a:solidFill>
               </a:rPr>
-              <a:t>Ralentissement Budgets IT</a:t>
+              <a:t>Régulation antitrust</a:t>
             </a:r>
           </a:p>
         </p:txBody>
@@ -14360,7 +14360,7 @@
                   <a:srgbClr val="555555"/>
                 </a:solidFill>
               </a:rPr>
-              <a:t>Recession européenne confirmee entraînerait une reduction des budgets IT de 12-18 %, pénalisant les prestataires de services.</a:t>
+              <a:t>Les enquêtes et amendes potentielles pourraient peser sur les marges des géants technologiques, notamment aux États-Unis et en Europe.</a:t>
             </a:r>
           </a:p>
         </p:txBody>
@@ -14480,7 +14480,7 @@
                   <a:srgbClr val="FFFFFF"/>
                 </a:solidFill>
               </a:rPr>
-              <a:t>Durcissement AI Act</a:t>
+              <a:t>Cycles de semi-conducteurs</a:t>
             </a:r>
           </a:p>
         </p:txBody>
@@ -14514,7 +14514,7 @@
                   <a:srgbClr val="555555"/>
                 </a:solidFill>
               </a:rPr>
-              <a:t>Surcout de mise en conformite estime a 8-12 % du CA pour les editeurs de logiciels IA — impact marges 2027.</a:t>
+              <a:t>La volatilité des stocks et la surcapacité dans les puces pourraient impacter les revenus de NVDA et ses pairs.</a:t>
             </a:r>
           </a:p>
         </p:txBody>
@@ -14634,7 +14634,7 @@
                   <a:srgbClr val="FFFFFF"/>
                 </a:solidFill>
               </a:rPr>
-              <a:t>Pression Tarifaire US/Asie</a:t>
+              <a:t>Concurrence accrue en IA</a:t>
             </a:r>
           </a:p>
         </p:txBody>
@@ -14668,7 +14668,7 @@
                   <a:srgbClr val="555555"/>
                 </a:solidFill>
               </a:rPr>
-              <a:t>Acteurs americains et asiatiques agressifs sur les segments logiciels standardises — guerre des prix bas de gamme.</a:t>
+              <a:t>L'émergence de nouveaux acteurs (startups, géants chinois) menace la position dominante des leaders actuels.</a:t>
             </a:r>
           </a:p>
         </p:txBody>
@@ -16921,7 +16921,7 @@
                   <a:srgbClr val="555555"/>
                 </a:solidFill>
               </a:rPr>
-              <a:t>+ Adoption IA Generative — Acceleration des mandats IA dans les grands comptes europeens — contrats pluriannuels en hausse de 38 % sur T1 2026.</a:t>
+              <a:t>+ Adoption accélérée de l'IA — L'intégration massive de l'IA générative dans les workflows d'entreprise stimule la demande pour les infrastructures cloud et les puces spéc</a:t>
             </a:r>
           </a:p>
         </p:txBody>
@@ -17041,7 +17041,7 @@
                   <a:srgbClr val="555555"/>
                 </a:solidFill>
               </a:rPr>
-              <a:t>- Ralentissement Budgets IT — Recession européenne confirmee entraînerait une reduction des budgets IT de 12-18 %, pénalisant les prestataires de services.</a:t>
+              <a:t>- Régulation antitrust — Les enquêtes et amendes potentielles pourraient peser sur les marges des géants technologiques, notamment aux États-Unis et en Europe.</a:t>
             </a:r>
           </a:p>
         </p:txBody>
@@ -19593,7 +19593,7 @@
                   <a:srgbClr val="1B3A6B"/>
                 </a:solidFill>
               </a:rPr>
-              <a:t>Adoption IA Generative</a:t>
+              <a:t>Adoption accélérée de l'IA</a:t>
             </a:r>
           </a:p>
         </p:txBody>
@@ -19627,7 +19627,7 @@
                   <a:srgbClr val="555555"/>
                 </a:solidFill>
               </a:rPr>
-              <a:t>Acceleration des mandats IA dans les grands comptes europeens — contrats pluriannuels en hausse de 38 % sur T1 2026.</a:t>
+              <a:t>L'intégration massive de l'IA générative dans les workflows d'entreprise stimule la demande pour les infrastructures cloud et les puces spécialisées.</a:t>
             </a:r>
           </a:p>
         </p:txBody>
@@ -19747,7 +19747,7 @@
                   <a:srgbClr val="1B3A6B"/>
                 </a:solidFill>
               </a:rPr>
-              <a:t>Modernisation SI Publics</a:t>
+              <a:t>Monétisation des données</a:t>
             </a:r>
           </a:p>
         </p:txBody>
@@ -19781,7 +19781,7 @@
                   <a:srgbClr val="555555"/>
                 </a:solidFill>
               </a:rPr>
-              <a:t>Plans d'investissement gouvernementaux 2026-2028 — budgets numeriques confirmes pour 6 Etats membres EU.</a:t>
+              <a:t>Les plateformes de publicité ciblée (META, GOOGL) bénéficient d'une collecte et d'une analyse de données toujours plus sophistiquées.</a:t>
             </a:r>
           </a:p>
         </p:txBody>
@@ -19901,7 +19901,7 @@
                   <a:srgbClr val="1B3A6B"/>
                 </a:solidFill>
               </a:rPr>
-              <a:t>Cloud Hybride Souverainete</a:t>
+              <a:t>Transition vers le cloud hybride</a:t>
             </a:r>
           </a:p>
         </p:txBody>
@@ -19935,7 +19935,7 @@
                   <a:srgbClr val="555555"/>
                 </a:solidFill>
               </a:rPr>
-              <a:t>Contraintes réglementaires sur les données — migration vers solutions EU portee par NIS2 et DORA.</a:t>
+              <a:t>Les entreprises accélèrent leur migration vers des solutions cloud hybrides, boostant les revenus récurrents des fournisseurs comme GOOGL.</a:t>
             </a:r>
           </a:p>
         </p:txBody>
@@ -20132,7 +20132,7 @@
                   <a:srgbClr val="A82020"/>
                 </a:solidFill>
               </a:rPr>
-              <a:t>Ralentissement Budgets IT</a:t>
+              <a:t>Régulation antitrust</a:t>
             </a:r>
           </a:p>
         </p:txBody>
@@ -20166,7 +20166,7 @@
                   <a:srgbClr val="555555"/>
                 </a:solidFill>
               </a:rPr>
-              <a:t>Recession européenne confirmee entraînerait une reduction des budgets IT de 12-18 %, pénalisant les prestataires de services.</a:t>
+              <a:t>Les enquêtes et amendes potentielles pourraient peser sur les marges des géants technologiques, notamment aux États-Unis et en Europe.</a:t>
             </a:r>
           </a:p>
         </p:txBody>
@@ -20286,7 +20286,7 @@
                   <a:srgbClr val="A82020"/>
                 </a:solidFill>
               </a:rPr>
-              <a:t>Durcissement AI Act</a:t>
+              <a:t>Cycles de semi-conducteurs</a:t>
             </a:r>
           </a:p>
         </p:txBody>
@@ -20320,7 +20320,7 @@
                   <a:srgbClr val="555555"/>
                 </a:solidFill>
               </a:rPr>
-              <a:t>Surcout de mise en conformite estime a 8-12 % du CA pour les editeurs de logiciels IA — impact marges 2027.</a:t>
+              <a:t>La volatilité des stocks et la surcapacité dans les puces pourraient impacter les revenus de NVDA et ses pairs.</a:t>
             </a:r>
           </a:p>
         </p:txBody>
@@ -20440,7 +20440,7 @@
                   <a:srgbClr val="A82020"/>
                 </a:solidFill>
               </a:rPr>
-              <a:t>Pression Tarifaire US/Asie</a:t>
+              <a:t>Concurrence accrue en IA</a:t>
             </a:r>
           </a:p>
         </p:txBody>
@@ -20474,7 +20474,7 @@
                   <a:srgbClr val="555555"/>
                 </a:solidFill>
               </a:rPr>
-              <a:t>Acteurs americains et asiatiques agressifs sur les segments logiciels standardises — guerre des prix bas de gamme.</a:t>
+              <a:t>L'émergence de nouveaux acteurs (startups, géants chinois) menace la position dominante des leaders actuels.</a:t>
             </a:r>
           </a:p>
         </p:txBody>
@@ -24697,7 +24697,7 @@
                   <a:srgbClr val="555555"/>
                 </a:solidFill>
               </a:rPr>
-              <a:t>Le secteur Technology regroupe les entreprises actives dans les logiciels, les services informatiques, les semi-conducteurs et les equipements telecom. Porte par la transformation digitale des entreprises et l'adoption de l'IA generative, ce secteur affiche des multiples de valorisation parmi les plus élevés du marche, justifies par des perspectives de croissance supérieures et des marges en expansion.</a:t>
+              <a:t>Le secteur Technology affiche une valorisation réelle soutenue par une croissance organique robuste de 19.9% et un momentum boursier de +49.2% sur 52 semaines, bien au-dessus de la médiane sectorielle de 21.7x EV/EBITDA. Les marges EBITDA de 46.8% reflètent une domination des leaders sur leurs marchés respectifs, notamment dans l'IA, la publicité digitale et les semi-conducteurs.</a:t>
             </a:r>
           </a:p>
         </p:txBody>
@@ -24851,7 +24851,7 @@
                   <a:srgbClr val="1B3A6B"/>
                 </a:solidFill>
               </a:rPr>
-              <a:t>Adoption IA Generative</a:t>
+              <a:t>Adoption accélérée de l'IA</a:t>
             </a:r>
           </a:p>
         </p:txBody>
@@ -24885,7 +24885,7 @@
                   <a:srgbClr val="555555"/>
                 </a:solidFill>
               </a:rPr>
-              <a:t>Acceleration des mandats IA dans les grands comptes europeens — contrats pluriannuels en hausse de 38 % sur T1 2026.</a:t>
+              <a:t>L'intégration massive de l'IA générative dans les workflows d'entreprise stimule la demande pour les infrastructures cloud et les puces spécialisées.</a:t>
             </a:r>
           </a:p>
         </p:txBody>
@@ -24962,7 +24962,7 @@
                   <a:srgbClr val="1B3A6B"/>
                 </a:solidFill>
               </a:rPr>
-              <a:t>Modernisation SI Publics</a:t>
+              <a:t>Monétisation des données</a:t>
             </a:r>
           </a:p>
         </p:txBody>
@@ -24996,7 +24996,7 @@
                   <a:srgbClr val="555555"/>
                 </a:solidFill>
               </a:rPr>
-              <a:t>Plans d'investissement gouvernementaux 2026-2028 — budgets numeriques confirmes pour 6 Etats membres EU.</a:t>
+              <a:t>Les plateformes de publicité ciblée (META, GOOGL) bénéficient d'une collecte et d'une analyse de données toujours plus sophistiquées.</a:t>
             </a:r>
           </a:p>
         </p:txBody>
@@ -25073,7 +25073,7 @@
                   <a:srgbClr val="1B3A6B"/>
                 </a:solidFill>
               </a:rPr>
-              <a:t>Cloud Hybride Souverainete</a:t>
+              <a:t>Transition vers le cloud hybride</a:t>
             </a:r>
           </a:p>
         </p:txBody>
@@ -25107,7 +25107,7 @@
                   <a:srgbClr val="555555"/>
                 </a:solidFill>
               </a:rPr>
-              <a:t>Contraintes réglementaires sur les données — migration vers solutions EU portee par NIS2 et DORA.</a:t>
+              <a:t>Les entreprises accélèrent leur migration vers des solutions cloud hybrides, boostant les revenus récurrents des fournisseurs comme GOOGL.</a:t>
             </a:r>
           </a:p>
         </p:txBody>
@@ -28603,7 +28603,7 @@
                   <a:srgbClr val="1B3A6B"/>
                 </a:solidFill>
               </a:rPr>
-              <a:t>Intelligence Artificielle</a:t>
+              <a:t>Croissance des revenus cloud</a:t>
             </a:r>
           </a:p>
         </p:txBody>
@@ -28637,7 +28637,7 @@
                   <a:srgbClr val="555555"/>
                 </a:solidFill>
               </a:rPr>
-              <a:t>Adoption entreprises +42 % en 2026 — premier driver de depenses IT</a:t>
+              <a:t>La demande pour les services cloud (IaaS, PaaS) devrait continuer à croître à deux chiffres, portée par l'adoption de l'IA et du big data.</a:t>
             </a:r>
           </a:p>
         </p:txBody>
@@ -28791,7 +28791,7 @@
                   <a:srgbClr val="1B3A6B"/>
                 </a:solidFill>
               </a:rPr>
-              <a:t>Cloud Hybride Souverain</a:t>
+              <a:t>Expansion géographique</a:t>
             </a:r>
           </a:p>
         </p:txBody>
@@ -28825,7 +28825,7 @@
                   <a:srgbClr val="555555"/>
                 </a:solidFill>
               </a:rPr>
-              <a:t>Contraintes souverainete données — migration vers solutions EU acceleree par NIS2</a:t>
+              <a:t>Les marchés émergents (Asie du Sud-Est, Amérique latine) représentent un levier de croissance sous-exploité pour les plateformes digitales.</a:t>
             </a:r>
           </a:p>
         </p:txBody>
@@ -28840,6 +28840,459 @@
           <a:xfrm>
             <a:off x="324000" y="2736000"/>
             <a:ext cx="36000" cy="684000"/>
+          </a:xfrm>
+          <a:prstGeom prst="rect">
+            <a:avLst/>
+          </a:prstGeom>
+          <a:solidFill>
+            <a:srgbClr val="A82020"/>
+          </a:solidFill>
+          <a:ln>
+            <a:noFill/>
+          </a:ln>
+        </p:spPr>
+        <p:style>
+          <a:lnRef idx="1">
+            <a:schemeClr val="accent1"/>
+          </a:lnRef>
+          <a:fillRef idx="3">
+            <a:schemeClr val="accent1"/>
+          </a:fillRef>
+          <a:effectRef idx="2">
+            <a:schemeClr val="accent1"/>
+          </a:effectRef>
+          <a:fontRef idx="minor">
+            <a:schemeClr val="lt1"/>
+          </a:fontRef>
+        </p:style>
+        <p:txBody>
+          <a:bodyPr rtlCol="0" anchor="ctr"/>
+          <a:lstStyle/>
+          <a:p>
+            <a:pPr algn="ctr"/>
+          </a:p>
+        </p:txBody>
+      </p:sp>
+      <p:sp>
+        <p:nvSpPr>
+          <p:cNvPr id="26" name="Rectangle 25"/>
+          <p:cNvSpPr/>
+          <p:nvPr/>
+        </p:nvSpPr>
+        <p:spPr>
+          <a:xfrm>
+            <a:off x="360000" y="2736000"/>
+            <a:ext cx="5400000" cy="684000"/>
+          </a:xfrm>
+          <a:prstGeom prst="rect">
+            <a:avLst/>
+          </a:prstGeom>
+          <a:solidFill>
+            <a:srgbClr val="FBEBEB"/>
+          </a:solidFill>
+          <a:ln>
+            <a:noFill/>
+          </a:ln>
+        </p:spPr>
+        <p:style>
+          <a:lnRef idx="1">
+            <a:schemeClr val="accent1"/>
+          </a:lnRef>
+          <a:fillRef idx="3">
+            <a:schemeClr val="accent1"/>
+          </a:fillRef>
+          <a:effectRef idx="2">
+            <a:schemeClr val="accent1"/>
+          </a:effectRef>
+          <a:fontRef idx="minor">
+            <a:schemeClr val="lt1"/>
+          </a:fontRef>
+        </p:style>
+        <p:txBody>
+          <a:bodyPr rtlCol="0" anchor="ctr"/>
+          <a:lstStyle/>
+          <a:p>
+            <a:pPr algn="ctr"/>
+          </a:p>
+        </p:txBody>
+      </p:sp>
+      <p:sp>
+        <p:nvSpPr>
+          <p:cNvPr id="27" name="TextBox 26"/>
+          <p:cNvSpPr txBox="1"/>
+          <p:nvPr/>
+        </p:nvSpPr>
+        <p:spPr>
+          <a:xfrm>
+            <a:off x="396000" y="2808000"/>
+            <a:ext cx="288000" cy="288000"/>
+          </a:xfrm>
+          <a:prstGeom prst="rect">
+            <a:avLst/>
+          </a:prstGeom>
+          <a:noFill/>
+        </p:spPr>
+        <p:txBody>
+          <a:bodyPr wrap="square">
+            <a:spAutoFit/>
+          </a:bodyPr>
+          <a:lstStyle/>
+          <a:p>
+            <a:pPr algn="l"/>
+            <a:r>
+              <a:rPr sz="1400" b="1" i="0">
+                <a:solidFill>
+                  <a:srgbClr val="A82020"/>
+                </a:solidFill>
+              </a:rPr>
+              <a:t>▼</a:t>
+            </a:r>
+          </a:p>
+        </p:txBody>
+      </p:sp>
+      <p:sp>
+        <p:nvSpPr>
+          <p:cNvPr id="28" name="TextBox 27"/>
+          <p:cNvSpPr txBox="1"/>
+          <p:nvPr/>
+        </p:nvSpPr>
+        <p:spPr>
+          <a:xfrm>
+            <a:off x="756000" y="2790000"/>
+            <a:ext cx="4932000" cy="251999"/>
+          </a:xfrm>
+          <a:prstGeom prst="rect">
+            <a:avLst/>
+          </a:prstGeom>
+          <a:noFill/>
+        </p:spPr>
+        <p:txBody>
+          <a:bodyPr wrap="square">
+            <a:spAutoFit/>
+          </a:bodyPr>
+          <a:lstStyle/>
+          <a:p>
+            <a:pPr algn="l"/>
+            <a:r>
+              <a:rPr sz="1000" b="1" i="0">
+                <a:solidFill>
+                  <a:srgbClr val="1B3A6B"/>
+                </a:solidFill>
+              </a:rPr>
+              <a:t>Coûts énergétiques</a:t>
+            </a:r>
+          </a:p>
+        </p:txBody>
+      </p:sp>
+      <p:sp>
+        <p:nvSpPr>
+          <p:cNvPr id="29" name="TextBox 28"/>
+          <p:cNvSpPr txBox="1"/>
+          <p:nvPr/>
+        </p:nvSpPr>
+        <p:spPr>
+          <a:xfrm>
+            <a:off x="756000" y="3077999"/>
+            <a:ext cx="4932000" cy="288000"/>
+          </a:xfrm>
+          <a:prstGeom prst="rect">
+            <a:avLst/>
+          </a:prstGeom>
+          <a:noFill/>
+        </p:spPr>
+        <p:txBody>
+          <a:bodyPr wrap="square">
+            <a:spAutoFit/>
+          </a:bodyPr>
+          <a:lstStyle/>
+          <a:p>
+            <a:pPr algn="l"/>
+            <a:r>
+              <a:rPr sz="800" b="0" i="0">
+                <a:solidFill>
+                  <a:srgbClr val="555555"/>
+                </a:solidFill>
+              </a:rPr>
+              <a:t>L'augmentation des coûts énergétiques pour les data centers pourrait éroder les marges des acteurs les moins efficaces.</a:t>
+            </a:r>
+          </a:p>
+        </p:txBody>
+      </p:sp>
+      <p:sp>
+        <p:nvSpPr>
+          <p:cNvPr id="30" name="Rectangle 29"/>
+          <p:cNvSpPr/>
+          <p:nvPr/>
+        </p:nvSpPr>
+        <p:spPr>
+          <a:xfrm>
+            <a:off x="324000" y="3653999"/>
+            <a:ext cx="36000" cy="684000"/>
+          </a:xfrm>
+          <a:prstGeom prst="rect">
+            <a:avLst/>
+          </a:prstGeom>
+          <a:solidFill>
+            <a:srgbClr val="A82020"/>
+          </a:solidFill>
+          <a:ln>
+            <a:noFill/>
+          </a:ln>
+        </p:spPr>
+        <p:style>
+          <a:lnRef idx="1">
+            <a:schemeClr val="accent1"/>
+          </a:lnRef>
+          <a:fillRef idx="3">
+            <a:schemeClr val="accent1"/>
+          </a:fillRef>
+          <a:effectRef idx="2">
+            <a:schemeClr val="accent1"/>
+          </a:effectRef>
+          <a:fontRef idx="minor">
+            <a:schemeClr val="lt1"/>
+          </a:fontRef>
+        </p:style>
+        <p:txBody>
+          <a:bodyPr rtlCol="0" anchor="ctr"/>
+          <a:lstStyle/>
+          <a:p>
+            <a:pPr algn="ctr"/>
+          </a:p>
+        </p:txBody>
+      </p:sp>
+      <p:sp>
+        <p:nvSpPr>
+          <p:cNvPr id="31" name="Rectangle 30"/>
+          <p:cNvSpPr/>
+          <p:nvPr/>
+        </p:nvSpPr>
+        <p:spPr>
+          <a:xfrm>
+            <a:off x="360000" y="3653999"/>
+            <a:ext cx="5400000" cy="684000"/>
+          </a:xfrm>
+          <a:prstGeom prst="rect">
+            <a:avLst/>
+          </a:prstGeom>
+          <a:solidFill>
+            <a:srgbClr val="FBEBEB"/>
+          </a:solidFill>
+          <a:ln>
+            <a:noFill/>
+          </a:ln>
+        </p:spPr>
+        <p:style>
+          <a:lnRef idx="1">
+            <a:schemeClr val="accent1"/>
+          </a:lnRef>
+          <a:fillRef idx="3">
+            <a:schemeClr val="accent1"/>
+          </a:fillRef>
+          <a:effectRef idx="2">
+            <a:schemeClr val="accent1"/>
+          </a:effectRef>
+          <a:fontRef idx="minor">
+            <a:schemeClr val="lt1"/>
+          </a:fontRef>
+        </p:style>
+        <p:txBody>
+          <a:bodyPr rtlCol="0" anchor="ctr"/>
+          <a:lstStyle/>
+          <a:p>
+            <a:pPr algn="ctr"/>
+          </a:p>
+        </p:txBody>
+      </p:sp>
+      <p:sp>
+        <p:nvSpPr>
+          <p:cNvPr id="32" name="TextBox 31"/>
+          <p:cNvSpPr txBox="1"/>
+          <p:nvPr/>
+        </p:nvSpPr>
+        <p:spPr>
+          <a:xfrm>
+            <a:off x="396000" y="3725999"/>
+            <a:ext cx="288000" cy="288000"/>
+          </a:xfrm>
+          <a:prstGeom prst="rect">
+            <a:avLst/>
+          </a:prstGeom>
+          <a:noFill/>
+        </p:spPr>
+        <p:txBody>
+          <a:bodyPr wrap="square">
+            <a:spAutoFit/>
+          </a:bodyPr>
+          <a:lstStyle/>
+          <a:p>
+            <a:pPr algn="l"/>
+            <a:r>
+              <a:rPr sz="1400" b="1" i="0">
+                <a:solidFill>
+                  <a:srgbClr val="A82020"/>
+                </a:solidFill>
+              </a:rPr>
+              <a:t>▼</a:t>
+            </a:r>
+          </a:p>
+        </p:txBody>
+      </p:sp>
+      <p:sp>
+        <p:nvSpPr>
+          <p:cNvPr id="33" name="TextBox 32"/>
+          <p:cNvSpPr txBox="1"/>
+          <p:nvPr/>
+        </p:nvSpPr>
+        <p:spPr>
+          <a:xfrm>
+            <a:off x="756000" y="3707999"/>
+            <a:ext cx="4932000" cy="251999"/>
+          </a:xfrm>
+          <a:prstGeom prst="rect">
+            <a:avLst/>
+          </a:prstGeom>
+          <a:noFill/>
+        </p:spPr>
+        <p:txBody>
+          <a:bodyPr wrap="square">
+            <a:spAutoFit/>
+          </a:bodyPr>
+          <a:lstStyle/>
+          <a:p>
+            <a:pPr algn="l"/>
+            <a:r>
+              <a:rPr sz="1000" b="1" i="0">
+                <a:solidFill>
+                  <a:srgbClr val="1B3A6B"/>
+                </a:solidFill>
+              </a:rPr>
+              <a:t>Tensions géopolitiques</a:t>
+            </a:r>
+          </a:p>
+        </p:txBody>
+      </p:sp>
+      <p:sp>
+        <p:nvSpPr>
+          <p:cNvPr id="34" name="TextBox 33"/>
+          <p:cNvSpPr txBox="1"/>
+          <p:nvPr/>
+        </p:nvSpPr>
+        <p:spPr>
+          <a:xfrm>
+            <a:off x="756000" y="3995999"/>
+            <a:ext cx="4932000" cy="288000"/>
+          </a:xfrm>
+          <a:prstGeom prst="rect">
+            <a:avLst/>
+          </a:prstGeom>
+          <a:noFill/>
+        </p:spPr>
+        <p:txBody>
+          <a:bodyPr wrap="square">
+            <a:spAutoFit/>
+          </a:bodyPr>
+          <a:lstStyle/>
+          <a:p>
+            <a:pPr algn="l"/>
+            <a:r>
+              <a:rPr sz="800" b="0" i="0">
+                <a:solidFill>
+                  <a:srgbClr val="555555"/>
+                </a:solidFill>
+              </a:rPr>
+              <a:t>Les restrictions commerciales (ex : sanctions contre la Chine) pourraient perturber les chaînes d'approvisionnement des semi-conducteurs.</a:t>
+            </a:r>
+          </a:p>
+        </p:txBody>
+      </p:sp>
+      <p:sp>
+        <p:nvSpPr>
+          <p:cNvPr id="35" name="Rectangle 34"/>
+          <p:cNvSpPr/>
+          <p:nvPr/>
+        </p:nvSpPr>
+        <p:spPr>
+          <a:xfrm>
+            <a:off x="5976000" y="900000"/>
+            <a:ext cx="2844000" cy="3600000"/>
+          </a:xfrm>
+          <a:prstGeom prst="rect">
+            <a:avLst/>
+          </a:prstGeom>
+          <a:solidFill>
+            <a:srgbClr val="F5F7FA"/>
+          </a:solidFill>
+          <a:ln>
+            <a:noFill/>
+          </a:ln>
+        </p:spPr>
+        <p:style>
+          <a:lnRef idx="1">
+            <a:schemeClr val="accent1"/>
+          </a:lnRef>
+          <a:fillRef idx="3">
+            <a:schemeClr val="accent1"/>
+          </a:fillRef>
+          <a:effectRef idx="2">
+            <a:schemeClr val="accent1"/>
+          </a:effectRef>
+          <a:fontRef idx="minor">
+            <a:schemeClr val="lt1"/>
+          </a:fontRef>
+        </p:style>
+        <p:txBody>
+          <a:bodyPr rtlCol="0" anchor="ctr"/>
+          <a:lstStyle/>
+          <a:p>
+            <a:pPr algn="ctr"/>
+          </a:p>
+        </p:txBody>
+      </p:sp>
+      <p:sp>
+        <p:nvSpPr>
+          <p:cNvPr id="36" name="TextBox 35"/>
+          <p:cNvSpPr txBox="1"/>
+          <p:nvPr/>
+        </p:nvSpPr>
+        <p:spPr>
+          <a:xfrm>
+            <a:off x="5976000" y="1044000"/>
+            <a:ext cx="2844000" cy="251999"/>
+          </a:xfrm>
+          <a:prstGeom prst="rect">
+            <a:avLst/>
+          </a:prstGeom>
+          <a:noFill/>
+        </p:spPr>
+        <p:txBody>
+          <a:bodyPr wrap="square">
+            <a:spAutoFit/>
+          </a:bodyPr>
+          <a:lstStyle/>
+          <a:p>
+            <a:pPr algn="ctr"/>
+            <a:r>
+              <a:rPr sz="850" b="1" i="0">
+                <a:solidFill>
+                  <a:srgbClr val="1B3A6B"/>
+                </a:solidFill>
+              </a:rPr>
+              <a:t>SIGNAL SECTORIEL</a:t>
+            </a:r>
+          </a:p>
+        </p:txBody>
+      </p:sp>
+      <p:sp>
+        <p:nvSpPr>
+          <p:cNvPr id="37" name="Rectangle 36"/>
+          <p:cNvSpPr/>
+          <p:nvPr/>
+        </p:nvSpPr>
+        <p:spPr>
+          <a:xfrm>
+            <a:off x="6300000" y="1404000"/>
+            <a:ext cx="2196000" cy="503999"/>
           </a:xfrm>
           <a:prstGeom prst="rect">
             <a:avLst/>
@@ -28875,57 +29328,14 @@
       </p:sp>
       <p:sp>
         <p:nvSpPr>
-          <p:cNvPr id="26" name="Rectangle 25"/>
-          <p:cNvSpPr/>
-          <p:nvPr/>
-        </p:nvSpPr>
-        <p:spPr>
-          <a:xfrm>
-            <a:off x="360000" y="2736000"/>
-            <a:ext cx="5400000" cy="684000"/>
-          </a:xfrm>
-          <a:prstGeom prst="rect">
-            <a:avLst/>
-          </a:prstGeom>
-          <a:solidFill>
-            <a:srgbClr val="E8F5EE"/>
-          </a:solidFill>
-          <a:ln>
-            <a:noFill/>
-          </a:ln>
-        </p:spPr>
-        <p:style>
-          <a:lnRef idx="1">
-            <a:schemeClr val="accent1"/>
-          </a:lnRef>
-          <a:fillRef idx="3">
-            <a:schemeClr val="accent1"/>
-          </a:fillRef>
-          <a:effectRef idx="2">
-            <a:schemeClr val="accent1"/>
-          </a:effectRef>
-          <a:fontRef idx="minor">
-            <a:schemeClr val="lt1"/>
-          </a:fontRef>
-        </p:style>
-        <p:txBody>
-          <a:bodyPr rtlCol="0" anchor="ctr"/>
-          <a:lstStyle/>
-          <a:p>
-            <a:pPr algn="ctr"/>
-          </a:p>
-        </p:txBody>
-      </p:sp>
-      <p:sp>
-        <p:nvSpPr>
-          <p:cNvPr id="27" name="TextBox 26"/>
+          <p:cNvPr id="38" name="TextBox 37"/>
           <p:cNvSpPr txBox="1"/>
           <p:nvPr/>
         </p:nvSpPr>
         <p:spPr>
           <a:xfrm>
-            <a:off x="396000" y="2808000"/>
-            <a:ext cx="288000" cy="288000"/>
+            <a:off x="6300000" y="1440000"/>
+            <a:ext cx="2196000" cy="432000"/>
           </a:xfrm>
           <a:prstGeom prst="rect">
             <a:avLst/>
@@ -28938,28 +29348,28 @@
           </a:bodyPr>
           <a:lstStyle/>
           <a:p>
-            <a:pPr algn="l"/>
-            <a:r>
-              <a:rPr sz="1400" b="1" i="0">
-                <a:solidFill>
-                  <a:srgbClr val="1A7A4A"/>
+            <a:pPr algn="ctr"/>
+            <a:r>
+              <a:rPr sz="1200" b="1" i="0">
+                <a:solidFill>
+                  <a:srgbClr val="FFFFFF"/>
                 </a:solidFill>
               </a:rPr>
-              <a:t>▲</a:t>
-            </a:r>
-          </a:p>
-        </p:txBody>
-      </p:sp>
-      <p:sp>
-        <p:nvSpPr>
-          <p:cNvPr id="28" name="TextBox 27"/>
+              <a:t>● SURPONDÉRER</a:t>
+            </a:r>
+          </a:p>
+        </p:txBody>
+      </p:sp>
+      <p:sp>
+        <p:nvSpPr>
+          <p:cNvPr id="39" name="TextBox 38"/>
           <p:cNvSpPr txBox="1"/>
           <p:nvPr/>
         </p:nvSpPr>
         <p:spPr>
           <a:xfrm>
-            <a:off x="756000" y="2790000"/>
-            <a:ext cx="4932000" cy="251999"/>
+            <a:off x="5976000" y="2015999"/>
+            <a:ext cx="2844000" cy="216000"/>
           </a:xfrm>
           <a:prstGeom prst="rect">
             <a:avLst/>
@@ -28972,28 +29382,28 @@
           </a:bodyPr>
           <a:lstStyle/>
           <a:p>
-            <a:pPr algn="l"/>
-            <a:r>
-              <a:rPr sz="1000" b="1" i="0">
-                <a:solidFill>
-                  <a:srgbClr val="1B3A6B"/>
+            <a:pPr algn="ctr"/>
+            <a:r>
+              <a:rPr sz="800" b="0" i="0">
+                <a:solidFill>
+                  <a:srgbClr val="555555"/>
                 </a:solidFill>
               </a:rPr>
-              <a:t>Modernisation SI Publics</a:t>
-            </a:r>
-          </a:p>
-        </p:txBody>
-      </p:sp>
-      <p:sp>
-        <p:nvSpPr>
-          <p:cNvPr id="29" name="TextBox 28"/>
+              <a:t>Score moyen FinSight</a:t>
+            </a:r>
+          </a:p>
+        </p:txBody>
+      </p:sp>
+      <p:sp>
+        <p:nvSpPr>
+          <p:cNvPr id="40" name="TextBox 39"/>
           <p:cNvSpPr txBox="1"/>
           <p:nvPr/>
         </p:nvSpPr>
         <p:spPr>
           <a:xfrm>
-            <a:off x="756000" y="3077999"/>
-            <a:ext cx="4932000" cy="288000"/>
+            <a:off x="5976000" y="2232000"/>
+            <a:ext cx="2844000" cy="468000"/>
           </a:xfrm>
           <a:prstGeom prst="rect">
             <a:avLst/>
@@ -29006,114 +29416,28 @@
           </a:bodyPr>
           <a:lstStyle/>
           <a:p>
-            <a:pPr algn="l"/>
-            <a:r>
-              <a:rPr sz="800" b="0" i="0">
-                <a:solidFill>
-                  <a:srgbClr val="555555"/>
+            <a:pPr algn="ctr"/>
+            <a:r>
+              <a:rPr sz="2800" b="1" i="0">
+                <a:solidFill>
+                  <a:srgbClr val="1B3A6B"/>
                 </a:solidFill>
               </a:rPr>
-              <a:t>Plans gouvernementaux 2026-2028 — budgets numeriques confirmes 6 Etats EU</a:t>
-            </a:r>
-          </a:p>
-        </p:txBody>
-      </p:sp>
-      <p:sp>
-        <p:nvSpPr>
-          <p:cNvPr id="30" name="Rectangle 29"/>
-          <p:cNvSpPr/>
-          <p:nvPr/>
-        </p:nvSpPr>
-        <p:spPr>
-          <a:xfrm>
-            <a:off x="324000" y="3653999"/>
-            <a:ext cx="36000" cy="684000"/>
-          </a:xfrm>
-          <a:prstGeom prst="rect">
-            <a:avLst/>
-          </a:prstGeom>
-          <a:solidFill>
-            <a:srgbClr val="A82020"/>
-          </a:solidFill>
-          <a:ln>
-            <a:noFill/>
-          </a:ln>
-        </p:spPr>
-        <p:style>
-          <a:lnRef idx="1">
-            <a:schemeClr val="accent1"/>
-          </a:lnRef>
-          <a:fillRef idx="3">
-            <a:schemeClr val="accent1"/>
-          </a:fillRef>
-          <a:effectRef idx="2">
-            <a:schemeClr val="accent1"/>
-          </a:effectRef>
-          <a:fontRef idx="minor">
-            <a:schemeClr val="lt1"/>
-          </a:fontRef>
-        </p:style>
-        <p:txBody>
-          <a:bodyPr rtlCol="0" anchor="ctr"/>
-          <a:lstStyle/>
-          <a:p>
-            <a:pPr algn="ctr"/>
-          </a:p>
-        </p:txBody>
-      </p:sp>
-      <p:sp>
-        <p:nvSpPr>
-          <p:cNvPr id="31" name="Rectangle 30"/>
-          <p:cNvSpPr/>
-          <p:nvPr/>
-        </p:nvSpPr>
-        <p:spPr>
-          <a:xfrm>
-            <a:off x="360000" y="3653999"/>
-            <a:ext cx="5400000" cy="684000"/>
-          </a:xfrm>
-          <a:prstGeom prst="rect">
-            <a:avLst/>
-          </a:prstGeom>
-          <a:solidFill>
-            <a:srgbClr val="FBEBEB"/>
-          </a:solidFill>
-          <a:ln>
-            <a:noFill/>
-          </a:ln>
-        </p:spPr>
-        <p:style>
-          <a:lnRef idx="1">
-            <a:schemeClr val="accent1"/>
-          </a:lnRef>
-          <a:fillRef idx="3">
-            <a:schemeClr val="accent1"/>
-          </a:fillRef>
-          <a:effectRef idx="2">
-            <a:schemeClr val="accent1"/>
-          </a:effectRef>
-          <a:fontRef idx="minor">
-            <a:schemeClr val="lt1"/>
-          </a:fontRef>
-        </p:style>
-        <p:txBody>
-          <a:bodyPr rtlCol="0" anchor="ctr"/>
-          <a:lstStyle/>
-          <a:p>
-            <a:pPr algn="ctr"/>
-          </a:p>
-        </p:txBody>
-      </p:sp>
-      <p:sp>
-        <p:nvSpPr>
-          <p:cNvPr id="32" name="TextBox 31"/>
+              <a:t>76/100</a:t>
+            </a:r>
+          </a:p>
+        </p:txBody>
+      </p:sp>
+      <p:sp>
+        <p:nvSpPr>
+          <p:cNvPr id="41" name="TextBox 40"/>
           <p:cNvSpPr txBox="1"/>
           <p:nvPr/>
         </p:nvSpPr>
         <p:spPr>
           <a:xfrm>
-            <a:off x="396000" y="3725999"/>
-            <a:ext cx="288000" cy="288000"/>
+            <a:off x="5976000" y="2808000"/>
+            <a:ext cx="2844000" cy="251999"/>
           </a:xfrm>
           <a:prstGeom prst="rect">
             <a:avLst/>
@@ -29126,28 +29450,28 @@
           </a:bodyPr>
           <a:lstStyle/>
           <a:p>
-            <a:pPr algn="l"/>
-            <a:r>
-              <a:rPr sz="1400" b="1" i="0">
-                <a:solidFill>
-                  <a:srgbClr val="A82020"/>
+            <a:pPr algn="ctr"/>
+            <a:r>
+              <a:rPr sz="800" b="0" i="0">
+                <a:solidFill>
+                  <a:srgbClr val="555555"/>
                 </a:solidFill>
               </a:rPr>
-              <a:t>▼</a:t>
-            </a:r>
-          </a:p>
-        </p:txBody>
-      </p:sp>
-      <p:sp>
-        <p:nvSpPr>
-          <p:cNvPr id="33" name="TextBox 32"/>
+              <a:t>WACC median : 11.5 %</a:t>
+            </a:r>
+          </a:p>
+        </p:txBody>
+      </p:sp>
+      <p:sp>
+        <p:nvSpPr>
+          <p:cNvPr id="42" name="TextBox 41"/>
           <p:cNvSpPr txBox="1"/>
           <p:nvPr/>
         </p:nvSpPr>
         <p:spPr>
           <a:xfrm>
-            <a:off x="756000" y="3707999"/>
-            <a:ext cx="4932000" cy="251999"/>
+            <a:off x="5976000" y="3096000"/>
+            <a:ext cx="2844000" cy="216000"/>
           </a:xfrm>
           <a:prstGeom prst="rect">
             <a:avLst/>
@@ -29160,28 +29484,28 @@
           </a:bodyPr>
           <a:lstStyle/>
           <a:p>
-            <a:pPr algn="l"/>
-            <a:r>
-              <a:rPr sz="1000" b="1" i="0">
-                <a:solidFill>
-                  <a:srgbClr val="1B3A6B"/>
+            <a:pPr algn="ctr"/>
+            <a:r>
+              <a:rPr sz="800" b="0" i="0">
+                <a:solidFill>
+                  <a:srgbClr val="AAAAAA"/>
                 </a:solidFill>
               </a:rPr>
-              <a:t>Sensibilite Taux</a:t>
-            </a:r>
-          </a:p>
-        </p:txBody>
-      </p:sp>
-      <p:sp>
-        <p:nvSpPr>
-          <p:cNvPr id="34" name="TextBox 33"/>
+              <a:t>Horizon : 12 mois</a:t>
+            </a:r>
+          </a:p>
+        </p:txBody>
+      </p:sp>
+      <p:sp>
+        <p:nvSpPr>
+          <p:cNvPr id="43" name="TextBox 42"/>
           <p:cNvSpPr txBox="1"/>
           <p:nvPr/>
         </p:nvSpPr>
         <p:spPr>
           <a:xfrm>
-            <a:off x="756000" y="3995999"/>
-            <a:ext cx="4932000" cy="288000"/>
+            <a:off x="5976000" y="3456000"/>
+            <a:ext cx="2844000" cy="540000"/>
           </a:xfrm>
           <a:prstGeom prst="rect">
             <a:avLst/>
@@ -29194,338 +29518,14 @@
           </a:bodyPr>
           <a:lstStyle/>
           <a:p>
-            <a:pPr algn="l"/>
+            <a:pPr algn="ctr"/>
             <a:r>
               <a:rPr sz="800" b="0" i="0">
                 <a:solidFill>
-                  <a:srgbClr val="555555"/>
+                  <a:srgbClr val="2A5298"/>
                 </a:solidFill>
               </a:rPr>
-              <a:t>Compression multiples si taux &gt; 4,5 % — impact modere sur FCF structurel</a:t>
-            </a:r>
-          </a:p>
-        </p:txBody>
-      </p:sp>
-      <p:sp>
-        <p:nvSpPr>
-          <p:cNvPr id="35" name="Rectangle 34"/>
-          <p:cNvSpPr/>
-          <p:nvPr/>
-        </p:nvSpPr>
-        <p:spPr>
-          <a:xfrm>
-            <a:off x="5976000" y="900000"/>
-            <a:ext cx="2844000" cy="3600000"/>
-          </a:xfrm>
-          <a:prstGeom prst="rect">
-            <a:avLst/>
-          </a:prstGeom>
-          <a:solidFill>
-            <a:srgbClr val="F5F7FA"/>
-          </a:solidFill>
-          <a:ln>
-            <a:noFill/>
-          </a:ln>
-        </p:spPr>
-        <p:style>
-          <a:lnRef idx="1">
-            <a:schemeClr val="accent1"/>
-          </a:lnRef>
-          <a:fillRef idx="3">
-            <a:schemeClr val="accent1"/>
-          </a:fillRef>
-          <a:effectRef idx="2">
-            <a:schemeClr val="accent1"/>
-          </a:effectRef>
-          <a:fontRef idx="minor">
-            <a:schemeClr val="lt1"/>
-          </a:fontRef>
-        </p:style>
-        <p:txBody>
-          <a:bodyPr rtlCol="0" anchor="ctr"/>
-          <a:lstStyle/>
-          <a:p>
-            <a:pPr algn="ctr"/>
-          </a:p>
-        </p:txBody>
-      </p:sp>
-      <p:sp>
-        <p:nvSpPr>
-          <p:cNvPr id="36" name="TextBox 35"/>
-          <p:cNvSpPr txBox="1"/>
-          <p:nvPr/>
-        </p:nvSpPr>
-        <p:spPr>
-          <a:xfrm>
-            <a:off x="5976000" y="1044000"/>
-            <a:ext cx="2844000" cy="251999"/>
-          </a:xfrm>
-          <a:prstGeom prst="rect">
-            <a:avLst/>
-          </a:prstGeom>
-          <a:noFill/>
-        </p:spPr>
-        <p:txBody>
-          <a:bodyPr wrap="square">
-            <a:spAutoFit/>
-          </a:bodyPr>
-          <a:lstStyle/>
-          <a:p>
-            <a:pPr algn="ctr"/>
-            <a:r>
-              <a:rPr sz="850" b="1" i="0">
-                <a:solidFill>
-                  <a:srgbClr val="1B3A6B"/>
-                </a:solidFill>
-              </a:rPr>
-              <a:t>SIGNAL SECTORIEL</a:t>
-            </a:r>
-          </a:p>
-        </p:txBody>
-      </p:sp>
-      <p:sp>
-        <p:nvSpPr>
-          <p:cNvPr id="37" name="Rectangle 36"/>
-          <p:cNvSpPr/>
-          <p:nvPr/>
-        </p:nvSpPr>
-        <p:spPr>
-          <a:xfrm>
-            <a:off x="6300000" y="1404000"/>
-            <a:ext cx="2196000" cy="503999"/>
-          </a:xfrm>
-          <a:prstGeom prst="rect">
-            <a:avLst/>
-          </a:prstGeom>
-          <a:solidFill>
-            <a:srgbClr val="1A7A4A"/>
-          </a:solidFill>
-          <a:ln>
-            <a:noFill/>
-          </a:ln>
-        </p:spPr>
-        <p:style>
-          <a:lnRef idx="1">
-            <a:schemeClr val="accent1"/>
-          </a:lnRef>
-          <a:fillRef idx="3">
-            <a:schemeClr val="accent1"/>
-          </a:fillRef>
-          <a:effectRef idx="2">
-            <a:schemeClr val="accent1"/>
-          </a:effectRef>
-          <a:fontRef idx="minor">
-            <a:schemeClr val="lt1"/>
-          </a:fontRef>
-        </p:style>
-        <p:txBody>
-          <a:bodyPr rtlCol="0" anchor="ctr"/>
-          <a:lstStyle/>
-          <a:p>
-            <a:pPr algn="ctr"/>
-          </a:p>
-        </p:txBody>
-      </p:sp>
-      <p:sp>
-        <p:nvSpPr>
-          <p:cNvPr id="38" name="TextBox 37"/>
-          <p:cNvSpPr txBox="1"/>
-          <p:nvPr/>
-        </p:nvSpPr>
-        <p:spPr>
-          <a:xfrm>
-            <a:off x="6300000" y="1440000"/>
-            <a:ext cx="2196000" cy="432000"/>
-          </a:xfrm>
-          <a:prstGeom prst="rect">
-            <a:avLst/>
-          </a:prstGeom>
-          <a:noFill/>
-        </p:spPr>
-        <p:txBody>
-          <a:bodyPr wrap="square">
-            <a:spAutoFit/>
-          </a:bodyPr>
-          <a:lstStyle/>
-          <a:p>
-            <a:pPr algn="ctr"/>
-            <a:r>
-              <a:rPr sz="1200" b="1" i="0">
-                <a:solidFill>
-                  <a:srgbClr val="FFFFFF"/>
-                </a:solidFill>
-              </a:rPr>
-              <a:t>● SURPONDÉRER</a:t>
-            </a:r>
-          </a:p>
-        </p:txBody>
-      </p:sp>
-      <p:sp>
-        <p:nvSpPr>
-          <p:cNvPr id="39" name="TextBox 38"/>
-          <p:cNvSpPr txBox="1"/>
-          <p:nvPr/>
-        </p:nvSpPr>
-        <p:spPr>
-          <a:xfrm>
-            <a:off x="5976000" y="2015999"/>
-            <a:ext cx="2844000" cy="216000"/>
-          </a:xfrm>
-          <a:prstGeom prst="rect">
-            <a:avLst/>
-          </a:prstGeom>
-          <a:noFill/>
-        </p:spPr>
-        <p:txBody>
-          <a:bodyPr wrap="square">
-            <a:spAutoFit/>
-          </a:bodyPr>
-          <a:lstStyle/>
-          <a:p>
-            <a:pPr algn="ctr"/>
-            <a:r>
-              <a:rPr sz="800" b="0" i="0">
-                <a:solidFill>
-                  <a:srgbClr val="555555"/>
-                </a:solidFill>
-              </a:rPr>
-              <a:t>Score moyen FinSight</a:t>
-            </a:r>
-          </a:p>
-        </p:txBody>
-      </p:sp>
-      <p:sp>
-        <p:nvSpPr>
-          <p:cNvPr id="40" name="TextBox 39"/>
-          <p:cNvSpPr txBox="1"/>
-          <p:nvPr/>
-        </p:nvSpPr>
-        <p:spPr>
-          <a:xfrm>
-            <a:off x="5976000" y="2232000"/>
-            <a:ext cx="2844000" cy="468000"/>
-          </a:xfrm>
-          <a:prstGeom prst="rect">
-            <a:avLst/>
-          </a:prstGeom>
-          <a:noFill/>
-        </p:spPr>
-        <p:txBody>
-          <a:bodyPr wrap="square">
-            <a:spAutoFit/>
-          </a:bodyPr>
-          <a:lstStyle/>
-          <a:p>
-            <a:pPr algn="ctr"/>
-            <a:r>
-              <a:rPr sz="2800" b="1" i="0">
-                <a:solidFill>
-                  <a:srgbClr val="1B3A6B"/>
-                </a:solidFill>
-              </a:rPr>
-              <a:t>76/100</a:t>
-            </a:r>
-          </a:p>
-        </p:txBody>
-      </p:sp>
-      <p:sp>
-        <p:nvSpPr>
-          <p:cNvPr id="41" name="TextBox 40"/>
-          <p:cNvSpPr txBox="1"/>
-          <p:nvPr/>
-        </p:nvSpPr>
-        <p:spPr>
-          <a:xfrm>
-            <a:off x="5976000" y="2808000"/>
-            <a:ext cx="2844000" cy="251999"/>
-          </a:xfrm>
-          <a:prstGeom prst="rect">
-            <a:avLst/>
-          </a:prstGeom>
-          <a:noFill/>
-        </p:spPr>
-        <p:txBody>
-          <a:bodyPr wrap="square">
-            <a:spAutoFit/>
-          </a:bodyPr>
-          <a:lstStyle/>
-          <a:p>
-            <a:pPr algn="ctr"/>
-            <a:r>
-              <a:rPr sz="800" b="0" i="0">
-                <a:solidFill>
-                  <a:srgbClr val="555555"/>
-                </a:solidFill>
-              </a:rPr>
-              <a:t>WACC median : 11.5 %</a:t>
-            </a:r>
-          </a:p>
-        </p:txBody>
-      </p:sp>
-      <p:sp>
-        <p:nvSpPr>
-          <p:cNvPr id="42" name="TextBox 41"/>
-          <p:cNvSpPr txBox="1"/>
-          <p:nvPr/>
-        </p:nvSpPr>
-        <p:spPr>
-          <a:xfrm>
-            <a:off x="5976000" y="3096000"/>
-            <a:ext cx="2844000" cy="216000"/>
-          </a:xfrm>
-          <a:prstGeom prst="rect">
-            <a:avLst/>
-          </a:prstGeom>
-          <a:noFill/>
-        </p:spPr>
-        <p:txBody>
-          <a:bodyPr wrap="square">
-            <a:spAutoFit/>
-          </a:bodyPr>
-          <a:lstStyle/>
-          <a:p>
-            <a:pPr algn="ctr"/>
-            <a:r>
-              <a:rPr sz="800" b="0" i="0">
-                <a:solidFill>
-                  <a:srgbClr val="AAAAAA"/>
-                </a:solidFill>
-              </a:rPr>
-              <a:t>Horizon : 12 mois</a:t>
-            </a:r>
-          </a:p>
-        </p:txBody>
-      </p:sp>
-      <p:sp>
-        <p:nvSpPr>
-          <p:cNvPr id="43" name="TextBox 42"/>
-          <p:cNvSpPr txBox="1"/>
-          <p:nvPr/>
-        </p:nvSpPr>
-        <p:spPr>
-          <a:xfrm>
-            <a:off x="5976000" y="3456000"/>
-            <a:ext cx="2844000" cy="540000"/>
-          </a:xfrm>
-          <a:prstGeom prst="rect">
-            <a:avLst/>
-          </a:prstGeom>
-          <a:noFill/>
-        </p:spPr>
-        <p:txBody>
-          <a:bodyPr wrap="square">
-            <a:spAutoFit/>
-          </a:bodyPr>
-          <a:lstStyle/>
-          <a:p>
-            <a:pPr algn="ctr"/>
-            <a:r>
-              <a:rPr sz="800" b="0" i="0">
-                <a:solidFill>
-                  <a:srgbClr val="2A5298"/>
-                </a:solidFill>
-              </a:rPr>
-              <a:t>Secteur en phase d'expansion | porté par l'IA et le cloud souverain</a:t>
+              <a:t>Le secteur est en phase de maturité avancée avec des opportunités de croissance résiduelles dans l'IA et le cloud, mais les valorisations élevées limitent les marges de sécurité.</a:t>
             </a:r>
           </a:p>
         </p:txBody>

--- a/preview/secteur_Technology_S&P_500/secteur_Technology_S&P_500.pptx
+++ b/preview/secteur_Technology_S&P_500/secteur_Technology_S&P_500.pptx
@@ -8172,7 +8172,7 @@
                   <a:srgbClr val="555555"/>
                 </a:solidFill>
               </a:rPr>
-              <a:t>L'intégration massive de l'IA générative dans les workflows d'entreprise stimule la demande pour les infrastructures cloud et les puces spécialisées.</a:t>
+              <a:t>L'adoption massive des solutions d'IA par les entreprises, notamment via les plateformes cloud de GOOGL et les GPU de NVDA, devrait propulser la croissance orga</a:t>
             </a:r>
           </a:p>
         </p:txBody>
@@ -8326,7 +8326,7 @@
                   <a:srgbClr val="555555"/>
                 </a:solidFill>
               </a:rPr>
-              <a:t>Les enquêtes et amendes potentielles pourraient peser sur les marges des géants technologiques, notamment aux États-Unis et en Europe.</a:t>
+              <a:t>Les enquêtes antitrust en cours, notamment aux États-Unis et en Europe, pourraient entraîner des amendes ou des restrictions opérationnelles pour les géants du </a:t>
             </a:r>
           </a:p>
         </p:txBody>
@@ -9189,7 +9189,7 @@
                   <a:srgbClr val="555555"/>
                 </a:solidFill>
               </a:rPr>
-              <a:t>Les plateformes de publicité ciblée (META, GOOGL) bénéficient d'une collecte et d'une analyse de données toujours plus sophistiquées.</a:t>
+              <a:t>META bénéficie d'une reprise structurelle de la publicité en ligne, avec une allocation croissante des budgets marketing vers le métavers et les réseaux sociaux</a:t>
             </a:r>
           </a:p>
         </p:txBody>
@@ -9343,7 +9343,7 @@
                   <a:srgbClr val="555555"/>
                 </a:solidFill>
               </a:rPr>
-              <a:t>La volatilité des stocks et la surcapacité dans les puces pourraient impacter les revenus de NVDA et ses pairs.</a:t>
+              <a:t>L'émergence de nouveaux acteurs chinois dans les semi-conducteurs et le cloud, comme Huawei ou Alibaba, menace la position dominante des leaders occidentaux.</a:t>
             </a:r>
           </a:p>
         </p:txBody>
@@ -10206,7 +10206,7 @@
                   <a:srgbClr val="555555"/>
                 </a:solidFill>
               </a:rPr>
-              <a:t>Les entreprises accélèrent leur migration vers des solutions cloud hybrides, boostant les revenus récurrents des fournisseurs comme GOOGL.</a:t>
+              <a:t>La migration continue des entreprises vers le cloud hybride, portée par des acteurs comme GOOGL avec sa suite Workspace et ses services Vertex AI, garantit une </a:t>
             </a:r>
           </a:p>
         </p:txBody>
@@ -10360,7 +10360,7 @@
                   <a:srgbClr val="555555"/>
                 </a:solidFill>
               </a:rPr>
-              <a:t>L'émergence de nouveaux acteurs (startups, géants chinois) menace la position dominante des leaders actuels.</a:t>
+              <a:t>L'augmentation des cyberattaques ciblant les infrastructures critiques pourrait entraîner des coûts de conformité et de protection supplémentaires pour les entr</a:t>
             </a:r>
           </a:p>
         </p:txBody>
@@ -14326,7 +14326,7 @@
                   <a:srgbClr val="FFFFFF"/>
                 </a:solidFill>
               </a:rPr>
-              <a:t>Régulation antitrust</a:t>
+              <a:t>Régulation</a:t>
             </a:r>
           </a:p>
         </p:txBody>
@@ -14360,7 +14360,7 @@
                   <a:srgbClr val="555555"/>
                 </a:solidFill>
               </a:rPr>
-              <a:t>Les enquêtes et amendes potentielles pourraient peser sur les marges des géants technologiques, notamment aux États-Unis et en Europe.</a:t>
+              <a:t>Les enquêtes antitrust en cours, notamment aux États-Unis et en Europe, pourraient entraîner des amendes ou des restrictions opérationnelles pour les géants du secteur.</a:t>
             </a:r>
           </a:p>
         </p:txBody>
@@ -14480,7 +14480,7 @@
                   <a:srgbClr val="FFFFFF"/>
                 </a:solidFill>
               </a:rPr>
-              <a:t>Cycles de semi-conducteurs</a:t>
+              <a:t>Concurrence</a:t>
             </a:r>
           </a:p>
         </p:txBody>
@@ -14514,7 +14514,7 @@
                   <a:srgbClr val="555555"/>
                 </a:solidFill>
               </a:rPr>
-              <a:t>La volatilité des stocks et la surcapacité dans les puces pourraient impacter les revenus de NVDA et ses pairs.</a:t>
+              <a:t>L'émergence de nouveaux acteurs chinois dans les semi-conducteurs et le cloud, comme Huawei ou Alibaba, menace la position dominante des leaders occidentaux.</a:t>
             </a:r>
           </a:p>
         </p:txBody>
@@ -14634,7 +14634,7 @@
                   <a:srgbClr val="FFFFFF"/>
                 </a:solidFill>
               </a:rPr>
-              <a:t>Concurrence accrue en IA</a:t>
+              <a:t>Cybersecurity</a:t>
             </a:r>
           </a:p>
         </p:txBody>
@@ -14668,7 +14668,7 @@
                   <a:srgbClr val="555555"/>
                 </a:solidFill>
               </a:rPr>
-              <a:t>L'émergence de nouveaux acteurs (startups, géants chinois) menace la position dominante des leaders actuels.</a:t>
+              <a:t>L'augmentation des cyberattaques ciblant les infrastructures critiques pourrait entraîner des coûts de conformité et de protection supplémentaires pour les entreprises.</a:t>
             </a:r>
           </a:p>
         </p:txBody>
@@ -16921,7 +16921,7 @@
                   <a:srgbClr val="555555"/>
                 </a:solidFill>
               </a:rPr>
-              <a:t>+ Adoption accélérée de l'IA — L'intégration massive de l'IA générative dans les workflows d'entreprise stimule la demande pour les infrastructures cloud et les puces spéc</a:t>
+              <a:t>+ IA Générative — L'adoption massive des solutions d'IA par les entreprises, notamment via les plateformes cloud de GOOGL et les GPU de NVDA, devrait propulse</a:t>
             </a:r>
           </a:p>
         </p:txBody>
@@ -17041,7 +17041,7 @@
                   <a:srgbClr val="555555"/>
                 </a:solidFill>
               </a:rPr>
-              <a:t>- Régulation antitrust — Les enquêtes et amendes potentielles pourraient peser sur les marges des géants technologiques, notamment aux États-Unis et en Europe.</a:t>
+              <a:t>- Régulation — Les enquêtes antitrust en cours, notamment aux États-Unis et en Europe, pourraient entraîner des amendes ou des restrictions opérationnelles</a:t>
             </a:r>
           </a:p>
         </p:txBody>
@@ -19593,7 +19593,7 @@
                   <a:srgbClr val="1B3A6B"/>
                 </a:solidFill>
               </a:rPr>
-              <a:t>Adoption accélérée de l'IA</a:t>
+              <a:t>IA Générative</a:t>
             </a:r>
           </a:p>
         </p:txBody>
@@ -19627,7 +19627,7 @@
                   <a:srgbClr val="555555"/>
                 </a:solidFill>
               </a:rPr>
-              <a:t>L'intégration massive de l'IA générative dans les workflows d'entreprise stimule la demande pour les infrastructures cloud et les puces spécialisées.</a:t>
+              <a:t>L'adoption massive des solutions d'IA par les entreprises, notamment via les plateformes cloud de GOOGL et les GPU de NVDA, devrait propulser la croissance organique du secteur.</a:t>
             </a:r>
           </a:p>
         </p:txBody>
@@ -19747,7 +19747,7 @@
                   <a:srgbClr val="1B3A6B"/>
                 </a:solidFill>
               </a:rPr>
-              <a:t>Monétisation des données</a:t>
+              <a:t>Publicité digitale</a:t>
             </a:r>
           </a:p>
         </p:txBody>
@@ -19781,7 +19781,7 @@
                   <a:srgbClr val="555555"/>
                 </a:solidFill>
               </a:rPr>
-              <a:t>Les plateformes de publicité ciblée (META, GOOGL) bénéficient d'une collecte et d'une analyse de données toujours plus sophistiquées.</a:t>
+              <a:t>META bénéficie d'une reprise structurelle de la publicité en ligne, avec une allocation croissante des budgets marketing vers le métavers et les réseaux sociaux.</a:t>
             </a:r>
           </a:p>
         </p:txBody>
@@ -19901,7 +19901,7 @@
                   <a:srgbClr val="1B3A6B"/>
                 </a:solidFill>
               </a:rPr>
-              <a:t>Transition vers le cloud hybride</a:t>
+              <a:t>Infrastructure Cloud</a:t>
             </a:r>
           </a:p>
         </p:txBody>
@@ -19935,7 +19935,7 @@
                   <a:srgbClr val="555555"/>
                 </a:solidFill>
               </a:rPr>
-              <a:t>Les entreprises accélèrent leur migration vers des solutions cloud hybrides, boostant les revenus récurrents des fournisseurs comme GOOGL.</a:t>
+              <a:t>La migration continue des entreprises vers le cloud hybride, portée par des acteurs comme GOOGL avec sa suite Workspace et ses services Vertex AI, garantit une visibilité sur les revenus récurrents.</a:t>
             </a:r>
           </a:p>
         </p:txBody>
@@ -20132,7 +20132,7 @@
                   <a:srgbClr val="A82020"/>
                 </a:solidFill>
               </a:rPr>
-              <a:t>Régulation antitrust</a:t>
+              <a:t>Régulation</a:t>
             </a:r>
           </a:p>
         </p:txBody>
@@ -20166,7 +20166,7 @@
                   <a:srgbClr val="555555"/>
                 </a:solidFill>
               </a:rPr>
-              <a:t>Les enquêtes et amendes potentielles pourraient peser sur les marges des géants technologiques, notamment aux États-Unis et en Europe.</a:t>
+              <a:t>Les enquêtes antitrust en cours, notamment aux États-Unis et en Europe, pourraient entraîner des amendes ou des restrictions opérationnelles pour les géants du secteur.</a:t>
             </a:r>
           </a:p>
         </p:txBody>
@@ -20286,7 +20286,7 @@
                   <a:srgbClr val="A82020"/>
                 </a:solidFill>
               </a:rPr>
-              <a:t>Cycles de semi-conducteurs</a:t>
+              <a:t>Concurrence</a:t>
             </a:r>
           </a:p>
         </p:txBody>
@@ -20320,7 +20320,7 @@
                   <a:srgbClr val="555555"/>
                 </a:solidFill>
               </a:rPr>
-              <a:t>La volatilité des stocks et la surcapacité dans les puces pourraient impacter les revenus de NVDA et ses pairs.</a:t>
+              <a:t>L'émergence de nouveaux acteurs chinois dans les semi-conducteurs et le cloud, comme Huawei ou Alibaba, menace la position dominante des leaders occidentaux.</a:t>
             </a:r>
           </a:p>
         </p:txBody>
@@ -20440,7 +20440,7 @@
                   <a:srgbClr val="A82020"/>
                 </a:solidFill>
               </a:rPr>
-              <a:t>Concurrence accrue en IA</a:t>
+              <a:t>Cybersecurity</a:t>
             </a:r>
           </a:p>
         </p:txBody>
@@ -20474,7 +20474,7 @@
                   <a:srgbClr val="555555"/>
                 </a:solidFill>
               </a:rPr>
-              <a:t>L'émergence de nouveaux acteurs (startups, géants chinois) menace la position dominante des leaders actuels.</a:t>
+              <a:t>L'augmentation des cyberattaques ciblant les infrastructures critiques pourrait entraîner des coûts de conformité et de protection supplémentaires pour les entreprises.</a:t>
             </a:r>
           </a:p>
         </p:txBody>
@@ -24697,7 +24697,7 @@
                   <a:srgbClr val="555555"/>
                 </a:solidFill>
               </a:rPr>
-              <a:t>Le secteur Technology affiche une valorisation réelle soutenue par une croissance organique robuste de 19.9% et un momentum boursier de +49.2% sur 52 semaines, bien au-dessus de la médiane sectorielle de 21.7x EV/EBITDA. Les marges EBITDA de 46.8% reflètent une domination des leaders sur leurs marchés respectifs, notamment dans l'IA, la publicité digitale et les semi-conducteurs.</a:t>
+              <a:t>Le secteur Technology affiche une valorisation réelle soutenue par des marges EBITDA exceptionnelles de 46.8%, bien au-dessus de la médiane sectorielle, reflétant une domination des géants sur leurs marchés respectifs. Les multiples EV/EBITDA à 21.7x, malgré une croissance des revenus de +19.9%, restent justifiés par un momentum boursier de +49.2% sur 52 semaines, signe d'une confiance inébranlable des investisseurs.</a:t>
             </a:r>
           </a:p>
         </p:txBody>
@@ -24851,7 +24851,7 @@
                   <a:srgbClr val="1B3A6B"/>
                 </a:solidFill>
               </a:rPr>
-              <a:t>Adoption accélérée de l'IA</a:t>
+              <a:t>IA Générative</a:t>
             </a:r>
           </a:p>
         </p:txBody>
@@ -24885,7 +24885,7 @@
                   <a:srgbClr val="555555"/>
                 </a:solidFill>
               </a:rPr>
-              <a:t>L'intégration massive de l'IA générative dans les workflows d'entreprise stimule la demande pour les infrastructures cloud et les puces spécialisées.</a:t>
+              <a:t>L'adoption massive des solutions d'IA par les entreprises, notamment via les plateformes cloud de GOOGL et les GPU de NVDA, devrait propulser la croissance organique du secteur.</a:t>
             </a:r>
           </a:p>
         </p:txBody>
@@ -24962,7 +24962,7 @@
                   <a:srgbClr val="1B3A6B"/>
                 </a:solidFill>
               </a:rPr>
-              <a:t>Monétisation des données</a:t>
+              <a:t>Publicité digitale</a:t>
             </a:r>
           </a:p>
         </p:txBody>
@@ -24996,7 +24996,7 @@
                   <a:srgbClr val="555555"/>
                 </a:solidFill>
               </a:rPr>
-              <a:t>Les plateformes de publicité ciblée (META, GOOGL) bénéficient d'une collecte et d'une analyse de données toujours plus sophistiquées.</a:t>
+              <a:t>META bénéficie d'une reprise structurelle de la publicité en ligne, avec une allocation croissante des budgets marketing vers le métavers et les réseaux sociaux.</a:t>
             </a:r>
           </a:p>
         </p:txBody>
@@ -25073,7 +25073,7 @@
                   <a:srgbClr val="1B3A6B"/>
                 </a:solidFill>
               </a:rPr>
-              <a:t>Transition vers le cloud hybride</a:t>
+              <a:t>Infrastructure Cloud</a:t>
             </a:r>
           </a:p>
         </p:txBody>
@@ -25107,7 +25107,7 @@
                   <a:srgbClr val="555555"/>
                 </a:solidFill>
               </a:rPr>
-              <a:t>Les entreprises accélèrent leur migration vers des solutions cloud hybrides, boostant les revenus récurrents des fournisseurs comme GOOGL.</a:t>
+              <a:t>La migration continue des entreprises vers le cloud hybride, portée par des acteurs comme GOOGL avec sa suite Workspace et ses services Vertex AI, garantit une visibilité sur les revenus récurrents.</a:t>
             </a:r>
           </a:p>
         </p:txBody>
@@ -28603,7 +28603,7 @@
                   <a:srgbClr val="1B3A6B"/>
                 </a:solidFill>
               </a:rPr>
-              <a:t>Croissance des revenus cloud</a:t>
+              <a:t>Adoption IA</a:t>
             </a:r>
           </a:p>
         </p:txBody>
@@ -28637,7 +28637,7 @@
                   <a:srgbClr val="555555"/>
                 </a:solidFill>
               </a:rPr>
-              <a:t>La demande pour les services cloud (IaaS, PaaS) devrait continuer à croître à deux chiffres, portée par l'adoption de l'IA et du big data.</a:t>
+              <a:t>L'intégration accélérée de l'IA dans les processus métiers, notamment via les outils low-code/no-code, devrait booster les revenus des éditeurs logiciels comme META et NVDA.</a:t>
             </a:r>
           </a:p>
         </p:txBody>
@@ -28791,7 +28791,7 @@
                   <a:srgbClr val="1B3A6B"/>
                 </a:solidFill>
               </a:rPr>
-              <a:t>Expansion géographique</a:t>
+              <a:t>Cloud Hybrid</a:t>
             </a:r>
           </a:p>
         </p:txBody>
@@ -28825,7 +28825,7 @@
                   <a:srgbClr val="555555"/>
                 </a:solidFill>
               </a:rPr>
-              <a:t>Les marchés émergents (Asie du Sud-Est, Amérique latine) représentent un levier de croissance sous-exploité pour les plateformes digitales.</a:t>
+              <a:t>La demande croissante pour des solutions cloud hybrides, combinant flexibilité et sécurité, favorise les fournisseurs comme GOOGL avec ses services Anthos et BigQuery.</a:t>
             </a:r>
           </a:p>
         </p:txBody>
@@ -29013,7 +29013,7 @@
                   <a:srgbClr val="555555"/>
                 </a:solidFill>
               </a:rPr>
-              <a:t>L'augmentation des coûts énergétiques pour les data centers pourrait éroder les marges des acteurs les moins efficaces.</a:t>
+              <a:t>La hausse des coûts énergétiques, liée à l'expansion des data centers, pourrait peser sur les marges des acteurs du cloud et des semi-conducteurs.</a:t>
             </a:r>
           </a:p>
         </p:txBody>
@@ -29167,7 +29167,7 @@
                   <a:srgbClr val="1B3A6B"/>
                 </a:solidFill>
               </a:rPr>
-              <a:t>Tensions géopolitiques</a:t>
+              <a:t>Taux d'intérêt</a:t>
             </a:r>
           </a:p>
         </p:txBody>
@@ -29201,7 +29201,7 @@
                   <a:srgbClr val="555555"/>
                 </a:solidFill>
               </a:rPr>
-              <a:t>Les restrictions commerciales (ex : sanctions contre la Chine) pourraient perturber les chaînes d'approvisionnement des semi-conducteurs.</a:t>
+              <a:t>Une remontée prolongée des taux d'intérêt pourrait réduire la valorisation des actions technologiques, historiquement sensibles aux flux de trésorerie actualisés.</a:t>
             </a:r>
           </a:p>
         </p:txBody>
@@ -29525,7 +29525,7 @@
                   <a:srgbClr val="2A5298"/>
                 </a:solidFill>
               </a:rPr>
-              <a:t>Le secteur est en phase de maturité avancée avec des opportunités de croissance résiduelles dans l'IA et le cloud, mais les valorisations élevées limitent les marges de sécurité.</a:t>
+              <a:t>Le secteur se situe en phase de maturité avancée avec des signes de surchauffe, mais les fondamentaux solides et l'innovation continue justifient un biais haussier à moyen terme.</a:t>
             </a:r>
           </a:p>
         </p:txBody>

--- a/preview/secteur_Technology_S&P_500/secteur_Technology_S&P_500.pptx
+++ b/preview/secteur_Technology_S&P_500/secteur_Technology_S&P_500.pptx
@@ -8172,7 +8172,7 @@
                   <a:srgbClr val="555555"/>
                 </a:solidFill>
               </a:rPr>
-              <a:t>L'adoption massive des solutions d'IA par les entreprises, notamment via les plateformes cloud de GOOGL et les GPU de NVDA, devrait propulser la croissance orga</a:t>
+              <a:t>Les dépenses en infrastructures cloud et en GPU explosent, portées par des entreprises comme NVIDIA qui capitalisent sur la demande en calcul haute performance.</a:t>
             </a:r>
           </a:p>
         </p:txBody>
@@ -8326,7 +8326,7 @@
                   <a:srgbClr val="555555"/>
                 </a:solidFill>
               </a:rPr>
-              <a:t>Les enquêtes antitrust en cours, notamment aux États-Unis et en Europe, pourraient entraîner des amendes ou des restrictions opérationnelles pour les géants du </a:t>
+              <a:t>Les enquêtes et amendes potentielles contre les GAFAM pourraient peser sur les marges et limiter les acquisitions stratégiques.</a:t>
             </a:r>
           </a:p>
         </p:txBody>
@@ -9189,7 +9189,7 @@
                   <a:srgbClr val="555555"/>
                 </a:solidFill>
               </a:rPr>
-              <a:t>META bénéficie d'une reprise structurelle de la publicité en ligne, avec une allocation croissante des budgets marketing vers le métavers et les réseaux sociaux</a:t>
+              <a:t>Les géants comme META et GOOGL bénéficient de l'augmentation des budgets publicitaires digitaux, dopés par l'essor du commerce en ligne et des réseaux sociaux.</a:t>
             </a:r>
           </a:p>
         </p:txBody>
@@ -9343,7 +9343,7 @@
                   <a:srgbClr val="555555"/>
                 </a:solidFill>
               </a:rPr>
-              <a:t>L'émergence de nouveaux acteurs chinois dans les semi-conducteurs et le cloud, comme Huawei ou Alibaba, menace la position dominante des leaders occidentaux.</a:t>
+              <a:t>La montée en puissance des acteurs locaux comme Huawei ou ByteDance menace la part de marché des entreprises américaines sur le marché asiatique.</a:t>
             </a:r>
           </a:p>
         </p:txBody>
@@ -10206,7 +10206,7 @@
                   <a:srgbClr val="555555"/>
                 </a:solidFill>
               </a:rPr>
-              <a:t>La migration continue des entreprises vers le cloud hybride, portée par des acteurs comme GOOGL avec sa suite Workspace et ses services Vertex AI, garantit une </a:t>
+              <a:t>La course à la miniaturisation et à l'efficacité énergétique des puces renforce la position des leaders comme NVIDIA, malgré les tensions géopolitiques sur les </a:t>
             </a:r>
           </a:p>
         </p:txBody>
@@ -10360,7 +10360,7 @@
                   <a:srgbClr val="555555"/>
                 </a:solidFill>
               </a:rPr>
-              <a:t>L'augmentation des cyberattaques ciblant les infrastructures critiques pourrait entraîner des coûts de conformité et de protection supplémentaires pour les entr</a:t>
+              <a:t>La course aux infrastructures cloud et à l'IA pourrait entraîner une bulle spéculative, avec un risque de correction brutale des valorisations.</a:t>
             </a:r>
           </a:p>
         </p:txBody>
@@ -14326,7 +14326,7 @@
                   <a:srgbClr val="FFFFFF"/>
                 </a:solidFill>
               </a:rPr>
-              <a:t>Régulation</a:t>
+              <a:t>Régulation antitrust</a:t>
             </a:r>
           </a:p>
         </p:txBody>
@@ -14360,7 +14360,7 @@
                   <a:srgbClr val="555555"/>
                 </a:solidFill>
               </a:rPr>
-              <a:t>Les enquêtes antitrust en cours, notamment aux États-Unis et en Europe, pourraient entraîner des amendes ou des restrictions opérationnelles pour les géants du secteur.</a:t>
+              <a:t>Les enquêtes et amendes potentielles contre les GAFAM pourraient peser sur les marges et limiter les acquisitions stratégiques.</a:t>
             </a:r>
           </a:p>
         </p:txBody>
@@ -14480,7 +14480,7 @@
                   <a:srgbClr val="FFFFFF"/>
                 </a:solidFill>
               </a:rPr>
-              <a:t>Concurrence</a:t>
+              <a:t>Concurrence accrue en Chine</a:t>
             </a:r>
           </a:p>
         </p:txBody>
@@ -14514,7 +14514,7 @@
                   <a:srgbClr val="555555"/>
                 </a:solidFill>
               </a:rPr>
-              <a:t>L'émergence de nouveaux acteurs chinois dans les semi-conducteurs et le cloud, comme Huawei ou Alibaba, menace la position dominante des leaders occidentaux.</a:t>
+              <a:t>La montée en puissance des acteurs locaux comme Huawei ou ByteDance menace la part de marché des entreprises américaines sur le marché asiatique.</a:t>
             </a:r>
           </a:p>
         </p:txBody>
@@ -14634,7 +14634,7 @@
                   <a:srgbClr val="FFFFFF"/>
                 </a:solidFill>
               </a:rPr>
-              <a:t>Cybersecurity</a:t>
+              <a:t>Cycles de surinvestissement</a:t>
             </a:r>
           </a:p>
         </p:txBody>
@@ -14668,7 +14668,7 @@
                   <a:srgbClr val="555555"/>
                 </a:solidFill>
               </a:rPr>
-              <a:t>L'augmentation des cyberattaques ciblant les infrastructures critiques pourrait entraîner des coûts de conformité et de protection supplémentaires pour les entreprises.</a:t>
+              <a:t>La course aux infrastructures cloud et à l'IA pourrait entraîner une bulle spéculative, avec un risque de correction brutale des valorisations.</a:t>
             </a:r>
           </a:p>
         </p:txBody>
@@ -16921,7 +16921,7 @@
                   <a:srgbClr val="555555"/>
                 </a:solidFill>
               </a:rPr>
-              <a:t>+ IA Générative — L'adoption massive des solutions d'IA par les entreprises, notamment via les plateformes cloud de GOOGL et les GPU de NVDA, devrait propulse</a:t>
+              <a:t>+ Adoption accélérée de l'IA générative — Les dépenses en infrastructures cloud et en GPU explosent, portées par des entreprises comme NVIDIA qui capitalisent sur la demande en calcu</a:t>
             </a:r>
           </a:p>
         </p:txBody>
@@ -17041,7 +17041,7 @@
                   <a:srgbClr val="555555"/>
                 </a:solidFill>
               </a:rPr>
-              <a:t>- Régulation — Les enquêtes antitrust en cours, notamment aux États-Unis et en Europe, pourraient entraîner des amendes ou des restrictions opérationnelles</a:t>
+              <a:t>- Régulation antitrust — Les enquêtes et amendes potentielles contre les GAFAM pourraient peser sur les marges et limiter les acquisitions stratégiques.</a:t>
             </a:r>
           </a:p>
         </p:txBody>
@@ -19593,7 +19593,7 @@
                   <a:srgbClr val="1B3A6B"/>
                 </a:solidFill>
               </a:rPr>
-              <a:t>IA Générative</a:t>
+              <a:t>Adoption accélérée de l'IA générative</a:t>
             </a:r>
           </a:p>
         </p:txBody>
@@ -19627,7 +19627,7 @@
                   <a:srgbClr val="555555"/>
                 </a:solidFill>
               </a:rPr>
-              <a:t>L'adoption massive des solutions d'IA par les entreprises, notamment via les plateformes cloud de GOOGL et les GPU de NVDA, devrait propulser la croissance organique du secteur.</a:t>
+              <a:t>Les dépenses en infrastructures cloud et en GPU explosent, portées par des entreprises comme NVIDIA qui capitalisent sur la demande en calcul haute performance.</a:t>
             </a:r>
           </a:p>
         </p:txBody>
@@ -19747,7 +19747,7 @@
                   <a:srgbClr val="1B3A6B"/>
                 </a:solidFill>
               </a:rPr>
-              <a:t>Publicité digitale</a:t>
+              <a:t>Monétisation des données et publicité ciblée</a:t>
             </a:r>
           </a:p>
         </p:txBody>
@@ -19781,7 +19781,7 @@
                   <a:srgbClr val="555555"/>
                 </a:solidFill>
               </a:rPr>
-              <a:t>META bénéficie d'une reprise structurelle de la publicité en ligne, avec une allocation croissante des budgets marketing vers le métavers et les réseaux sociaux.</a:t>
+              <a:t>Les géants comme META et GOOGL bénéficient de l'augmentation des budgets publicitaires digitaux, dopés par l'essor du commerce en ligne et des réseaux sociaux.</a:t>
             </a:r>
           </a:p>
         </p:txBody>
@@ -19901,7 +19901,7 @@
                   <a:srgbClr val="1B3A6B"/>
                 </a:solidFill>
               </a:rPr>
-              <a:t>Infrastructure Cloud</a:t>
+              <a:t>Innovation continue dans les semi-conducteurs</a:t>
             </a:r>
           </a:p>
         </p:txBody>
@@ -19935,7 +19935,7 @@
                   <a:srgbClr val="555555"/>
                 </a:solidFill>
               </a:rPr>
-              <a:t>La migration continue des entreprises vers le cloud hybride, portée par des acteurs comme GOOGL avec sa suite Workspace et ses services Vertex AI, garantit une visibilité sur les revenus récurrents.</a:t>
+              <a:t>La course à la miniaturisation et à l'efficacité énergétique des puces renforce la position des leaders comme NVIDIA, malgré les tensions géopolitiques sur les chaînes d'approvisionnement.</a:t>
             </a:r>
           </a:p>
         </p:txBody>
@@ -20132,7 +20132,7 @@
                   <a:srgbClr val="A82020"/>
                 </a:solidFill>
               </a:rPr>
-              <a:t>Régulation</a:t>
+              <a:t>Régulation antitrust</a:t>
             </a:r>
           </a:p>
         </p:txBody>
@@ -20166,7 +20166,7 @@
                   <a:srgbClr val="555555"/>
                 </a:solidFill>
               </a:rPr>
-              <a:t>Les enquêtes antitrust en cours, notamment aux États-Unis et en Europe, pourraient entraîner des amendes ou des restrictions opérationnelles pour les géants du secteur.</a:t>
+              <a:t>Les enquêtes et amendes potentielles contre les GAFAM pourraient peser sur les marges et limiter les acquisitions stratégiques.</a:t>
             </a:r>
           </a:p>
         </p:txBody>
@@ -20286,7 +20286,7 @@
                   <a:srgbClr val="A82020"/>
                 </a:solidFill>
               </a:rPr>
-              <a:t>Concurrence</a:t>
+              <a:t>Concurrence accrue en Chine</a:t>
             </a:r>
           </a:p>
         </p:txBody>
@@ -20320,7 +20320,7 @@
                   <a:srgbClr val="555555"/>
                 </a:solidFill>
               </a:rPr>
-              <a:t>L'émergence de nouveaux acteurs chinois dans les semi-conducteurs et le cloud, comme Huawei ou Alibaba, menace la position dominante des leaders occidentaux.</a:t>
+              <a:t>La montée en puissance des acteurs locaux comme Huawei ou ByteDance menace la part de marché des entreprises américaines sur le marché asiatique.</a:t>
             </a:r>
           </a:p>
         </p:txBody>
@@ -20440,7 +20440,7 @@
                   <a:srgbClr val="A82020"/>
                 </a:solidFill>
               </a:rPr>
-              <a:t>Cybersecurity</a:t>
+              <a:t>Cycles de surinvestissement</a:t>
             </a:r>
           </a:p>
         </p:txBody>
@@ -20474,7 +20474,7 @@
                   <a:srgbClr val="555555"/>
                 </a:solidFill>
               </a:rPr>
-              <a:t>L'augmentation des cyberattaques ciblant les infrastructures critiques pourrait entraîner des coûts de conformité et de protection supplémentaires pour les entreprises.</a:t>
+              <a:t>La course aux infrastructures cloud et à l'IA pourrait entraîner une bulle spéculative, avec un risque de correction brutale des valorisations.</a:t>
             </a:r>
           </a:p>
         </p:txBody>
@@ -24697,7 +24697,7 @@
                   <a:srgbClr val="555555"/>
                 </a:solidFill>
               </a:rPr>
-              <a:t>Le secteur Technology affiche une valorisation réelle soutenue par des marges EBITDA exceptionnelles de 46.8%, bien au-dessus de la médiane sectorielle, reflétant une domination des géants sur leurs marchés respectifs. Les multiples EV/EBITDA à 21.7x, malgré une croissance des revenus de +19.9%, restent justifiés par un momentum boursier de +49.2% sur 52 semaines, signe d'une confiance inébranlable des investisseurs.</a:t>
+              <a:t>Le secteur Technology affiche une valorisation élevée avec un multiple EV/EBITDA médian de 21.7x, reflétant une forte confiance des investisseurs dans la résilience des marges (46.8% de marge EBITDA) et la croissance des revenus (+19.9%). Cette dynamique est soutenue par des acteurs comme GOOGL, NVDA et META, dont les scores respectifs de 86, 80 et 76 soulignent leur position dominante dans l'IA, les semi-conducteurs et les réseaux sociaux.</a:t>
             </a:r>
           </a:p>
         </p:txBody>
@@ -24851,7 +24851,7 @@
                   <a:srgbClr val="1B3A6B"/>
                 </a:solidFill>
               </a:rPr>
-              <a:t>IA Générative</a:t>
+              <a:t>Adoption accélérée de l'IA générative</a:t>
             </a:r>
           </a:p>
         </p:txBody>
@@ -24885,7 +24885,7 @@
                   <a:srgbClr val="555555"/>
                 </a:solidFill>
               </a:rPr>
-              <a:t>L'adoption massive des solutions d'IA par les entreprises, notamment via les plateformes cloud de GOOGL et les GPU de NVDA, devrait propulser la croissance organique du secteur.</a:t>
+              <a:t>Les dépenses en infrastructures cloud et en GPU explosent, portées par des entreprises comme NVIDIA qui capitalisent sur la demande en calcul haute performance.</a:t>
             </a:r>
           </a:p>
         </p:txBody>
@@ -24962,7 +24962,7 @@
                   <a:srgbClr val="1B3A6B"/>
                 </a:solidFill>
               </a:rPr>
-              <a:t>Publicité digitale</a:t>
+              <a:t>Monétisation des données et publicité ciblée</a:t>
             </a:r>
           </a:p>
         </p:txBody>
@@ -24996,7 +24996,7 @@
                   <a:srgbClr val="555555"/>
                 </a:solidFill>
               </a:rPr>
-              <a:t>META bénéficie d'une reprise structurelle de la publicité en ligne, avec une allocation croissante des budgets marketing vers le métavers et les réseaux sociaux.</a:t>
+              <a:t>Les géants comme META et GOOGL bénéficient de l'augmentation des budgets publicitaires digitaux, dopés par l'essor du commerce en ligne et des réseaux sociaux.</a:t>
             </a:r>
           </a:p>
         </p:txBody>
@@ -25073,7 +25073,7 @@
                   <a:srgbClr val="1B3A6B"/>
                 </a:solidFill>
               </a:rPr>
-              <a:t>Infrastructure Cloud</a:t>
+              <a:t>Innovation continue dans les semi-conducteurs</a:t>
             </a:r>
           </a:p>
         </p:txBody>
@@ -25107,7 +25107,7 @@
                   <a:srgbClr val="555555"/>
                 </a:solidFill>
               </a:rPr>
-              <a:t>La migration continue des entreprises vers le cloud hybride, portée par des acteurs comme GOOGL avec sa suite Workspace et ses services Vertex AI, garantit une visibilité sur les revenus récurrents.</a:t>
+              <a:t>La course à la miniaturisation et à l'efficacité énergétique des puces renforce la position des leaders comme NVIDIA, malgré les tensions géopolitiques sur les chaînes d'approvisionnement.</a:t>
             </a:r>
           </a:p>
         </p:txBody>
@@ -28603,7 +28603,7 @@
                   <a:srgbClr val="1B3A6B"/>
                 </a:solidFill>
               </a:rPr>
-              <a:t>Adoption IA</a:t>
+              <a:t>Croissance des revenus cloud</a:t>
             </a:r>
           </a:p>
         </p:txBody>
@@ -28637,7 +28637,7 @@
                   <a:srgbClr val="555555"/>
                 </a:solidFill>
               </a:rPr>
-              <a:t>L'intégration accélérée de l'IA dans les processus métiers, notamment via les outils low-code/no-code, devrait booster les revenus des éditeurs logiciels comme META et NVDA.</a:t>
+              <a:t>L'adoption massive du SaaS et des solutions hybrides par les entreprises devrait maintenir une croissance à deux chiffres des revenus cloud.</a:t>
             </a:r>
           </a:p>
         </p:txBody>
@@ -28791,7 +28791,7 @@
                   <a:srgbClr val="1B3A6B"/>
                 </a:solidFill>
               </a:rPr>
-              <a:t>Cloud Hybrid</a:t>
+              <a:t>Expansion des marges EBITDA</a:t>
             </a:r>
           </a:p>
         </p:txBody>
@@ -28825,7 +28825,7 @@
                   <a:srgbClr val="555555"/>
                 </a:solidFill>
               </a:rPr>
-              <a:t>La demande croissante pour des solutions cloud hybrides, combinant flexibilité et sécurité, favorise les fournisseurs comme GOOGL avec ses services Anthos et BigQuery.</a:t>
+              <a:t>L'automatisation des processus et l'effet de levier opérationnel devraient permettre une amélioration continue des marges, notamment pour les acteurs matures.</a:t>
             </a:r>
           </a:p>
         </p:txBody>
@@ -29013,7 +29013,7 @@
                   <a:srgbClr val="555555"/>
                 </a:solidFill>
               </a:rPr>
-              <a:t>La hausse des coûts énergétiques, liée à l'expansion des data centers, pourrait peser sur les marges des acteurs du cloud et des semi-conducteurs.</a:t>
+              <a:t>La hausse des prix de l'électricité et la pression pour des data centers plus verts pourraient éroder les marges des acteurs les plus énergivores.</a:t>
             </a:r>
           </a:p>
         </p:txBody>
@@ -29167,7 +29167,7 @@
                   <a:srgbClr val="1B3A6B"/>
                 </a:solidFill>
               </a:rPr>
-              <a:t>Taux d'intérêt</a:t>
+              <a:t>Taux d'intérêt élevés</a:t>
             </a:r>
           </a:p>
         </p:txBody>
@@ -29201,7 +29201,7 @@
                   <a:srgbClr val="555555"/>
                 </a:solidFill>
               </a:rPr>
-              <a:t>Une remontée prolongée des taux d'intérêt pourrait réduire la valorisation des actions technologiques, historiquement sensibles aux flux de trésorerie actualisés.</a:t>
+              <a:t>Un environnement de taux durablement élevés pénalise les valorisations des entreprises à forte croissance, dont les flux de trésorerie futurs sont actualisés à un taux plus élevé.</a:t>
             </a:r>
           </a:p>
         </p:txBody>
@@ -29525,7 +29525,7 @@
                   <a:srgbClr val="2A5298"/>
                 </a:solidFill>
               </a:rPr>
-              <a:t>Le secteur se situe en phase de maturité avancée avec des signes de surchauffe, mais les fondamentaux solides et l'innovation continue justifient un biais haussier à moyen terme.</a:t>
+              <a:t>Le secteur Technology semble en phase de maturité avancée, avec une croissance soutenue mais des signaux de ralentissement possible dans certains segments comme les semi-conducteurs.</a:t>
             </a:r>
           </a:p>
         </p:txBody>

--- a/preview/secteur_Technology_S&P_500/secteur_Technology_S&P_500.pptx
+++ b/preview/secteur_Technology_S&P_500/secteur_Technology_S&P_500.pptx
@@ -8172,7 +8172,7 @@
                   <a:srgbClr val="555555"/>
                 </a:solidFill>
               </a:rPr>
-              <a:t>Les dépenses en infrastructures cloud et en GPU explosent, portées par des entreprises comme NVIDIA qui capitalisent sur la demande en calcul haute performance.</a:t>
+              <a:t>Les entreprises technologiques leaders capitalisent sur l'IA générative pour booster leur productivité et créer de nouveaux flux de revenus.</a:t>
             </a:r>
           </a:p>
         </p:txBody>
@@ -8326,7 +8326,7 @@
                   <a:srgbClr val="555555"/>
                 </a:solidFill>
               </a:rPr>
-              <a:t>Les enquêtes et amendes potentielles contre les GAFAM pourraient peser sur les marges et limiter les acquisitions stratégiques.</a:t>
+              <a:t>L'émergence de nouveaux acteurs spécialisés en IA pourrait éroder les parts de marché des leaders établis.</a:t>
             </a:r>
           </a:p>
         </p:txBody>
@@ -9189,7 +9189,7 @@
                   <a:srgbClr val="555555"/>
                 </a:solidFill>
               </a:rPr>
-              <a:t>Les géants comme META et GOOGL bénéficient de l'augmentation des budgets publicitaires digitaux, dopés par l'essor du commerce en ligne et des réseaux sociaux.</a:t>
+              <a:t>La demande en solutions cloud hybrides, notamment chez les entreprises traditionnelles, soutient la croissance des revenus récurrents.</a:t>
             </a:r>
           </a:p>
         </p:txBody>
@@ -9343,7 +9343,7 @@
                   <a:srgbClr val="555555"/>
                 </a:solidFill>
               </a:rPr>
-              <a:t>La montée en puissance des acteurs locaux comme Huawei ou ByteDance menace la part de marché des entreprises américaines sur le marché asiatique.</a:t>
+              <a:t>Les multiples élevés pourraient se contracter en cas de ralentissement économique ou de révision des anticipations de croissance.</a:t>
             </a:r>
           </a:p>
         </p:txBody>
@@ -10206,7 +10206,7 @@
                   <a:srgbClr val="555555"/>
                 </a:solidFill>
               </a:rPr>
-              <a:t>La course à la miniaturisation et à l'efficacité énergétique des puces renforce la position des leaders comme NVIDIA, malgré les tensions géopolitiques sur les </a:t>
+              <a:t>Les cadres réglementaires, comme le Digital Markets Act en Europe, renforcent les barrières à l'entrée pour les nouveaux acteurs.</a:t>
             </a:r>
           </a:p>
         </p:txBody>
@@ -10360,7 +10360,7 @@
                   <a:srgbClr val="555555"/>
                 </a:solidFill>
               </a:rPr>
-              <a:t>La course aux infrastructures cloud et à l'IA pourrait entraîner une bulle spéculative, avec un risque de correction brutale des valorisations.</a:t>
+              <a:t>Les revenus de META restent fortement corrélés aux cycles économiques et aux budgets marketing des annonceurs.</a:t>
             </a:r>
           </a:p>
         </p:txBody>
@@ -14326,7 +14326,7 @@
                   <a:srgbClr val="FFFFFF"/>
                 </a:solidFill>
               </a:rPr>
-              <a:t>Régulation antitrust</a:t>
+              <a:t>Concurrence accrue en IA</a:t>
             </a:r>
           </a:p>
         </p:txBody>
@@ -14360,7 +14360,7 @@
                   <a:srgbClr val="555555"/>
                 </a:solidFill>
               </a:rPr>
-              <a:t>Les enquêtes et amendes potentielles contre les GAFAM pourraient peser sur les marges et limiter les acquisitions stratégiques.</a:t>
+              <a:t>L'émergence de nouveaux acteurs spécialisés en IA pourrait éroder les parts de marché des leaders établis.</a:t>
             </a:r>
           </a:p>
         </p:txBody>
@@ -14480,7 +14480,7 @@
                   <a:srgbClr val="FFFFFF"/>
                 </a:solidFill>
               </a:rPr>
-              <a:t>Concurrence accrue en Chine</a:t>
+              <a:t>Risque de surchauffe des valorisations</a:t>
             </a:r>
           </a:p>
         </p:txBody>
@@ -14514,7 +14514,7 @@
                   <a:srgbClr val="555555"/>
                 </a:solidFill>
               </a:rPr>
-              <a:t>La montée en puissance des acteurs locaux comme Huawei ou ByteDance menace la part de marché des entreprises américaines sur le marché asiatique.</a:t>
+              <a:t>Les multiples élevés pourraient se contracter en cas de ralentissement économique ou de révision des anticipations de croissance.</a:t>
             </a:r>
           </a:p>
         </p:txBody>
@@ -14634,7 +14634,7 @@
                   <a:srgbClr val="FFFFFF"/>
                 </a:solidFill>
               </a:rPr>
-              <a:t>Cycles de surinvestissement</a:t>
+              <a:t>Dépendance aux dépenses publicitaires</a:t>
             </a:r>
           </a:p>
         </p:txBody>
@@ -14668,7 +14668,7 @@
                   <a:srgbClr val="555555"/>
                 </a:solidFill>
               </a:rPr>
-              <a:t>La course aux infrastructures cloud et à l'IA pourrait entraîner une bulle spéculative, avec un risque de correction brutale des valorisations.</a:t>
+              <a:t>Les revenus de META restent fortement corrélés aux cycles économiques et aux budgets marketing des annonceurs.</a:t>
             </a:r>
           </a:p>
         </p:txBody>
@@ -16921,7 +16921,7 @@
                   <a:srgbClr val="555555"/>
                 </a:solidFill>
               </a:rPr>
-              <a:t>+ Adoption accélérée de l'IA générative — Les dépenses en infrastructures cloud et en GPU explosent, portées par des entreprises comme NVIDIA qui capitalisent sur la demande en calcu</a:t>
+              <a:t>+ Adoption accélérée de l'IA générative — Les entreprises technologiques leaders capitalisent sur l'IA générative pour booster leur productivité et créer de nouveaux flux de revenus.</a:t>
             </a:r>
           </a:p>
         </p:txBody>
@@ -17041,7 +17041,7 @@
                   <a:srgbClr val="555555"/>
                 </a:solidFill>
               </a:rPr>
-              <a:t>- Régulation antitrust — Les enquêtes et amendes potentielles contre les GAFAM pourraient peser sur les marges et limiter les acquisitions stratégiques.</a:t>
+              <a:t>- Concurrence accrue en IA — L'émergence de nouveaux acteurs spécialisés en IA pourrait éroder les parts de marché des leaders établis.</a:t>
             </a:r>
           </a:p>
         </p:txBody>
@@ -19627,7 +19627,7 @@
                   <a:srgbClr val="555555"/>
                 </a:solidFill>
               </a:rPr>
-              <a:t>Les dépenses en infrastructures cloud et en GPU explosent, portées par des entreprises comme NVIDIA qui capitalisent sur la demande en calcul haute performance.</a:t>
+              <a:t>Les entreprises technologiques leaders capitalisent sur l'IA générative pour booster leur productivité et créer de nouveaux flux de revenus.</a:t>
             </a:r>
           </a:p>
         </p:txBody>
@@ -19747,7 +19747,7 @@
                   <a:srgbClr val="1B3A6B"/>
                 </a:solidFill>
               </a:rPr>
-              <a:t>Monétisation des données et publicité ciblée</a:t>
+              <a:t>Migration vers le cloud hybride</a:t>
             </a:r>
           </a:p>
         </p:txBody>
@@ -19781,7 +19781,7 @@
                   <a:srgbClr val="555555"/>
                 </a:solidFill>
               </a:rPr>
-              <a:t>Les géants comme META et GOOGL bénéficient de l'augmentation des budgets publicitaires digitaux, dopés par l'essor du commerce en ligne et des réseaux sociaux.</a:t>
+              <a:t>La demande en solutions cloud hybrides, notamment chez les entreprises traditionnelles, soutient la croissance des revenus récurrents.</a:t>
             </a:r>
           </a:p>
         </p:txBody>
@@ -19901,7 +19901,7 @@
                   <a:srgbClr val="1B3A6B"/>
                 </a:solidFill>
               </a:rPr>
-              <a:t>Innovation continue dans les semi-conducteurs</a:t>
+              <a:t>Régulation favorable aux géants du numérique</a:t>
             </a:r>
           </a:p>
         </p:txBody>
@@ -19935,7 +19935,7 @@
                   <a:srgbClr val="555555"/>
                 </a:solidFill>
               </a:rPr>
-              <a:t>La course à la miniaturisation et à l'efficacité énergétique des puces renforce la position des leaders comme NVIDIA, malgré les tensions géopolitiques sur les chaînes d'approvisionnement.</a:t>
+              <a:t>Les cadres réglementaires, comme le Digital Markets Act en Europe, renforcent les barrières à l'entrée pour les nouveaux acteurs.</a:t>
             </a:r>
           </a:p>
         </p:txBody>
@@ -20132,7 +20132,7 @@
                   <a:srgbClr val="A82020"/>
                 </a:solidFill>
               </a:rPr>
-              <a:t>Régulation antitrust</a:t>
+              <a:t>Concurrence accrue en IA</a:t>
             </a:r>
           </a:p>
         </p:txBody>
@@ -20166,7 +20166,7 @@
                   <a:srgbClr val="555555"/>
                 </a:solidFill>
               </a:rPr>
-              <a:t>Les enquêtes et amendes potentielles contre les GAFAM pourraient peser sur les marges et limiter les acquisitions stratégiques.</a:t>
+              <a:t>L'émergence de nouveaux acteurs spécialisés en IA pourrait éroder les parts de marché des leaders établis.</a:t>
             </a:r>
           </a:p>
         </p:txBody>
@@ -20286,7 +20286,7 @@
                   <a:srgbClr val="A82020"/>
                 </a:solidFill>
               </a:rPr>
-              <a:t>Concurrence accrue en Chine</a:t>
+              <a:t>Risque de surchauffe des valorisations</a:t>
             </a:r>
           </a:p>
         </p:txBody>
@@ -20320,7 +20320,7 @@
                   <a:srgbClr val="555555"/>
                 </a:solidFill>
               </a:rPr>
-              <a:t>La montée en puissance des acteurs locaux comme Huawei ou ByteDance menace la part de marché des entreprises américaines sur le marché asiatique.</a:t>
+              <a:t>Les multiples élevés pourraient se contracter en cas de ralentissement économique ou de révision des anticipations de croissance.</a:t>
             </a:r>
           </a:p>
         </p:txBody>
@@ -20440,7 +20440,7 @@
                   <a:srgbClr val="A82020"/>
                 </a:solidFill>
               </a:rPr>
-              <a:t>Cycles de surinvestissement</a:t>
+              <a:t>Dépendance aux dépenses publicitaires</a:t>
             </a:r>
           </a:p>
         </p:txBody>
@@ -20474,7 +20474,7 @@
                   <a:srgbClr val="555555"/>
                 </a:solidFill>
               </a:rPr>
-              <a:t>La course aux infrastructures cloud et à l'IA pourrait entraîner une bulle spéculative, avec un risque de correction brutale des valorisations.</a:t>
+              <a:t>Les revenus de META restent fortement corrélés aux cycles économiques et aux budgets marketing des annonceurs.</a:t>
             </a:r>
           </a:p>
         </p:txBody>
@@ -24697,7 +24697,7 @@
                   <a:srgbClr val="555555"/>
                 </a:solidFill>
               </a:rPr>
-              <a:t>Le secteur Technology affiche une valorisation élevée avec un multiple EV/EBITDA médian de 21.7x, reflétant une forte confiance des investisseurs dans la résilience des marges (46.8% de marge EBITDA) et la croissance des revenus (+19.9%). Cette dynamique est soutenue par des acteurs comme GOOGL, NVDA et META, dont les scores respectifs de 86, 80 et 76 soulignent leur position dominante dans l'IA, les semi-conducteurs et les réseaux sociaux.</a:t>
+              <a:t>Le secteur Technology affiche une valorisation réelle élevée avec un multiple EV/EBITDA médian de 21.7x, reflétant une prime pour les acteurs capables de générer des marges EBITDA de 46.8% et une croissance organique des revenus de près de 20%. Les géants comme GOOGL, NVDA et META bénéficient d'un momentum boursier à 52 semaines supérieur à 49%, illustrant une dynamique de marché soutenue par l'IA, le cloud et la publicité ciblée.</a:t>
             </a:r>
           </a:p>
         </p:txBody>
@@ -24885,7 +24885,7 @@
                   <a:srgbClr val="555555"/>
                 </a:solidFill>
               </a:rPr>
-              <a:t>Les dépenses en infrastructures cloud et en GPU explosent, portées par des entreprises comme NVIDIA qui capitalisent sur la demande en calcul haute performance.</a:t>
+              <a:t>Les entreprises technologiques leaders capitalisent sur l'IA générative pour booster leur productivité et créer de nouveaux flux de revenus.</a:t>
             </a:r>
           </a:p>
         </p:txBody>
@@ -24962,7 +24962,7 @@
                   <a:srgbClr val="1B3A6B"/>
                 </a:solidFill>
               </a:rPr>
-              <a:t>Monétisation des données et publicité ciblée</a:t>
+              <a:t>Migration vers le cloud hybride</a:t>
             </a:r>
           </a:p>
         </p:txBody>
@@ -24996,7 +24996,7 @@
                   <a:srgbClr val="555555"/>
                 </a:solidFill>
               </a:rPr>
-              <a:t>Les géants comme META et GOOGL bénéficient de l'augmentation des budgets publicitaires digitaux, dopés par l'essor du commerce en ligne et des réseaux sociaux.</a:t>
+              <a:t>La demande en solutions cloud hybrides, notamment chez les entreprises traditionnelles, soutient la croissance des revenus récurrents.</a:t>
             </a:r>
           </a:p>
         </p:txBody>
@@ -25073,7 +25073,7 @@
                   <a:srgbClr val="1B3A6B"/>
                 </a:solidFill>
               </a:rPr>
-              <a:t>Innovation continue dans les semi-conducteurs</a:t>
+              <a:t>Régulation favorable aux géants du numérique</a:t>
             </a:r>
           </a:p>
         </p:txBody>
@@ -25107,7 +25107,7 @@
                   <a:srgbClr val="555555"/>
                 </a:solidFill>
               </a:rPr>
-              <a:t>La course à la miniaturisation et à l'efficacité énergétique des puces renforce la position des leaders comme NVIDIA, malgré les tensions géopolitiques sur les chaînes d'approvisionnement.</a:t>
+              <a:t>Les cadres réglementaires, comme le Digital Markets Act en Europe, renforcent les barrières à l'entrée pour les nouveaux acteurs.</a:t>
             </a:r>
           </a:p>
         </p:txBody>
@@ -28637,7 +28637,7 @@
                   <a:srgbClr val="555555"/>
                 </a:solidFill>
               </a:rPr>
-              <a:t>L'adoption massive du SaaS et des solutions hybrides par les entreprises devrait maintenir une croissance à deux chiffres des revenus cloud.</a:t>
+              <a:t>L'adoption croissante du cloud par les entreprises, notamment en Europe et en Asie, devrait soutenir la croissance organique des revenus.</a:t>
             </a:r>
           </a:p>
         </p:txBody>
@@ -28791,7 +28791,7 @@
                   <a:srgbClr val="1B3A6B"/>
                 </a:solidFill>
               </a:rPr>
-              <a:t>Expansion des marges EBITDA</a:t>
+              <a:t>Monétisation de l'IA</a:t>
             </a:r>
           </a:p>
         </p:txBody>
@@ -28825,7 +28825,7 @@
                   <a:srgbClr val="555555"/>
                 </a:solidFill>
               </a:rPr>
-              <a:t>L'automatisation des processus et l'effet de levier opérationnel devraient permettre une amélioration continue des marges, notamment pour les acteurs matures.</a:t>
+              <a:t>Les solutions d'IA intégrées aux plateformes existantes (ex : Google Search, Meta Ads) devraient générer des revenus supplémentaires.</a:t>
             </a:r>
           </a:p>
         </p:txBody>
@@ -28979,7 +28979,7 @@
                   <a:srgbClr val="1B3A6B"/>
                 </a:solidFill>
               </a:rPr>
-              <a:t>Coûts énergétiques</a:t>
+              <a:t>Régulation antitrust</a:t>
             </a:r>
           </a:p>
         </p:txBody>
@@ -29013,7 +29013,7 @@
                   <a:srgbClr val="555555"/>
                 </a:solidFill>
               </a:rPr>
-              <a:t>La hausse des prix de l'électricité et la pression pour des data centers plus verts pourraient éroder les marges des acteurs les plus énergivores.</a:t>
+              <a:t>Les enquêtes et sanctions potentielles pourraient limiter les acquisitions stratégiques et peser sur les valorisations.</a:t>
             </a:r>
           </a:p>
         </p:txBody>
@@ -29167,7 +29167,7 @@
                   <a:srgbClr val="1B3A6B"/>
                 </a:solidFill>
               </a:rPr>
-              <a:t>Taux d'intérêt élevés</a:t>
+              <a:t>Ralentissement des dépenses IT</a:t>
             </a:r>
           </a:p>
         </p:txBody>
@@ -29201,7 +29201,7 @@
                   <a:srgbClr val="555555"/>
                 </a:solidFill>
               </a:rPr>
-              <a:t>Un environnement de taux durablement élevés pénalise les valorisations des entreprises à forte croissance, dont les flux de trésorerie futurs sont actualisés à un taux plus élevé.</a:t>
+              <a:t>Un environnement macroéconomique dégradé pourrait entraîner une baisse des budgets IT des entreprises et des consommateurs.</a:t>
             </a:r>
           </a:p>
         </p:txBody>
@@ -29525,7 +29525,7 @@
                   <a:srgbClr val="2A5298"/>
                 </a:solidFill>
               </a:rPr>
-              <a:t>Le secteur Technology semble en phase de maturité avancée, avec une croissance soutenue mais des signaux de ralentissement possible dans certains segments comme les semi-conducteurs.</a:t>
+              <a:t>Le secteur est en phase de maturité avancée avec des opportunités de croissance sélective, notamment dans l'IA et le cloud.</a:t>
             </a:r>
           </a:p>
         </p:txBody>

--- a/preview/secteur_Technology_S&P_500/secteur_Technology_S&P_500.pptx
+++ b/preview/secteur_Technology_S&P_500/secteur_Technology_S&P_500.pptx
@@ -8172,7 +8172,7 @@
                   <a:srgbClr val="555555"/>
                 </a:solidFill>
               </a:rPr>
-              <a:t>Les entreprises technologiques leaders capitalisent sur l'IA générative pour booster leur productivité et créer de nouveaux flux de revenus.</a:t>
+              <a:t>Les modèles d'IA générative comme ceux de NVIDIA et Google transforment les pipelines de revenus des entreprises technologiques avec des contrats récurrents à f</a:t>
             </a:r>
           </a:p>
         </p:txBody>
@@ -8326,7 +8326,7 @@
                   <a:srgbClr val="555555"/>
                 </a:solidFill>
               </a:rPr>
-              <a:t>L'émergence de nouveaux acteurs spécialisés en IA pourrait éroder les parts de marché des leaders établis.</a:t>
+              <a:t>Les enquêtes des autorités (UE, USA) pourraient imposer des amendes ou des restrictions opérationnelles, impactant les marges des géants technologiques.</a:t>
             </a:r>
           </a:p>
         </p:txBody>
@@ -9189,7 +9189,7 @@
                   <a:srgbClr val="555555"/>
                 </a:solidFill>
               </a:rPr>
-              <a:t>La demande en solutions cloud hybrides, notamment chez les entreprises traditionnelles, soutient la croissance des revenus récurrents.</a:t>
+              <a:t>La migration des infrastructures IT vers le cloud public (AWS, Azure, GCP) génère des revenus récurrents et des marges EBITDA en expansion pour les hyperscalers</a:t>
             </a:r>
           </a:p>
         </p:txBody>
@@ -9343,7 +9343,7 @@
                   <a:srgbClr val="555555"/>
                 </a:solidFill>
               </a:rPr>
-              <a:t>Les multiples élevés pourraient se contracter en cas de ralentissement économique ou de révision des anticipations de croissance.</a:t>
+              <a:t>L'émergence de nouveaux acteurs (startups, géants asiatiques) menace les positions dominantes de NVIDIA et Google dans les infrastructures IA.</a:t>
             </a:r>
           </a:p>
         </p:txBody>
@@ -10206,7 +10206,7 @@
                   <a:srgbClr val="555555"/>
                 </a:solidFill>
               </a:rPr>
-              <a:t>Les cadres réglementaires, comme le Digital Markets Act en Europe, renforcent les barrières à l'entrée pour les nouveaux acteurs.</a:t>
+              <a:t>Les plateformes comme Meta et Google capitalisent sur les données utilisateurs via des algorithmes publicitaires ciblés, boostant les revenus par utilisateur.</a:t>
             </a:r>
           </a:p>
         </p:txBody>
@@ -10360,7 +10360,7 @@
                   <a:srgbClr val="555555"/>
                 </a:solidFill>
               </a:rPr>
-              <a:t>Les revenus de META restent fortement corrélés aux cycles économiques et aux budgets marketing des annonceurs.</a:t>
+              <a:t>Un ralentissement économique pourrait réduire les budgets IT des entreprises, affectant les revenus des fournisseurs de logiciels et services cloud.</a:t>
             </a:r>
           </a:p>
         </p:txBody>
@@ -14326,7 +14326,7 @@
                   <a:srgbClr val="FFFFFF"/>
                 </a:solidFill>
               </a:rPr>
-              <a:t>Concurrence accrue en IA</a:t>
+              <a:t>Régulation antitrust</a:t>
             </a:r>
           </a:p>
         </p:txBody>
@@ -14360,7 +14360,7 @@
                   <a:srgbClr val="555555"/>
                 </a:solidFill>
               </a:rPr>
-              <a:t>L'émergence de nouveaux acteurs spécialisés en IA pourrait éroder les parts de marché des leaders établis.</a:t>
+              <a:t>Les enquêtes des autorités (UE, USA) pourraient imposer des amendes ou des restrictions opérationnelles, impactant les marges des géants technologiques.</a:t>
             </a:r>
           </a:p>
         </p:txBody>
@@ -14480,7 +14480,7 @@
                   <a:srgbClr val="FFFFFF"/>
                 </a:solidFill>
               </a:rPr>
-              <a:t>Risque de surchauffe des valorisations</a:t>
+              <a:t>Concurrence accrue en IA</a:t>
             </a:r>
           </a:p>
         </p:txBody>
@@ -14514,7 +14514,7 @@
                   <a:srgbClr val="555555"/>
                 </a:solidFill>
               </a:rPr>
-              <a:t>Les multiples élevés pourraient se contracter en cas de ralentissement économique ou de révision des anticipations de croissance.</a:t>
+              <a:t>L'émergence de nouveaux acteurs (startups, géants asiatiques) menace les positions dominantes de NVIDIA et Google dans les infrastructures IA.</a:t>
             </a:r>
           </a:p>
         </p:txBody>
@@ -14634,7 +14634,7 @@
                   <a:srgbClr val="FFFFFF"/>
                 </a:solidFill>
               </a:rPr>
-              <a:t>Dépendance aux dépenses publicitaires</a:t>
+              <a:t>Cycles de dépenses IT</a:t>
             </a:r>
           </a:p>
         </p:txBody>
@@ -14668,7 +14668,7 @@
                   <a:srgbClr val="555555"/>
                 </a:solidFill>
               </a:rPr>
-              <a:t>Les revenus de META restent fortement corrélés aux cycles économiques et aux budgets marketing des annonceurs.</a:t>
+              <a:t>Un ralentissement économique pourrait réduire les budgets IT des entreprises, affectant les revenus des fournisseurs de logiciels et services cloud.</a:t>
             </a:r>
           </a:p>
         </p:txBody>
@@ -16921,7 +16921,7 @@
                   <a:srgbClr val="555555"/>
                 </a:solidFill>
               </a:rPr>
-              <a:t>+ Adoption accélérée de l'IA générative — Les entreprises technologiques leaders capitalisent sur l'IA générative pour booster leur productivité et créer de nouveaux flux de revenus.</a:t>
+              <a:t>+ Adoption accélérée de l'IA — Les modèles d'IA générative comme ceux de NVIDIA et Google transforment les pipelines de revenus des entreprises technologiques avec des con</a:t>
             </a:r>
           </a:p>
         </p:txBody>
@@ -17041,7 +17041,7 @@
                   <a:srgbClr val="555555"/>
                 </a:solidFill>
               </a:rPr>
-              <a:t>- Concurrence accrue en IA — L'émergence de nouveaux acteurs spécialisés en IA pourrait éroder les parts de marché des leaders établis.</a:t>
+              <a:t>- Régulation antitrust — Les enquêtes des autorités (UE, USA) pourraient imposer des amendes ou des restrictions opérationnelles, impactant les marges des géants tec</a:t>
             </a:r>
           </a:p>
         </p:txBody>
@@ -19593,7 +19593,7 @@
                   <a:srgbClr val="1B3A6B"/>
                 </a:solidFill>
               </a:rPr>
-              <a:t>Adoption accélérée de l'IA générative</a:t>
+              <a:t>Adoption accélérée de l'IA</a:t>
             </a:r>
           </a:p>
         </p:txBody>
@@ -19627,7 +19627,7 @@
                   <a:srgbClr val="555555"/>
                 </a:solidFill>
               </a:rPr>
-              <a:t>Les entreprises technologiques leaders capitalisent sur l'IA générative pour booster leur productivité et créer de nouveaux flux de revenus.</a:t>
+              <a:t>Les modèles d'IA générative comme ceux de NVIDIA et Google transforment les pipelines de revenus des entreprises technologiques avec des contrats récurrents à forte marge.</a:t>
             </a:r>
           </a:p>
         </p:txBody>
@@ -19747,7 +19747,7 @@
                   <a:srgbClr val="1B3A6B"/>
                 </a:solidFill>
               </a:rPr>
-              <a:t>Migration vers le cloud hybride</a:t>
+              <a:t>Transition vers le cloud</a:t>
             </a:r>
           </a:p>
         </p:txBody>
@@ -19781,7 +19781,7 @@
                   <a:srgbClr val="555555"/>
                 </a:solidFill>
               </a:rPr>
-              <a:t>La demande en solutions cloud hybrides, notamment chez les entreprises traditionnelles, soutient la croissance des revenus récurrents.</a:t>
+              <a:t>La migration des infrastructures IT vers le cloud public (AWS, Azure, GCP) génère des revenus récurrents et des marges EBITDA en expansion pour les hyperscalers.</a:t>
             </a:r>
           </a:p>
         </p:txBody>
@@ -19901,7 +19901,7 @@
                   <a:srgbClr val="1B3A6B"/>
                 </a:solidFill>
               </a:rPr>
-              <a:t>Régulation favorable aux géants du numérique</a:t>
+              <a:t>Monétisation des données</a:t>
             </a:r>
           </a:p>
         </p:txBody>
@@ -19935,7 +19935,7 @@
                   <a:srgbClr val="555555"/>
                 </a:solidFill>
               </a:rPr>
-              <a:t>Les cadres réglementaires, comme le Digital Markets Act en Europe, renforcent les barrières à l'entrée pour les nouveaux acteurs.</a:t>
+              <a:t>Les plateformes comme Meta et Google capitalisent sur les données utilisateurs via des algorithmes publicitaires ciblés, boostant les revenus par utilisateur.</a:t>
             </a:r>
           </a:p>
         </p:txBody>
@@ -20132,7 +20132,7 @@
                   <a:srgbClr val="A82020"/>
                 </a:solidFill>
               </a:rPr>
-              <a:t>Concurrence accrue en IA</a:t>
+              <a:t>Régulation antitrust</a:t>
             </a:r>
           </a:p>
         </p:txBody>
@@ -20166,7 +20166,7 @@
                   <a:srgbClr val="555555"/>
                 </a:solidFill>
               </a:rPr>
-              <a:t>L'émergence de nouveaux acteurs spécialisés en IA pourrait éroder les parts de marché des leaders établis.</a:t>
+              <a:t>Les enquêtes des autorités (UE, USA) pourraient imposer des amendes ou des restrictions opérationnelles, impactant les marges des géants technologiques.</a:t>
             </a:r>
           </a:p>
         </p:txBody>
@@ -20286,7 +20286,7 @@
                   <a:srgbClr val="A82020"/>
                 </a:solidFill>
               </a:rPr>
-              <a:t>Risque de surchauffe des valorisations</a:t>
+              <a:t>Concurrence accrue en IA</a:t>
             </a:r>
           </a:p>
         </p:txBody>
@@ -20320,7 +20320,7 @@
                   <a:srgbClr val="555555"/>
                 </a:solidFill>
               </a:rPr>
-              <a:t>Les multiples élevés pourraient se contracter en cas de ralentissement économique ou de révision des anticipations de croissance.</a:t>
+              <a:t>L'émergence de nouveaux acteurs (startups, géants asiatiques) menace les positions dominantes de NVIDIA et Google dans les infrastructures IA.</a:t>
             </a:r>
           </a:p>
         </p:txBody>
@@ -20440,7 +20440,7 @@
                   <a:srgbClr val="A82020"/>
                 </a:solidFill>
               </a:rPr>
-              <a:t>Dépendance aux dépenses publicitaires</a:t>
+              <a:t>Cycles de dépenses IT</a:t>
             </a:r>
           </a:p>
         </p:txBody>
@@ -20474,7 +20474,7 @@
                   <a:srgbClr val="555555"/>
                 </a:solidFill>
               </a:rPr>
-              <a:t>Les revenus de META restent fortement corrélés aux cycles économiques et aux budgets marketing des annonceurs.</a:t>
+              <a:t>Un ralentissement économique pourrait réduire les budgets IT des entreprises, affectant les revenus des fournisseurs de logiciels et services cloud.</a:t>
             </a:r>
           </a:p>
         </p:txBody>
@@ -24697,7 +24697,7 @@
                   <a:srgbClr val="555555"/>
                 </a:solidFill>
               </a:rPr>
-              <a:t>Le secteur Technology affiche une valorisation réelle élevée avec un multiple EV/EBITDA médian de 21.7x, reflétant une prime pour les acteurs capables de générer des marges EBITDA de 46.8% et une croissance organique des revenus de près de 20%. Les géants comme GOOGL, NVDA et META bénéficient d'un momentum boursier à 52 semaines supérieur à 49%, illustrant une dynamique de marché soutenue par l'IA, le cloud et la publicité ciblée.</a:t>
+              <a:t>Le secteur Technology affiche une valorisation réévaluée avec un multiple EV/EBITDA médian à 21.7x, reflétant une prime pour des marges EBITDA exceptionnelles de 46.8% et une croissance organique des revenus de près de 20%, tirée par l'IA générative et le cloud hyperscale.</a:t>
             </a:r>
           </a:p>
         </p:txBody>
@@ -24851,7 +24851,7 @@
                   <a:srgbClr val="1B3A6B"/>
                 </a:solidFill>
               </a:rPr>
-              <a:t>Adoption accélérée de l'IA générative</a:t>
+              <a:t>Adoption accélérée de l'IA</a:t>
             </a:r>
           </a:p>
         </p:txBody>
@@ -24885,7 +24885,7 @@
                   <a:srgbClr val="555555"/>
                 </a:solidFill>
               </a:rPr>
-              <a:t>Les entreprises technologiques leaders capitalisent sur l'IA générative pour booster leur productivité et créer de nouveaux flux de revenus.</a:t>
+              <a:t>Les modèles d'IA générative comme ceux de NVIDIA et Google transforment les pipelines de revenus des entreprises technologiques avec des contrats récurrents à forte marge.</a:t>
             </a:r>
           </a:p>
         </p:txBody>
@@ -24962,7 +24962,7 @@
                   <a:srgbClr val="1B3A6B"/>
                 </a:solidFill>
               </a:rPr>
-              <a:t>Migration vers le cloud hybride</a:t>
+              <a:t>Transition vers le cloud</a:t>
             </a:r>
           </a:p>
         </p:txBody>
@@ -24996,7 +24996,7 @@
                   <a:srgbClr val="555555"/>
                 </a:solidFill>
               </a:rPr>
-              <a:t>La demande en solutions cloud hybrides, notamment chez les entreprises traditionnelles, soutient la croissance des revenus récurrents.</a:t>
+              <a:t>La migration des infrastructures IT vers le cloud public (AWS, Azure, GCP) génère des revenus récurrents et des marges EBITDA en expansion pour les hyperscalers.</a:t>
             </a:r>
           </a:p>
         </p:txBody>
@@ -25073,7 +25073,7 @@
                   <a:srgbClr val="1B3A6B"/>
                 </a:solidFill>
               </a:rPr>
-              <a:t>Régulation favorable aux géants du numérique</a:t>
+              <a:t>Monétisation des données</a:t>
             </a:r>
           </a:p>
         </p:txBody>
@@ -25107,7 +25107,7 @@
                   <a:srgbClr val="555555"/>
                 </a:solidFill>
               </a:rPr>
-              <a:t>Les cadres réglementaires, comme le Digital Markets Act en Europe, renforcent les barrières à l'entrée pour les nouveaux acteurs.</a:t>
+              <a:t>Les plateformes comme Meta et Google capitalisent sur les données utilisateurs via des algorithmes publicitaires ciblés, boostant les revenus par utilisateur.</a:t>
             </a:r>
           </a:p>
         </p:txBody>
@@ -28637,7 +28637,7 @@
                   <a:srgbClr val="555555"/>
                 </a:solidFill>
               </a:rPr>
-              <a:t>L'adoption croissante du cloud par les entreprises, notamment en Europe et en Asie, devrait soutenir la croissance organique des revenus.</a:t>
+              <a:t>Les revenus du cloud public devraient croître de 25% en 2024, portés par l'adoption de l'IA et des outils DevOps.</a:t>
             </a:r>
           </a:p>
         </p:txBody>
@@ -28791,7 +28791,7 @@
                   <a:srgbClr val="1B3A6B"/>
                 </a:solidFill>
               </a:rPr>
-              <a:t>Monétisation de l'IA</a:t>
+              <a:t>Expansion des marges publicitaires</a:t>
             </a:r>
           </a:p>
         </p:txBody>
@@ -28825,7 +28825,7 @@
                   <a:srgbClr val="555555"/>
                 </a:solidFill>
               </a:rPr>
-              <a:t>Les solutions d'IA intégrées aux plateformes existantes (ex : Google Search, Meta Ads) devraient générer des revenus supplémentaires.</a:t>
+              <a:t>L'amélioration des algorithmes de ciblage (ex: Google Ads, Meta) augmente le ROI des annonceurs, soutenant les marges EBITDA.</a:t>
             </a:r>
           </a:p>
         </p:txBody>
@@ -28979,7 +28979,7 @@
                   <a:srgbClr val="1B3A6B"/>
                 </a:solidFill>
               </a:rPr>
-              <a:t>Régulation antitrust</a:t>
+              <a:t>Coûts énergétiques</a:t>
             </a:r>
           </a:p>
         </p:txBody>
@@ -29013,7 +29013,7 @@
                   <a:srgbClr val="555555"/>
                 </a:solidFill>
               </a:rPr>
-              <a:t>Les enquêtes et sanctions potentielles pourraient limiter les acquisitions stratégiques et peser sur les valorisations.</a:t>
+              <a:t>La hausse des coûts énergétiques pour les data centers (notamment en Europe) pourrait comprimer les marges des hyperscalers.</a:t>
             </a:r>
           </a:p>
         </p:txBody>
@@ -29167,7 +29167,7 @@
                   <a:srgbClr val="1B3A6B"/>
                 </a:solidFill>
               </a:rPr>
-              <a:t>Ralentissement des dépenses IT</a:t>
+              <a:t>Saturation du marché smartphone</a:t>
             </a:r>
           </a:p>
         </p:txBody>
@@ -29201,7 +29201,7 @@
                   <a:srgbClr val="555555"/>
                 </a:solidFill>
               </a:rPr>
-              <a:t>Un environnement macroéconomique dégradé pourrait entraîner une baisse des budgets IT des entreprises et des consommateurs.</a:t>
+              <a:t>La croissance des revenus hardware (ex: smartphones) ralentit, limitant le potentiel de valorisation des écosystèmes mobiles comme Apple ou Samsung.</a:t>
             </a:r>
           </a:p>
         </p:txBody>
@@ -29525,7 +29525,7 @@
                   <a:srgbClr val="2A5298"/>
                 </a:solidFill>
               </a:rPr>
-              <a:t>Le secteur est en phase de maturité avancée avec des opportunités de croissance sélective, notamment dans l'IA et le cloud.</a:t>
+              <a:t>Le secteur est en phase de maturation avancée avec une croissance supérieure au PIB, mais des signes de surchauffe apparaissent sur les valorisations des acteurs IA.</a:t>
             </a:r>
           </a:p>
         </p:txBody>

--- a/preview/secteur_Technology_S&P_500/secteur_Technology_S&P_500.pptx
+++ b/preview/secteur_Technology_S&P_500/secteur_Technology_S&P_500.pptx
@@ -8172,7 +8172,7 @@
                   <a:srgbClr val="555555"/>
                 </a:solidFill>
               </a:rPr>
-              <a:t>Les modèles d'IA générative comme ceux de NVIDIA et Google transforment les pipelines de revenus des entreprises technologiques avec des contrats récurrents à f</a:t>
+              <a:t>L'adoption accélérée de l'IA générative par les entreprises et consommateurs booste les revenus des leaders comme NVDA et GOOGL, avec des pipelines de produits </a:t>
             </a:r>
           </a:p>
         </p:txBody>
@@ -8326,7 +8326,7 @@
                   <a:srgbClr val="555555"/>
                 </a:solidFill>
               </a:rPr>
-              <a:t>Les enquêtes des autorités (UE, USA) pourraient imposer des amendes ou des restrictions opérationnelles, impactant les marges des géants technologiques.</a:t>
+              <a:t>Les enquêtes antitrust et les nouvelles lois sur la protection des données pourraient peser sur les marges et la croissance des géants technologiques.</a:t>
             </a:r>
           </a:p>
         </p:txBody>
@@ -9189,7 +9189,7 @@
                   <a:srgbClr val="555555"/>
                 </a:solidFill>
               </a:rPr>
-              <a:t>La migration des infrastructures IT vers le cloud public (AWS, Azure, GCP) génère des revenus récurrents et des marges EBITDA en expansion pour les hyperscalers</a:t>
+              <a:t>META maintient une croissance soutenue de ses revenus publicitaires grâce à l'amélioration des algorithmes de ciblage et à l'expansion internationale.</a:t>
             </a:r>
           </a:p>
         </p:txBody>
@@ -9343,7 +9343,7 @@
                   <a:srgbClr val="555555"/>
                 </a:solidFill>
               </a:rPr>
-              <a:t>L'émergence de nouveaux acteurs (startups, géants asiatiques) menace les positions dominantes de NVIDIA et Google dans les infrastructures IA.</a:t>
+              <a:t>L'émergence de nouveaux acteurs, notamment dans l'IA et le cloud, menace la domination des leaders établis et pourrait fragmenter les parts de marché.</a:t>
             </a:r>
           </a:p>
         </p:txBody>
@@ -10206,7 +10206,7 @@
                   <a:srgbClr val="555555"/>
                 </a:solidFill>
               </a:rPr>
-              <a:t>Les plateformes comme Meta et Google capitalisent sur les données utilisateurs via des algorithmes publicitaires ciblés, boostant les revenus par utilisateur.</a:t>
+              <a:t>La migration vers le cloud hybride et multi-cloud stimule la demande pour les solutions d'infrastructure de GOOGL et d'autres acteurs du secteur.</a:t>
             </a:r>
           </a:p>
         </p:txBody>
@@ -10360,7 +10360,7 @@
                   <a:srgbClr val="555555"/>
                 </a:solidFill>
               </a:rPr>
-              <a:t>Un ralentissement économique pourrait réduire les budgets IT des entreprises, affectant les revenus des fournisseurs de logiciels et services cloud.</a:t>
+              <a:t>Un ralentissement économique pourrait réduire les dépenses des entreprises en solutions technologiques, impactant directement les revenus des acteurs du secteur</a:t>
             </a:r>
           </a:p>
         </p:txBody>
@@ -14326,7 +14326,7 @@
                   <a:srgbClr val="FFFFFF"/>
                 </a:solidFill>
               </a:rPr>
-              <a:t>Régulation antitrust</a:t>
+              <a:t>Régulation</a:t>
             </a:r>
           </a:p>
         </p:txBody>
@@ -14360,7 +14360,7 @@
                   <a:srgbClr val="555555"/>
                 </a:solidFill>
               </a:rPr>
-              <a:t>Les enquêtes des autorités (UE, USA) pourraient imposer des amendes ou des restrictions opérationnelles, impactant les marges des géants technologiques.</a:t>
+              <a:t>Les enquêtes antitrust et les nouvelles lois sur la protection des données pourraient peser sur les marges et la croissance des géants technologiques.</a:t>
             </a:r>
           </a:p>
         </p:txBody>
@@ -14480,7 +14480,7 @@
                   <a:srgbClr val="FFFFFF"/>
                 </a:solidFill>
               </a:rPr>
-              <a:t>Concurrence accrue en IA</a:t>
+              <a:t>Concurrence</a:t>
             </a:r>
           </a:p>
         </p:txBody>
@@ -14514,7 +14514,7 @@
                   <a:srgbClr val="555555"/>
                 </a:solidFill>
               </a:rPr>
-              <a:t>L'émergence de nouveaux acteurs (startups, géants asiatiques) menace les positions dominantes de NVIDIA et Google dans les infrastructures IA.</a:t>
+              <a:t>L'émergence de nouveaux acteurs, notamment dans l'IA et le cloud, menace la domination des leaders établis et pourrait fragmenter les parts de marché.</a:t>
             </a:r>
           </a:p>
         </p:txBody>
@@ -14634,7 +14634,7 @@
                   <a:srgbClr val="FFFFFF"/>
                 </a:solidFill>
               </a:rPr>
-              <a:t>Cycles de dépenses IT</a:t>
+              <a:t>Cycles économiques</a:t>
             </a:r>
           </a:p>
         </p:txBody>
@@ -14668,7 +14668,7 @@
                   <a:srgbClr val="555555"/>
                 </a:solidFill>
               </a:rPr>
-              <a:t>Un ralentissement économique pourrait réduire les budgets IT des entreprises, affectant les revenus des fournisseurs de logiciels et services cloud.</a:t>
+              <a:t>Un ralentissement économique pourrait réduire les dépenses des entreprises en solutions technologiques, impactant directement les revenus des acteurs du secteur.</a:t>
             </a:r>
           </a:p>
         </p:txBody>
@@ -16921,7 +16921,7 @@
                   <a:srgbClr val="555555"/>
                 </a:solidFill>
               </a:rPr>
-              <a:t>+ Adoption accélérée de l'IA — Les modèles d'IA générative comme ceux de NVIDIA et Google transforment les pipelines de revenus des entreprises technologiques avec des con</a:t>
+              <a:t>+ IA Générative — L'adoption accélérée de l'IA générative par les entreprises et consommateurs booste les revenus des leaders comme NVDA et GOOGL, avec des pi</a:t>
             </a:r>
           </a:p>
         </p:txBody>
@@ -17041,7 +17041,7 @@
                   <a:srgbClr val="555555"/>
                 </a:solidFill>
               </a:rPr>
-              <a:t>- Régulation antitrust — Les enquêtes des autorités (UE, USA) pourraient imposer des amendes ou des restrictions opérationnelles, impactant les marges des géants tec</a:t>
+              <a:t>- Régulation — Les enquêtes antitrust et les nouvelles lois sur la protection des données pourraient peser sur les marges et la croissance des géants techn</a:t>
             </a:r>
           </a:p>
         </p:txBody>
@@ -19593,7 +19593,7 @@
                   <a:srgbClr val="1B3A6B"/>
                 </a:solidFill>
               </a:rPr>
-              <a:t>Adoption accélérée de l'IA</a:t>
+              <a:t>IA Générative</a:t>
             </a:r>
           </a:p>
         </p:txBody>
@@ -19627,7 +19627,7 @@
                   <a:srgbClr val="555555"/>
                 </a:solidFill>
               </a:rPr>
-              <a:t>Les modèles d'IA générative comme ceux de NVIDIA et Google transforment les pipelines de revenus des entreprises technologiques avec des contrats récurrents à forte marge.</a:t>
+              <a:t>L'adoption accélérée de l'IA générative par les entreprises et consommateurs booste les revenus des leaders comme NVDA et GOOGL, avec des pipelines de produits en forte expansion.</a:t>
             </a:r>
           </a:p>
         </p:txBody>
@@ -19747,7 +19747,7 @@
                   <a:srgbClr val="1B3A6B"/>
                 </a:solidFill>
               </a:rPr>
-              <a:t>Transition vers le cloud</a:t>
+              <a:t>Publicité digitale</a:t>
             </a:r>
           </a:p>
         </p:txBody>
@@ -19781,7 +19781,7 @@
                   <a:srgbClr val="555555"/>
                 </a:solidFill>
               </a:rPr>
-              <a:t>La migration des infrastructures IT vers le cloud public (AWS, Azure, GCP) génère des revenus récurrents et des marges EBITDA en expansion pour les hyperscalers.</a:t>
+              <a:t>META maintient une croissance soutenue de ses revenus publicitaires grâce à l'amélioration des algorithmes de ciblage et à l'expansion internationale.</a:t>
             </a:r>
           </a:p>
         </p:txBody>
@@ -19901,7 +19901,7 @@
                   <a:srgbClr val="1B3A6B"/>
                 </a:solidFill>
               </a:rPr>
-              <a:t>Monétisation des données</a:t>
+              <a:t>Cloud hybride</a:t>
             </a:r>
           </a:p>
         </p:txBody>
@@ -19935,7 +19935,7 @@
                   <a:srgbClr val="555555"/>
                 </a:solidFill>
               </a:rPr>
-              <a:t>Les plateformes comme Meta et Google capitalisent sur les données utilisateurs via des algorithmes publicitaires ciblés, boostant les revenus par utilisateur.</a:t>
+              <a:t>La migration vers le cloud hybride et multi-cloud stimule la demande pour les solutions d'infrastructure de GOOGL et d'autres acteurs du secteur.</a:t>
             </a:r>
           </a:p>
         </p:txBody>
@@ -20132,7 +20132,7 @@
                   <a:srgbClr val="A82020"/>
                 </a:solidFill>
               </a:rPr>
-              <a:t>Régulation antitrust</a:t>
+              <a:t>Régulation</a:t>
             </a:r>
           </a:p>
         </p:txBody>
@@ -20166,7 +20166,7 @@
                   <a:srgbClr val="555555"/>
                 </a:solidFill>
               </a:rPr>
-              <a:t>Les enquêtes des autorités (UE, USA) pourraient imposer des amendes ou des restrictions opérationnelles, impactant les marges des géants technologiques.</a:t>
+              <a:t>Les enquêtes antitrust et les nouvelles lois sur la protection des données pourraient peser sur les marges et la croissance des géants technologiques.</a:t>
             </a:r>
           </a:p>
         </p:txBody>
@@ -20286,7 +20286,7 @@
                   <a:srgbClr val="A82020"/>
                 </a:solidFill>
               </a:rPr>
-              <a:t>Concurrence accrue en IA</a:t>
+              <a:t>Concurrence</a:t>
             </a:r>
           </a:p>
         </p:txBody>
@@ -20320,7 +20320,7 @@
                   <a:srgbClr val="555555"/>
                 </a:solidFill>
               </a:rPr>
-              <a:t>L'émergence de nouveaux acteurs (startups, géants asiatiques) menace les positions dominantes de NVIDIA et Google dans les infrastructures IA.</a:t>
+              <a:t>L'émergence de nouveaux acteurs, notamment dans l'IA et le cloud, menace la domination des leaders établis et pourrait fragmenter les parts de marché.</a:t>
             </a:r>
           </a:p>
         </p:txBody>
@@ -20440,7 +20440,7 @@
                   <a:srgbClr val="A82020"/>
                 </a:solidFill>
               </a:rPr>
-              <a:t>Cycles de dépenses IT</a:t>
+              <a:t>Cycles économiques</a:t>
             </a:r>
           </a:p>
         </p:txBody>
@@ -20474,7 +20474,7 @@
                   <a:srgbClr val="555555"/>
                 </a:solidFill>
               </a:rPr>
-              <a:t>Un ralentissement économique pourrait réduire les budgets IT des entreprises, affectant les revenus des fournisseurs de logiciels et services cloud.</a:t>
+              <a:t>Un ralentissement économique pourrait réduire les dépenses des entreprises en solutions technologiques, impactant directement les revenus des acteurs du secteur.</a:t>
             </a:r>
           </a:p>
         </p:txBody>
@@ -24697,7 +24697,7 @@
                   <a:srgbClr val="555555"/>
                 </a:solidFill>
               </a:rPr>
-              <a:t>Le secteur Technology affiche une valorisation réévaluée avec un multiple EV/EBITDA médian à 21.7x, reflétant une prime pour des marges EBITDA exceptionnelles de 46.8% et une croissance organique des revenus de près de 20%, tirée par l'IA générative et le cloud hyperscale.</a:t>
+              <a:t>Le secteur Technology affiche une valorisation réelle soutenue par des marges EBITDA robustes à 46.8% et une croissance des revenus de près de 20%, malgré un multiple EV/EBITDA médian élevé à 21.7x reflétant une prime pour l'innovation et la résilience des modèles économiques. Les géants comme GOOGL, NVDA et META bénéficient d'une dynamique de momentum à 52 semaines de +49.2%, illustrant une confiance durable des investisseurs dans leur capacité à capter les tendances technologiques disruptives.</a:t>
             </a:r>
           </a:p>
         </p:txBody>
@@ -24851,7 +24851,7 @@
                   <a:srgbClr val="1B3A6B"/>
                 </a:solidFill>
               </a:rPr>
-              <a:t>Adoption accélérée de l'IA</a:t>
+              <a:t>IA Générative</a:t>
             </a:r>
           </a:p>
         </p:txBody>
@@ -24885,7 +24885,7 @@
                   <a:srgbClr val="555555"/>
                 </a:solidFill>
               </a:rPr>
-              <a:t>Les modèles d'IA générative comme ceux de NVIDIA et Google transforment les pipelines de revenus des entreprises technologiques avec des contrats récurrents à forte marge.</a:t>
+              <a:t>L'adoption accélérée de l'IA générative par les entreprises et consommateurs booste les revenus des leaders comme NVDA et GOOGL, avec des pipelines de produits en forte expansion.</a:t>
             </a:r>
           </a:p>
         </p:txBody>
@@ -24962,7 +24962,7 @@
                   <a:srgbClr val="1B3A6B"/>
                 </a:solidFill>
               </a:rPr>
-              <a:t>Transition vers le cloud</a:t>
+              <a:t>Publicité digitale</a:t>
             </a:r>
           </a:p>
         </p:txBody>
@@ -24996,7 +24996,7 @@
                   <a:srgbClr val="555555"/>
                 </a:solidFill>
               </a:rPr>
-              <a:t>La migration des infrastructures IT vers le cloud public (AWS, Azure, GCP) génère des revenus récurrents et des marges EBITDA en expansion pour les hyperscalers.</a:t>
+              <a:t>META maintient une croissance soutenue de ses revenus publicitaires grâce à l'amélioration des algorithmes de ciblage et à l'expansion internationale.</a:t>
             </a:r>
           </a:p>
         </p:txBody>
@@ -25073,7 +25073,7 @@
                   <a:srgbClr val="1B3A6B"/>
                 </a:solidFill>
               </a:rPr>
-              <a:t>Monétisation des données</a:t>
+              <a:t>Cloud hybride</a:t>
             </a:r>
           </a:p>
         </p:txBody>
@@ -25107,7 +25107,7 @@
                   <a:srgbClr val="555555"/>
                 </a:solidFill>
               </a:rPr>
-              <a:t>Les plateformes comme Meta et Google capitalisent sur les données utilisateurs via des algorithmes publicitaires ciblés, boostant les revenus par utilisateur.</a:t>
+              <a:t>La migration vers le cloud hybride et multi-cloud stimule la demande pour les solutions d'infrastructure de GOOGL et d'autres acteurs du secteur.</a:t>
             </a:r>
           </a:p>
         </p:txBody>
@@ -28603,7 +28603,7 @@
                   <a:srgbClr val="1B3A6B"/>
                 </a:solidFill>
               </a:rPr>
-              <a:t>Croissance des revenus cloud</a:t>
+              <a:t>Adoption technologique</a:t>
             </a:r>
           </a:p>
         </p:txBody>
@@ -28637,7 +28637,7 @@
                   <a:srgbClr val="555555"/>
                 </a:solidFill>
               </a:rPr>
-              <a:t>Les revenus du cloud public devraient croître de 25% en 2024, portés par l'adoption de l'IA et des outils DevOps.</a:t>
+              <a:t>L'accélération de la digitalisation des entreprises et des consommateurs soutient une croissance structurelle des revenus dans le secteur.</a:t>
             </a:r>
           </a:p>
         </p:txBody>
@@ -28791,7 +28791,7 @@
                   <a:srgbClr val="1B3A6B"/>
                 </a:solidFill>
               </a:rPr>
-              <a:t>Expansion des marges publicitaires</a:t>
+              <a:t>Effets de réseau</a:t>
             </a:r>
           </a:p>
         </p:txBody>
@@ -28825,7 +28825,7 @@
                   <a:srgbClr val="555555"/>
                 </a:solidFill>
               </a:rPr>
-              <a:t>L'amélioration des algorithmes de ciblage (ex: Google Ads, Meta) augmente le ROI des annonceurs, soutenant les marges EBITDA.</a:t>
+              <a:t>Les plateformes technologiques bénéficient d'effets de réseau croissants, renforçant leur position dominante et leur pouvoir de tarification.</a:t>
             </a:r>
           </a:p>
         </p:txBody>
@@ -28979,7 +28979,7 @@
                   <a:srgbClr val="1B3A6B"/>
                 </a:solidFill>
               </a:rPr>
-              <a:t>Coûts énergétiques</a:t>
+              <a:t>Coûts d'infrastructure</a:t>
             </a:r>
           </a:p>
         </p:txBody>
@@ -29013,7 +29013,7 @@
                   <a:srgbClr val="555555"/>
                 </a:solidFill>
               </a:rPr>
-              <a:t>La hausse des coûts énergétiques pour les data centers (notamment en Europe) pourrait comprimer les marges des hyperscalers.</a:t>
+              <a:t>La hausse des coûts liés à l'infrastructure cloud et aux centres de données pourrait éroder les marges des acteurs moins efficaces.</a:t>
             </a:r>
           </a:p>
         </p:txBody>
@@ -29167,7 +29167,7 @@
                   <a:srgbClr val="1B3A6B"/>
                 </a:solidFill>
               </a:rPr>
-              <a:t>Saturation du marché smartphone</a:t>
+              <a:t>Saturation du marché</a:t>
             </a:r>
           </a:p>
         </p:txBody>
@@ -29201,7 +29201,7 @@
                   <a:srgbClr val="555555"/>
                 </a:solidFill>
               </a:rPr>
-              <a:t>La croissance des revenus hardware (ex: smartphones) ralentit, limitant le potentiel de valorisation des écosystèmes mobiles comme Apple ou Samsung.</a:t>
+              <a:t>La saturation progressive des marchés matures pour certains produits technologiques pourrait limiter la croissance organique des revenus.</a:t>
             </a:r>
           </a:p>
         </p:txBody>
@@ -29525,7 +29525,7 @@
                   <a:srgbClr val="2A5298"/>
                 </a:solidFill>
               </a:rPr>
-              <a:t>Le secteur est en phase de maturation avancée avec une croissance supérieure au PIB, mais des signes de surchauffe apparaissent sur les valorisations des acteurs IA.</a:t>
+              <a:t>Le secteur Technology semble en phase de maturité avancée avec des signes de surchauffe, mais les fondamentaux solides et les catalyseurs structurels justifient une surpondération.</a:t>
             </a:r>
           </a:p>
         </p:txBody>

--- a/preview/secteur_Technology_S&P_500/secteur_Technology_S&P_500.pptx
+++ b/preview/secteur_Technology_S&P_500/secteur_Technology_S&P_500.pptx
@@ -8172,7 +8172,7 @@
                   <a:srgbClr val="555555"/>
                 </a:solidFill>
               </a:rPr>
-              <a:t>L'adoption accélérée de l'IA générative par les entreprises et consommateurs booste les revenus des leaders comme NVDA et GOOGL, avec des pipelines de produits </a:t>
+              <a:t>Les dépenses en infrastructures cloud et en puces spécialisées (GPU/TPU) explosent, dopant les revenus des leaders comme NVIDIA et Alphabet.</a:t>
             </a:r>
           </a:p>
         </p:txBody>
@@ -8326,7 +8326,7 @@
                   <a:srgbClr val="555555"/>
                 </a:solidFill>
               </a:rPr>
-              <a:t>Les enquêtes antitrust et les nouvelles lois sur la protection des données pourraient peser sur les marges et la croissance des géants technologiques.</a:t>
+              <a:t>Les enquêtes et amendes potentielles (ex : Digital Markets Act en Europe) pourraient peser sur les marges des géants technologiques.</a:t>
             </a:r>
           </a:p>
         </p:txBody>
@@ -9189,7 +9189,7 @@
                   <a:srgbClr val="555555"/>
                 </a:solidFill>
               </a:rPr>
-              <a:t>META maintient une croissance soutenue de ses revenus publicitaires grâce à l'amélioration des algorithmes de ciblage et à l'expansion internationale.</a:t>
+              <a:t>Les plateformes comme Meta et Google renforcent leurs revenus publicitaires grâce à l'amélioration des algorithmes de ciblage.</a:t>
             </a:r>
           </a:p>
         </p:txBody>
@@ -9343,7 +9343,7 @@
                   <a:srgbClr val="555555"/>
                 </a:solidFill>
               </a:rPr>
-              <a:t>L'émergence de nouveaux acteurs, notamment dans l'IA et le cloud, menace la domination des leaders établis et pourrait fragmenter les parts de marché.</a:t>
+              <a:t>Les investissements massifs en IA et en semi-conducteurs pourraient ne pas se traduire par des retours immédiats.</a:t>
             </a:r>
           </a:p>
         </p:txBody>
@@ -10206,7 +10206,7 @@
                   <a:srgbClr val="555555"/>
                 </a:solidFill>
               </a:rPr>
-              <a:t>La migration vers le cloud hybride et multi-cloud stimule la demande pour les solutions d'infrastructure de GOOGL et d'autres acteurs du secteur.</a:t>
+              <a:t>Les entreprises accélèrent leur migration vers des modèles récurrents, stabilisant les flux de trésorerie.</a:t>
             </a:r>
           </a:p>
         </p:txBody>
@@ -10360,7 +10360,7 @@
                   <a:srgbClr val="555555"/>
                 </a:solidFill>
               </a:rPr>
-              <a:t>Un ralentissement économique pourrait réduire les dépenses des entreprises en solutions technologiques, impactant directement les revenus des acteurs du secteur</a:t>
+              <a:t>Une remontée durable des taux pourrait réduire l'attractivité des valorisations élevées du secteur.</a:t>
             </a:r>
           </a:p>
         </p:txBody>
@@ -14326,7 +14326,7 @@
                   <a:srgbClr val="FFFFFF"/>
                 </a:solidFill>
               </a:rPr>
-              <a:t>Régulation</a:t>
+              <a:t>Régulation antitrust</a:t>
             </a:r>
           </a:p>
         </p:txBody>
@@ -14360,7 +14360,7 @@
                   <a:srgbClr val="555555"/>
                 </a:solidFill>
               </a:rPr>
-              <a:t>Les enquêtes antitrust et les nouvelles lois sur la protection des données pourraient peser sur les marges et la croissance des géants technologiques.</a:t>
+              <a:t>Les enquêtes et amendes potentielles (ex : Digital Markets Act en Europe) pourraient peser sur les marges des géants technologiques.</a:t>
             </a:r>
           </a:p>
         </p:txBody>
@@ -14480,7 +14480,7 @@
                   <a:srgbClr val="FFFFFF"/>
                 </a:solidFill>
               </a:rPr>
-              <a:t>Concurrence</a:t>
+              <a:t>Cycles de R&amp;D coûteux</a:t>
             </a:r>
           </a:p>
         </p:txBody>
@@ -14514,7 +14514,7 @@
                   <a:srgbClr val="555555"/>
                 </a:solidFill>
               </a:rPr>
-              <a:t>L'émergence de nouveaux acteurs, notamment dans l'IA et le cloud, menace la domination des leaders établis et pourrait fragmenter les parts de marché.</a:t>
+              <a:t>Les investissements massifs en IA et en semi-conducteurs pourraient ne pas se traduire par des retours immédiats.</a:t>
             </a:r>
           </a:p>
         </p:txBody>
@@ -14634,7 +14634,7 @@
                   <a:srgbClr val="FFFFFF"/>
                 </a:solidFill>
               </a:rPr>
-              <a:t>Cycles économiques</a:t>
+              <a:t>Sensibilité aux taux d'intérêt</a:t>
             </a:r>
           </a:p>
         </p:txBody>
@@ -14668,7 +14668,7 @@
                   <a:srgbClr val="555555"/>
                 </a:solidFill>
               </a:rPr>
-              <a:t>Un ralentissement économique pourrait réduire les dépenses des entreprises en solutions technologiques, impactant directement les revenus des acteurs du secteur.</a:t>
+              <a:t>Une remontée durable des taux pourrait réduire l'attractivité des valorisations élevées du secteur.</a:t>
             </a:r>
           </a:p>
         </p:txBody>
@@ -16921,7 +16921,7 @@
                   <a:srgbClr val="555555"/>
                 </a:solidFill>
               </a:rPr>
-              <a:t>+ IA Générative — L'adoption accélérée de l'IA générative par les entreprises et consommateurs booste les revenus des leaders comme NVDA et GOOGL, avec des pi</a:t>
+              <a:t>+ Adoption accélérée de l'IA générative — Les dépenses en infrastructures cloud et en puces spécialisées (GPU/TPU) explosent, dopant les revenus des leaders comme NVIDIA et Alphabet.</a:t>
             </a:r>
           </a:p>
         </p:txBody>
@@ -17041,7 +17041,7 @@
                   <a:srgbClr val="555555"/>
                 </a:solidFill>
               </a:rPr>
-              <a:t>- Régulation — Les enquêtes antitrust et les nouvelles lois sur la protection des données pourraient peser sur les marges et la croissance des géants techn</a:t>
+              <a:t>- Régulation antitrust — Les enquêtes et amendes potentielles (ex : Digital Markets Act en Europe) pourraient peser sur les marges des géants technologiques.</a:t>
             </a:r>
           </a:p>
         </p:txBody>
@@ -19593,7 +19593,7 @@
                   <a:srgbClr val="1B3A6B"/>
                 </a:solidFill>
               </a:rPr>
-              <a:t>IA Générative</a:t>
+              <a:t>Adoption accélérée de l'IA générative</a:t>
             </a:r>
           </a:p>
         </p:txBody>
@@ -19627,7 +19627,7 @@
                   <a:srgbClr val="555555"/>
                 </a:solidFill>
               </a:rPr>
-              <a:t>L'adoption accélérée de l'IA générative par les entreprises et consommateurs booste les revenus des leaders comme NVDA et GOOGL, avec des pipelines de produits en forte expansion.</a:t>
+              <a:t>Les dépenses en infrastructures cloud et en puces spécialisées (GPU/TPU) explosent, dopant les revenus des leaders comme NVIDIA et Alphabet.</a:t>
             </a:r>
           </a:p>
         </p:txBody>
@@ -19747,7 +19747,7 @@
                   <a:srgbClr val="1B3A6B"/>
                 </a:solidFill>
               </a:rPr>
-              <a:t>Publicité digitale</a:t>
+              <a:t>Monétisation des données utilisateurs</a:t>
             </a:r>
           </a:p>
         </p:txBody>
@@ -19781,7 +19781,7 @@
                   <a:srgbClr val="555555"/>
                 </a:solidFill>
               </a:rPr>
-              <a:t>META maintient une croissance soutenue de ses revenus publicitaires grâce à l'amélioration des algorithmes de ciblage et à l'expansion internationale.</a:t>
+              <a:t>Les plateformes comme Meta et Google renforcent leurs revenus publicitaires grâce à l'amélioration des algorithmes de ciblage.</a:t>
             </a:r>
           </a:p>
         </p:txBody>
@@ -19901,7 +19901,7 @@
                   <a:srgbClr val="1B3A6B"/>
                 </a:solidFill>
               </a:rPr>
-              <a:t>Cloud hybride</a:t>
+              <a:t>Transition vers le SaaS et l'abonnement</a:t>
             </a:r>
           </a:p>
         </p:txBody>
@@ -19935,7 +19935,7 @@
                   <a:srgbClr val="555555"/>
                 </a:solidFill>
               </a:rPr>
-              <a:t>La migration vers le cloud hybride et multi-cloud stimule la demande pour les solutions d'infrastructure de GOOGL et d'autres acteurs du secteur.</a:t>
+              <a:t>Les entreprises accélèrent leur migration vers des modèles récurrents, stabilisant les flux de trésorerie.</a:t>
             </a:r>
           </a:p>
         </p:txBody>
@@ -20132,7 +20132,7 @@
                   <a:srgbClr val="A82020"/>
                 </a:solidFill>
               </a:rPr>
-              <a:t>Régulation</a:t>
+              <a:t>Régulation antitrust</a:t>
             </a:r>
           </a:p>
         </p:txBody>
@@ -20166,7 +20166,7 @@
                   <a:srgbClr val="555555"/>
                 </a:solidFill>
               </a:rPr>
-              <a:t>Les enquêtes antitrust et les nouvelles lois sur la protection des données pourraient peser sur les marges et la croissance des géants technologiques.</a:t>
+              <a:t>Les enquêtes et amendes potentielles (ex : Digital Markets Act en Europe) pourraient peser sur les marges des géants technologiques.</a:t>
             </a:r>
           </a:p>
         </p:txBody>
@@ -20286,7 +20286,7 @@
                   <a:srgbClr val="A82020"/>
                 </a:solidFill>
               </a:rPr>
-              <a:t>Concurrence</a:t>
+              <a:t>Cycles de R&amp;D coûteux</a:t>
             </a:r>
           </a:p>
         </p:txBody>
@@ -20320,7 +20320,7 @@
                   <a:srgbClr val="555555"/>
                 </a:solidFill>
               </a:rPr>
-              <a:t>L'émergence de nouveaux acteurs, notamment dans l'IA et le cloud, menace la domination des leaders établis et pourrait fragmenter les parts de marché.</a:t>
+              <a:t>Les investissements massifs en IA et en semi-conducteurs pourraient ne pas se traduire par des retours immédiats.</a:t>
             </a:r>
           </a:p>
         </p:txBody>
@@ -20440,7 +20440,7 @@
                   <a:srgbClr val="A82020"/>
                 </a:solidFill>
               </a:rPr>
-              <a:t>Cycles économiques</a:t>
+              <a:t>Sensibilité aux taux d'intérêt</a:t>
             </a:r>
           </a:p>
         </p:txBody>
@@ -20474,7 +20474,7 @@
                   <a:srgbClr val="555555"/>
                 </a:solidFill>
               </a:rPr>
-              <a:t>Un ralentissement économique pourrait réduire les dépenses des entreprises en solutions technologiques, impactant directement les revenus des acteurs du secteur.</a:t>
+              <a:t>Une remontée durable des taux pourrait réduire l'attractivité des valorisations élevées du secteur.</a:t>
             </a:r>
           </a:p>
         </p:txBody>
@@ -24697,7 +24697,7 @@
                   <a:srgbClr val="555555"/>
                 </a:solidFill>
               </a:rPr>
-              <a:t>Le secteur Technology affiche une valorisation réelle soutenue par des marges EBITDA robustes à 46.8% et une croissance des revenus de près de 20%, malgré un multiple EV/EBITDA médian élevé à 21.7x reflétant une prime pour l'innovation et la résilience des modèles économiques. Les géants comme GOOGL, NVDA et META bénéficient d'une dynamique de momentum à 52 semaines de +49.2%, illustrant une confiance durable des investisseurs dans leur capacité à capter les tendances technologiques disruptives.</a:t>
+              <a:t>Le secteur Technology affiche une valorisation premium avec un multiple EV/EBITDA médian de 21.7x, reflétant une croissance organique soutenue (+19.9%) et une rentabilité opérationnelle robuste (marge EBITDA de 46.8%), bien au-dessus des moyennes historiques. Les géants du cloud et de l'IA (GOOGL, NVDA, META) captent cette dynamique avec des performances boursières exceptionnelles sur 52 semaines (+49.2%).</a:t>
             </a:r>
           </a:p>
         </p:txBody>
@@ -24851,7 +24851,7 @@
                   <a:srgbClr val="1B3A6B"/>
                 </a:solidFill>
               </a:rPr>
-              <a:t>IA Générative</a:t>
+              <a:t>Adoption accélérée de l'IA générative</a:t>
             </a:r>
           </a:p>
         </p:txBody>
@@ -24885,7 +24885,7 @@
                   <a:srgbClr val="555555"/>
                 </a:solidFill>
               </a:rPr>
-              <a:t>L'adoption accélérée de l'IA générative par les entreprises et consommateurs booste les revenus des leaders comme NVDA et GOOGL, avec des pipelines de produits en forte expansion.</a:t>
+              <a:t>Les dépenses en infrastructures cloud et en puces spécialisées (GPU/TPU) explosent, dopant les revenus des leaders comme NVIDIA et Alphabet.</a:t>
             </a:r>
           </a:p>
         </p:txBody>
@@ -24962,7 +24962,7 @@
                   <a:srgbClr val="1B3A6B"/>
                 </a:solidFill>
               </a:rPr>
-              <a:t>Publicité digitale</a:t>
+              <a:t>Monétisation des données utilisateurs</a:t>
             </a:r>
           </a:p>
         </p:txBody>
@@ -24996,7 +24996,7 @@
                   <a:srgbClr val="555555"/>
                 </a:solidFill>
               </a:rPr>
-              <a:t>META maintient une croissance soutenue de ses revenus publicitaires grâce à l'amélioration des algorithmes de ciblage et à l'expansion internationale.</a:t>
+              <a:t>Les plateformes comme Meta et Google renforcent leurs revenus publicitaires grâce à l'amélioration des algorithmes de ciblage.</a:t>
             </a:r>
           </a:p>
         </p:txBody>
@@ -25073,7 +25073,7 @@
                   <a:srgbClr val="1B3A6B"/>
                 </a:solidFill>
               </a:rPr>
-              <a:t>Cloud hybride</a:t>
+              <a:t>Transition vers le SaaS et l'abonnement</a:t>
             </a:r>
           </a:p>
         </p:txBody>
@@ -25107,7 +25107,7 @@
                   <a:srgbClr val="555555"/>
                 </a:solidFill>
               </a:rPr>
-              <a:t>La migration vers le cloud hybride et multi-cloud stimule la demande pour les solutions d'infrastructure de GOOGL et d'autres acteurs du secteur.</a:t>
+              <a:t>Les entreprises accélèrent leur migration vers des modèles récurrents, stabilisant les flux de trésorerie.</a:t>
             </a:r>
           </a:p>
         </p:txBody>
@@ -28603,7 +28603,7 @@
                   <a:srgbClr val="1B3A6B"/>
                 </a:solidFill>
               </a:rPr>
-              <a:t>Adoption technologique</a:t>
+              <a:t>Croissance des revenus cloud</a:t>
             </a:r>
           </a:p>
         </p:txBody>
@@ -28637,7 +28637,7 @@
                   <a:srgbClr val="555555"/>
                 </a:solidFill>
               </a:rPr>
-              <a:t>L'accélération de la digitalisation des entreprises et des consommateurs soutient une croissance structurelle des revenus dans le secteur.</a:t>
+              <a:t>La demande en services cloud (AWS, Azure, GCP) reste insatiable, avec une croissance annuelle à deux chiffres soutenue.</a:t>
             </a:r>
           </a:p>
         </p:txBody>
@@ -28791,7 +28791,7 @@
                   <a:srgbClr val="1B3A6B"/>
                 </a:solidFill>
               </a:rPr>
-              <a:t>Effets de réseau</a:t>
+              <a:t>Expansion des marchés adjacents</a:t>
             </a:r>
           </a:p>
         </p:txBody>
@@ -28825,7 +28825,7 @@
                   <a:srgbClr val="555555"/>
                 </a:solidFill>
               </a:rPr>
-              <a:t>Les plateformes technologiques bénéficient d'effets de réseau croissants, renforçant leur position dominante et leur pouvoir de tarification.</a:t>
+              <a:t>Les acteurs technologiques pénètrent de nouveaux segments (santé, finance, automobile) via des acquisitions stratégiques.</a:t>
             </a:r>
           </a:p>
         </p:txBody>
@@ -28979,7 +28979,7 @@
                   <a:srgbClr val="1B3A6B"/>
                 </a:solidFill>
               </a:rPr>
-              <a:t>Coûts d'infrastructure</a:t>
+              <a:t>Concurrence accrue en IA</a:t>
             </a:r>
           </a:p>
         </p:txBody>
@@ -29013,7 +29013,7 @@
                   <a:srgbClr val="555555"/>
                 </a:solidFill>
               </a:rPr>
-              <a:t>La hausse des coûts liés à l'infrastructure cloud et aux centres de données pourrait éroder les marges des acteurs moins efficaces.</a:t>
+              <a:t>L'entrée de nouveaux acteurs (startups, hyperscalers chinois) pourrait fragmenter les parts de marché.</a:t>
             </a:r>
           </a:p>
         </p:txBody>
@@ -29167,7 +29167,7 @@
                   <a:srgbClr val="1B3A6B"/>
                 </a:solidFill>
               </a:rPr>
-              <a:t>Saturation du marché</a:t>
+              <a:t>Ralentissement des dépenses IT</a:t>
             </a:r>
           </a:p>
         </p:txBody>
@@ -29201,7 +29201,7 @@
                   <a:srgbClr val="555555"/>
                 </a:solidFill>
               </a:rPr>
-              <a:t>La saturation progressive des marchés matures pour certains produits technologiques pourrait limiter la croissance organique des revenus.</a:t>
+              <a:t>Un contexte macroéconomique dégradé (récession, inflation) pourrait freiner les budgets des entreprises en logiciels.</a:t>
             </a:r>
           </a:p>
         </p:txBody>
@@ -29525,7 +29525,7 @@
                   <a:srgbClr val="2A5298"/>
                 </a:solidFill>
               </a:rPr>
-              <a:t>Le secteur Technology semble en phase de maturité avancée avec des signes de surchauffe, mais les fondamentaux solides et les catalyseurs structurels justifient une surpondération.</a:t>
+              <a:t>Le secteur se situe en phase de maturité avancée avec des poches de croissance disruptive (IA, cloud), mais des signes de surchauffe sur certains segments.</a:t>
             </a:r>
           </a:p>
         </p:txBody>

--- a/preview/secteur_Technology_S&P_500/secteur_Technology_S&P_500.pptx
+++ b/preview/secteur_Technology_S&P_500/secteur_Technology_S&P_500.pptx
@@ -8172,7 +8172,7 @@
                   <a:srgbClr val="555555"/>
                 </a:solidFill>
               </a:rPr>
-              <a:t>Les dépenses en infrastructures cloud et en puces spécialisées (GPU/TPU) explosent, dopant les revenus des leaders comme NVIDIA et Alphabet.</a:t>
+              <a:t>L'adoption accélérée de l'IA générative par les entreprises booste les revenus des acteurs comme NVDA et GOOGL, avec des pipelines de contrats en hausse de 30% </a:t>
             </a:r>
           </a:p>
         </p:txBody>
@@ -8326,7 +8326,7 @@
                   <a:srgbClr val="555555"/>
                 </a:solidFill>
               </a:rPr>
-              <a:t>Les enquêtes et amendes potentielles (ex : Digital Markets Act en Europe) pourraient peser sur les marges des géants technologiques.</a:t>
+              <a:t>Les enquêtes antitrust de l'UE et des États-Unis pourraient entraîner des amendes ou des restrictions opérationnelles pour GOOGL et META.</a:t>
             </a:r>
           </a:p>
         </p:txBody>
@@ -9189,7 +9189,7 @@
                   <a:srgbClr val="555555"/>
                 </a:solidFill>
               </a:rPr>
-              <a:t>Les plateformes comme Meta et Google renforcent leurs revenus publicitaires grâce à l'amélioration des algorithmes de ciblage.</a:t>
+              <a:t>META profite de la reprise des dépenses publicitaires en ligne, avec une croissance des revenus publicitaires de +24% au T4 2023, supérieure aux attentes.</a:t>
             </a:r>
           </a:p>
         </p:txBody>
@@ -9343,7 +9343,7 @@
                   <a:srgbClr val="555555"/>
                 </a:solidFill>
               </a:rPr>
-              <a:t>Les investissements massifs en IA et en semi-conducteurs pourraient ne pas se traduire par des retours immédiats.</a:t>
+              <a:t>La pression concurrentielle dans le cloud computing (AWS, Azure) limite les marges d'AWS et de GOOGL Cloud malgré leur croissance.</a:t>
             </a:r>
           </a:p>
         </p:txBody>
@@ -10206,7 +10206,7 @@
                   <a:srgbClr val="555555"/>
                 </a:solidFill>
               </a:rPr>
-              <a:t>Les entreprises accélèrent leur migration vers des modèles récurrents, stabilisant les flux de trésorerie.</a:t>
+              <a:t>GOOGL Cloud enregistre une croissance annuelle de +35% en 2023, portée par l'expansion de ses services d'infrastructure et de données.</a:t>
             </a:r>
           </a:p>
         </p:txBody>
@@ -10360,7 +10360,7 @@
                   <a:srgbClr val="555555"/>
                 </a:solidFill>
               </a:rPr>
-              <a:t>Une remontée durable des taux pourrait réduire l'attractivité des valorisations élevées du secteur.</a:t>
+              <a:t>Une correction des valorisations technologiques, notamment dans l'IA, pourrait impacter les multiples des acteurs comme NVDA.</a:t>
             </a:r>
           </a:p>
         </p:txBody>
@@ -14326,7 +14326,7 @@
                   <a:srgbClr val="FFFFFF"/>
                 </a:solidFill>
               </a:rPr>
-              <a:t>Régulation antitrust</a:t>
+              <a:t>Régulation</a:t>
             </a:r>
           </a:p>
         </p:txBody>
@@ -14360,7 +14360,7 @@
                   <a:srgbClr val="555555"/>
                 </a:solidFill>
               </a:rPr>
-              <a:t>Les enquêtes et amendes potentielles (ex : Digital Markets Act en Europe) pourraient peser sur les marges des géants technologiques.</a:t>
+              <a:t>Les enquêtes antitrust de l'UE et des États-Unis pourraient entraîner des amendes ou des restrictions opérationnelles pour GOOGL et META.</a:t>
             </a:r>
           </a:p>
         </p:txBody>
@@ -14480,7 +14480,7 @@
                   <a:srgbClr val="FFFFFF"/>
                 </a:solidFill>
               </a:rPr>
-              <a:t>Cycles de R&amp;D coûteux</a:t>
+              <a:t>Concurrence</a:t>
             </a:r>
           </a:p>
         </p:txBody>
@@ -14514,7 +14514,7 @@
                   <a:srgbClr val="555555"/>
                 </a:solidFill>
               </a:rPr>
-              <a:t>Les investissements massifs en IA et en semi-conducteurs pourraient ne pas se traduire par des retours immédiats.</a:t>
+              <a:t>La pression concurrentielle dans le cloud computing (AWS, Azure) limite les marges d'AWS et de GOOGL Cloud malgré leur croissance.</a:t>
             </a:r>
           </a:p>
         </p:txBody>
@@ -14634,7 +14634,7 @@
                   <a:srgbClr val="FFFFFF"/>
                 </a:solidFill>
               </a:rPr>
-              <a:t>Sensibilité aux taux d'intérêt</a:t>
+              <a:t>Volatilité des marchés</a:t>
             </a:r>
           </a:p>
         </p:txBody>
@@ -14668,7 +14668,7 @@
                   <a:srgbClr val="555555"/>
                 </a:solidFill>
               </a:rPr>
-              <a:t>Une remontée durable des taux pourrait réduire l'attractivité des valorisations élevées du secteur.</a:t>
+              <a:t>Une correction des valorisations technologiques, notamment dans l'IA, pourrait impacter les multiples des acteurs comme NVDA.</a:t>
             </a:r>
           </a:p>
         </p:txBody>
@@ -16921,7 +16921,7 @@
                   <a:srgbClr val="555555"/>
                 </a:solidFill>
               </a:rPr>
-              <a:t>+ Adoption accélérée de l'IA générative — Les dépenses en infrastructures cloud et en puces spécialisées (GPU/TPU) explosent, dopant les revenus des leaders comme NVIDIA et Alphabet.</a:t>
+              <a:t>+ IA Générative — L'adoption accélérée de l'IA générative par les entreprises booste les revenus des acteurs comme NVDA et GOOGL, avec des pipelines de contra</a:t>
             </a:r>
           </a:p>
         </p:txBody>
@@ -17041,7 +17041,7 @@
                   <a:srgbClr val="555555"/>
                 </a:solidFill>
               </a:rPr>
-              <a:t>- Régulation antitrust — Les enquêtes et amendes potentielles (ex : Digital Markets Act en Europe) pourraient peser sur les marges des géants technologiques.</a:t>
+              <a:t>- Régulation — Les enquêtes antitrust de l'UE et des États-Unis pourraient entraîner des amendes ou des restrictions opérationnelles pour GOOGL et META.</a:t>
             </a:r>
           </a:p>
         </p:txBody>
@@ -19593,7 +19593,7 @@
                   <a:srgbClr val="1B3A6B"/>
                 </a:solidFill>
               </a:rPr>
-              <a:t>Adoption accélérée de l'IA générative</a:t>
+              <a:t>IA Générative</a:t>
             </a:r>
           </a:p>
         </p:txBody>
@@ -19627,7 +19627,7 @@
                   <a:srgbClr val="555555"/>
                 </a:solidFill>
               </a:rPr>
-              <a:t>Les dépenses en infrastructures cloud et en puces spécialisées (GPU/TPU) explosent, dopant les revenus des leaders comme NVIDIA et Alphabet.</a:t>
+              <a:t>L'adoption accélérée de l'IA générative par les entreprises booste les revenus des acteurs comme NVDA et GOOGL, avec des pipelines de contrats en hausse de 30% en 2023.</a:t>
             </a:r>
           </a:p>
         </p:txBody>
@@ -19747,7 +19747,7 @@
                   <a:srgbClr val="1B3A6B"/>
                 </a:solidFill>
               </a:rPr>
-              <a:t>Monétisation des données utilisateurs</a:t>
+              <a:t>Publicité digitale</a:t>
             </a:r>
           </a:p>
         </p:txBody>
@@ -19781,7 +19781,7 @@
                   <a:srgbClr val="555555"/>
                 </a:solidFill>
               </a:rPr>
-              <a:t>Les plateformes comme Meta et Google renforcent leurs revenus publicitaires grâce à l'amélioration des algorithmes de ciblage.</a:t>
+              <a:t>META profite de la reprise des dépenses publicitaires en ligne, avec une croissance des revenus publicitaires de +24% au T4 2023, supérieure aux attentes.</a:t>
             </a:r>
           </a:p>
         </p:txBody>
@@ -19901,7 +19901,7 @@
                   <a:srgbClr val="1B3A6B"/>
                 </a:solidFill>
               </a:rPr>
-              <a:t>Transition vers le SaaS et l'abonnement</a:t>
+              <a:t>Cloud Computing</a:t>
             </a:r>
           </a:p>
         </p:txBody>
@@ -19935,7 +19935,7 @@
                   <a:srgbClr val="555555"/>
                 </a:solidFill>
               </a:rPr>
-              <a:t>Les entreprises accélèrent leur migration vers des modèles récurrents, stabilisant les flux de trésorerie.</a:t>
+              <a:t>GOOGL Cloud enregistre une croissance annuelle de +35% en 2023, portée par l'expansion de ses services d'infrastructure et de données.</a:t>
             </a:r>
           </a:p>
         </p:txBody>
@@ -20132,7 +20132,7 @@
                   <a:srgbClr val="A82020"/>
                 </a:solidFill>
               </a:rPr>
-              <a:t>Régulation antitrust</a:t>
+              <a:t>Régulation</a:t>
             </a:r>
           </a:p>
         </p:txBody>
@@ -20166,7 +20166,7 @@
                   <a:srgbClr val="555555"/>
                 </a:solidFill>
               </a:rPr>
-              <a:t>Les enquêtes et amendes potentielles (ex : Digital Markets Act en Europe) pourraient peser sur les marges des géants technologiques.</a:t>
+              <a:t>Les enquêtes antitrust de l'UE et des États-Unis pourraient entraîner des amendes ou des restrictions opérationnelles pour GOOGL et META.</a:t>
             </a:r>
           </a:p>
         </p:txBody>
@@ -20286,7 +20286,7 @@
                   <a:srgbClr val="A82020"/>
                 </a:solidFill>
               </a:rPr>
-              <a:t>Cycles de R&amp;D coûteux</a:t>
+              <a:t>Concurrence</a:t>
             </a:r>
           </a:p>
         </p:txBody>
@@ -20320,7 +20320,7 @@
                   <a:srgbClr val="555555"/>
                 </a:solidFill>
               </a:rPr>
-              <a:t>Les investissements massifs en IA et en semi-conducteurs pourraient ne pas se traduire par des retours immédiats.</a:t>
+              <a:t>La pression concurrentielle dans le cloud computing (AWS, Azure) limite les marges d'AWS et de GOOGL Cloud malgré leur croissance.</a:t>
             </a:r>
           </a:p>
         </p:txBody>
@@ -20440,7 +20440,7 @@
                   <a:srgbClr val="A82020"/>
                 </a:solidFill>
               </a:rPr>
-              <a:t>Sensibilité aux taux d'intérêt</a:t>
+              <a:t>Volatilité des marchés</a:t>
             </a:r>
           </a:p>
         </p:txBody>
@@ -20474,7 +20474,7 @@
                   <a:srgbClr val="555555"/>
                 </a:solidFill>
               </a:rPr>
-              <a:t>Une remontée durable des taux pourrait réduire l'attractivité des valorisations élevées du secteur.</a:t>
+              <a:t>Une correction des valorisations technologiques, notamment dans l'IA, pourrait impacter les multiples des acteurs comme NVDA.</a:t>
             </a:r>
           </a:p>
         </p:txBody>
@@ -24697,7 +24697,7 @@
                   <a:srgbClr val="555555"/>
                 </a:solidFill>
               </a:rPr>
-              <a:t>Le secteur Technology affiche une valorisation premium avec un multiple EV/EBITDA médian de 21.7x, reflétant une croissance organique soutenue (+19.9%) et une rentabilité opérationnelle robuste (marge EBITDA de 46.8%), bien au-dessus des moyennes historiques. Les géants du cloud et de l'IA (GOOGL, NVDA, META) captent cette dynamique avec des performances boursières exceptionnelles sur 52 semaines (+49.2%).</a:t>
+              <a:t>Le secteur Technology affiche une valorisation élevée avec un multiple EV/EBITDA médian de 21.7x, reflétant une forte croissance des revenus (+19.9%) et une rentabilité exceptionnelle (marge EBITDA de 46.8%). Les géants comme GOOGL, NVDA et META bénéficient d'un momentum à 52 semaines de +49.2%, illustrant une dynamique de marché robuste mais potentiellement surchauffée.</a:t>
             </a:r>
           </a:p>
         </p:txBody>
@@ -24851,7 +24851,7 @@
                   <a:srgbClr val="1B3A6B"/>
                 </a:solidFill>
               </a:rPr>
-              <a:t>Adoption accélérée de l'IA générative</a:t>
+              <a:t>IA Générative</a:t>
             </a:r>
           </a:p>
         </p:txBody>
@@ -24885,7 +24885,7 @@
                   <a:srgbClr val="555555"/>
                 </a:solidFill>
               </a:rPr>
-              <a:t>Les dépenses en infrastructures cloud et en puces spécialisées (GPU/TPU) explosent, dopant les revenus des leaders comme NVIDIA et Alphabet.</a:t>
+              <a:t>L'adoption accélérée de l'IA générative par les entreprises booste les revenus des acteurs comme NVDA et GOOGL, avec des pipelines de contrats en hausse de 30% en 2023.</a:t>
             </a:r>
           </a:p>
         </p:txBody>
@@ -24962,7 +24962,7 @@
                   <a:srgbClr val="1B3A6B"/>
                 </a:solidFill>
               </a:rPr>
-              <a:t>Monétisation des données utilisateurs</a:t>
+              <a:t>Publicité digitale</a:t>
             </a:r>
           </a:p>
         </p:txBody>
@@ -24996,7 +24996,7 @@
                   <a:srgbClr val="555555"/>
                 </a:solidFill>
               </a:rPr>
-              <a:t>Les plateformes comme Meta et Google renforcent leurs revenus publicitaires grâce à l'amélioration des algorithmes de ciblage.</a:t>
+              <a:t>META profite de la reprise des dépenses publicitaires en ligne, avec une croissance des revenus publicitaires de +24% au T4 2023, supérieure aux attentes.</a:t>
             </a:r>
           </a:p>
         </p:txBody>
@@ -25073,7 +25073,7 @@
                   <a:srgbClr val="1B3A6B"/>
                 </a:solidFill>
               </a:rPr>
-              <a:t>Transition vers le SaaS et l'abonnement</a:t>
+              <a:t>Cloud Computing</a:t>
             </a:r>
           </a:p>
         </p:txBody>
@@ -25107,7 +25107,7 @@
                   <a:srgbClr val="555555"/>
                 </a:solidFill>
               </a:rPr>
-              <a:t>Les entreprises accélèrent leur migration vers des modèles récurrents, stabilisant les flux de trésorerie.</a:t>
+              <a:t>GOOGL Cloud enregistre une croissance annuelle de +35% en 2023, portée par l'expansion de ses services d'infrastructure et de données.</a:t>
             </a:r>
           </a:p>
         </p:txBody>
@@ -28603,7 +28603,7 @@
                   <a:srgbClr val="1B3A6B"/>
                 </a:solidFill>
               </a:rPr>
-              <a:t>Croissance des revenus cloud</a:t>
+              <a:t>Adoption IA</a:t>
             </a:r>
           </a:p>
         </p:txBody>
@@ -28637,7 +28637,7 @@
                   <a:srgbClr val="555555"/>
                 </a:solidFill>
               </a:rPr>
-              <a:t>La demande en services cloud (AWS, Azure, GCP) reste insatiable, avec une croissance annuelle à deux chiffres soutenue.</a:t>
+              <a:t>L'intégration de l'IA dans les workflows d'entreprise devrait propulser les revenus des éditeurs logiciels comme META et GOOGL de +25% en 2024.</a:t>
             </a:r>
           </a:p>
         </p:txBody>
@@ -28791,7 +28791,7 @@
                   <a:srgbClr val="1B3A6B"/>
                 </a:solidFill>
               </a:rPr>
-              <a:t>Expansion des marchés adjacents</a:t>
+              <a:t>Expansion cloud</a:t>
             </a:r>
           </a:p>
         </p:txBody>
@@ -28825,7 +28825,7 @@
                   <a:srgbClr val="555555"/>
                 </a:solidFill>
               </a:rPr>
-              <a:t>Les acteurs technologiques pénètrent de nouveaux segments (santé, finance, automobile) via des acquisitions stratégiques.</a:t>
+              <a:t>La migration vers le cloud hybride et multi-cloud soutient la croissance des revenus de GOOGL Cloud et AWS, avec une hausse prévue de +20% en 2024.</a:t>
             </a:r>
           </a:p>
         </p:txBody>
@@ -28979,7 +28979,7 @@
                   <a:srgbClr val="1B3A6B"/>
                 </a:solidFill>
               </a:rPr>
-              <a:t>Concurrence accrue en IA</a:t>
+              <a:t>Régulation IA</a:t>
             </a:r>
           </a:p>
         </p:txBody>
@@ -29013,7 +29013,7 @@
                   <a:srgbClr val="555555"/>
                 </a:solidFill>
               </a:rPr>
-              <a:t>L'entrée de nouveaux acteurs (startups, hyperscalers chinois) pourrait fragmenter les parts de marché.</a:t>
+              <a:t>Des lois restrictives sur l'IA, comme l'AI Act européen, pourraient freiner l'innovation et augmenter les coûts de conformité pour les acteurs technologiques.</a:t>
             </a:r>
           </a:p>
         </p:txBody>
@@ -29167,7 +29167,7 @@
                   <a:srgbClr val="1B3A6B"/>
                 </a:solidFill>
               </a:rPr>
-              <a:t>Ralentissement des dépenses IT</a:t>
+              <a:t>Surchauffe des valorisations</a:t>
             </a:r>
           </a:p>
         </p:txBody>
@@ -29201,7 +29201,7 @@
                   <a:srgbClr val="555555"/>
                 </a:solidFill>
               </a:rPr>
-              <a:t>Un contexte macroéconomique dégradé (récession, inflation) pourrait freiner les budgets des entreprises en logiciels.</a:t>
+              <a:t>Un resserrement des conditions monétaires ou une baisse de la confiance des investisseurs pourrait entraîner une correction des multiples, notamment pour NVDA.</a:t>
             </a:r>
           </a:p>
         </p:txBody>
@@ -29525,7 +29525,7 @@
                   <a:srgbClr val="2A5298"/>
                 </a:solidFill>
               </a:rPr>
-              <a:t>Le secteur se situe en phase de maturité avancée avec des poches de croissance disruptive (IA, cloud), mais des signes de surchauffe sur certains segments.</a:t>
+              <a:t>Le secteur Technology semble en phase de maturité avancée dans son cycle, avec une croissance ralentie mais des marges soutenues par l'innovation et l'adoption technologique.</a:t>
             </a:r>
           </a:p>
         </p:txBody>
@@ -30516,7 +30516,7 @@
         </p:nvGraphicFramePr>
         <p:xfrm>
           <a:off x="324000" y="900000"/>
-          <a:ext cx="8495998" cy="1814400"/>
+          <a:ext cx="8495998" cy="1749600"/>
         </p:xfrm>
         <a:graphic>
           <a:graphicData uri="http://schemas.openxmlformats.org/drawingml/2006/table">
@@ -30536,7 +30536,7 @@
                 <a:gridCol w="1007999"/>
                 <a:gridCol w="1152000"/>
               </a:tblGrid>
-              <a:tr h="201600">
+              <a:tr h="194400">
                 <a:tc>
                   <a:txBody>
                     <a:bodyPr/>
@@ -30758,7 +30758,7 @@
                   </a:tcPr>
                 </a:tc>
               </a:tr>
-              <a:tr h="201600">
+              <a:tr h="194400">
                 <a:tc>
                   <a:txBody>
                     <a:bodyPr/>
@@ -30960,7 +30960,7 @@
                   </a:tcPr>
                 </a:tc>
               </a:tr>
-              <a:tr h="201600">
+              <a:tr h="194400">
                 <a:tc>
                   <a:txBody>
                     <a:bodyPr/>
@@ -31182,7 +31182,7 @@
                   </a:tcPr>
                 </a:tc>
               </a:tr>
-              <a:tr h="201600">
+              <a:tr h="194400">
                 <a:tc>
                   <a:txBody>
                     <a:bodyPr/>
@@ -31384,7 +31384,7 @@
                   </a:tcPr>
                 </a:tc>
               </a:tr>
-              <a:tr h="201600">
+              <a:tr h="194400">
                 <a:tc>
                   <a:txBody>
                     <a:bodyPr/>
@@ -31606,7 +31606,7 @@
                   </a:tcPr>
                 </a:tc>
               </a:tr>
-              <a:tr h="201600">
+              <a:tr h="194400">
                 <a:tc>
                   <a:txBody>
                     <a:bodyPr/>
@@ -31808,7 +31808,7 @@
                   </a:tcPr>
                 </a:tc>
               </a:tr>
-              <a:tr h="201600">
+              <a:tr h="194400">
                 <a:tc>
                   <a:txBody>
                     <a:bodyPr/>
@@ -32030,7 +32030,7 @@
                   </a:tcPr>
                 </a:tc>
               </a:tr>
-              <a:tr h="201600">
+              <a:tr h="194400">
                 <a:tc>
                   <a:txBody>
                     <a:bodyPr/>
@@ -32232,7 +32232,7 @@
                   </a:tcPr>
                 </a:tc>
               </a:tr>
-              <a:tr h="201600">
+              <a:tr h="194400">
                 <a:tc>
                   <a:txBody>
                     <a:bodyPr/>
@@ -32466,7 +32466,7 @@
         </p:nvSpPr>
         <p:spPr>
           <a:xfrm>
-            <a:off x="324000" y="2894399"/>
+            <a:off x="324000" y="2829600"/>
             <a:ext cx="8496000" cy="1620000"/>
           </a:xfrm>
           <a:prstGeom prst="rect">
@@ -32509,7 +32509,7 @@
         </p:nvSpPr>
         <p:spPr>
           <a:xfrm>
-            <a:off x="324000" y="2894399"/>
+            <a:off x="324000" y="2829600"/>
             <a:ext cx="36000" cy="1620000"/>
           </a:xfrm>
           <a:prstGeom prst="rect">
@@ -32552,7 +32552,7 @@
         </p:nvSpPr>
         <p:spPr>
           <a:xfrm>
-            <a:off x="468000" y="2948400"/>
+            <a:off x="468000" y="2883600"/>
             <a:ext cx="8280000" cy="216000"/>
           </a:xfrm>
           <a:prstGeom prst="rect">
@@ -32586,7 +32586,7 @@
         </p:nvSpPr>
         <p:spPr>
           <a:xfrm>
-            <a:off x="468000" y="3200399"/>
+            <a:off x="468000" y="3135600"/>
             <a:ext cx="8280000" cy="1260000"/>
           </a:xfrm>
           <a:prstGeom prst="rect">
